--- a/Future-Shellf-PCSGA-2026.pptx
+++ b/Future-Shellf-PCSGA-2026.pptx
@@ -23,6 +23,8 @@
     <p:sldId id="271" r:id="rId23"/>
     <p:sldId id="272" r:id="rId24"/>
     <p:sldId id="273" r:id="rId25"/>
+    <p:sldId id="274" r:id="rId26"/>
+    <p:sldId id="275" r:id="rId27"/>
   </p:sldIdLst>
   <p:sldSz cx="12191695" cy="6858000" type="screen4x3"/>
   <p:notesSz cx="6858000" cy="9144000"/>
@@ -589,7 +591,7 @@
           <a:lstStyle/>
           <a:p>
             <a:r>
-              <a:t>Leave-one-family-out CV is the honest number.</a:t>
+              <a:t>A small gap between the two means the prediction isn't just memorizing our nine families. Spend ~45 s here — every rho on the next three slides depends on it.</a:t>
             </a:r>
           </a:p>
         </p:txBody>
@@ -659,7 +661,7 @@
           <a:lstStyle/>
           <a:p>
             <a:r>
-              <a:t>Metabolic depression as a resilience strategy — consistent with the PeerJ survival result.</a:t>
+              <a:t>Leave-one-family-out CV is the honest number.</a:t>
             </a:r>
           </a:p>
         </p:txBody>
@@ -729,7 +731,7 @@
           <a:lstStyle/>
           <a:p>
             <a:r>
-              <a:t>Measured under freshwater + heat. Blending averages out individual noise.</a:t>
+              <a:t>Metabolic depression as a resilience strategy — consistent with the PeerJ survival result.</a:t>
             </a:r>
           </a:p>
         </p:txBody>
@@ -799,7 +801,7 @@
           <a:lstStyle/>
           <a:p>
             <a:r>
-              <a:t>Half a day of dye work stands in for a season of grow-out.</a:t>
+              <a:t>Walk the curve once: climbs, peaks, then drops. Early rise, steadiness, time to steepest drop, depth of collapse. Then the next slide says which direction is good.</a:t>
             </a:r>
           </a:p>
         </p:txBody>
@@ -869,7 +871,7 @@
           <a:lstStyle/>
           <a:p>
             <a:r>
-              <a:t>This is the operational pitch: early warning + management comparison.</a:t>
+              <a:t>Measured under freshwater + heat. Blending averages out individual noise.</a:t>
             </a:r>
           </a:p>
         </p:txBody>
@@ -939,7 +941,7 @@
           <a:lstStyle/>
           <a:p>
             <a:r>
-              <a:t>Short — leave time for questions.</a:t>
+              <a:t>Half a day of dye work stands in for a season of grow-out.</a:t>
             </a:r>
           </a:p>
         </p:txBody>
@@ -965,6 +967,146 @@
 </file>
 
 <file path=ppt/notesSlides/notesSlide16.xml><?xml version="1.0" encoding="utf-8"?>
+<p:notes xmlns:a="http://schemas.openxmlformats.org/drawingml/2006/main" xmlns:p="http://schemas.openxmlformats.org/presentationml/2006/main" xmlns:r="http://schemas.openxmlformats.org/officeDocument/2006/relationships">
+  <p:cSld>
+    <p:spTree>
+      <p:nvGrpSpPr>
+        <p:cNvPr id="1" name=""/>
+        <p:cNvGrpSpPr/>
+        <p:nvPr/>
+      </p:nvGrpSpPr>
+      <p:grpSpPr>
+        <a:xfrm>
+          <a:off x="0" y="0"/>
+          <a:ext cx="0" cy="0"/>
+          <a:chOff x="0" y="0"/>
+          <a:chExt cx="0" cy="0"/>
+        </a:xfrm>
+      </p:grpSpPr>
+      <p:sp>
+        <p:nvSpPr>
+          <p:cNvPr id="2" name="Slide Image Placeholder 1"/>
+          <p:cNvSpPr>
+            <a:spLocks noGrp="1"/>
+          </p:cNvSpPr>
+          <p:nvPr>
+            <p:ph type="sldImg" idx="2"/>
+          </p:nvPr>
+        </p:nvSpPr>
+        <p:spPr/>
+      </p:sp>
+      <p:sp>
+        <p:nvSpPr>
+          <p:cNvPr id="3" name="Notes Placeholder 2"/>
+          <p:cNvSpPr>
+            <a:spLocks noGrp="1"/>
+          </p:cNvSpPr>
+          <p:nvPr>
+            <p:ph type="body" idx="3" sz="quarter"/>
+          </p:nvPr>
+        </p:nvSpPr>
+        <p:spPr/>
+        <p:txBody>
+          <a:bodyPr/>
+          <a:lstStyle/>
+          <a:p>
+            <a:r>
+              <a:t>This is the operational pitch: early warning + management comparison.</a:t>
+            </a:r>
+          </a:p>
+        </p:txBody>
+      </p:sp>
+      <p:sp>
+        <p:nvSpPr>
+          <p:cNvPr id="4" name="Slide Number Placeholder 3"/>
+          <p:cNvSpPr>
+            <a:spLocks noGrp="1"/>
+          </p:cNvSpPr>
+          <p:nvPr>
+            <p:ph type="sldNum" idx="5" sz="quarter"/>
+          </p:nvPr>
+        </p:nvSpPr>
+        <p:spPr/>
+      </p:sp>
+    </p:spTree>
+  </p:cSld>
+  <p:clrMapOvr>
+    <a:masterClrMapping/>
+  </p:clrMapOvr>
+</p:notes>
+</file>
+
+<file path=ppt/notesSlides/notesSlide17.xml><?xml version="1.0" encoding="utf-8"?>
+<p:notes xmlns:a="http://schemas.openxmlformats.org/drawingml/2006/main" xmlns:p="http://schemas.openxmlformats.org/presentationml/2006/main" xmlns:r="http://schemas.openxmlformats.org/officeDocument/2006/relationships">
+  <p:cSld>
+    <p:spTree>
+      <p:nvGrpSpPr>
+        <p:cNvPr id="1" name=""/>
+        <p:cNvGrpSpPr/>
+        <p:nvPr/>
+      </p:nvGrpSpPr>
+      <p:grpSpPr>
+        <a:xfrm>
+          <a:off x="0" y="0"/>
+          <a:ext cx="0" cy="0"/>
+          <a:chOff x="0" y="0"/>
+          <a:chExt cx="0" cy="0"/>
+        </a:xfrm>
+      </p:grpSpPr>
+      <p:sp>
+        <p:nvSpPr>
+          <p:cNvPr id="2" name="Slide Image Placeholder 1"/>
+          <p:cNvSpPr>
+            <a:spLocks noGrp="1"/>
+          </p:cNvSpPr>
+          <p:nvPr>
+            <p:ph type="sldImg" idx="2"/>
+          </p:nvPr>
+        </p:nvSpPr>
+        <p:spPr/>
+      </p:sp>
+      <p:sp>
+        <p:nvSpPr>
+          <p:cNvPr id="3" name="Notes Placeholder 2"/>
+          <p:cNvSpPr>
+            <a:spLocks noGrp="1"/>
+          </p:cNvSpPr>
+          <p:nvPr>
+            <p:ph type="body" idx="3" sz="quarter"/>
+          </p:nvPr>
+        </p:nvSpPr>
+        <p:spPr/>
+        <p:txBody>
+          <a:bodyPr/>
+          <a:lstStyle/>
+          <a:p>
+            <a:r>
+              <a:t>Short — leave time for questions.</a:t>
+            </a:r>
+          </a:p>
+        </p:txBody>
+      </p:sp>
+      <p:sp>
+        <p:nvSpPr>
+          <p:cNvPr id="4" name="Slide Number Placeholder 3"/>
+          <p:cNvSpPr>
+            <a:spLocks noGrp="1"/>
+          </p:cNvSpPr>
+          <p:nvPr>
+            <p:ph type="sldNum" idx="5" sz="quarter"/>
+          </p:nvPr>
+        </p:nvSpPr>
+        <p:spPr/>
+      </p:sp>
+    </p:spTree>
+  </p:cSld>
+  <p:clrMapOvr>
+    <a:masterClrMapping/>
+  </p:clrMapOvr>
+</p:notes>
+</file>
+
+<file path=ppt/notesSlides/notesSlide18.xml><?xml version="1.0" encoding="utf-8"?>
 <p:notes xmlns:a="http://schemas.openxmlformats.org/drawingml/2006/main" xmlns:p="http://schemas.openxmlformats.org/presentationml/2006/main" xmlns:r="http://schemas.openxmlformats.org/officeDocument/2006/relationships">
   <p:cSld>
     <p:spTree>
@@ -4963,7 +5105,7 @@
               </a:defRPr>
             </a:pPr>
             <a:r>
-              <a:t>Tough families crash later</a:t>
+              <a:t>Reading the score: what the numbers mean</a:t>
             </a:r>
           </a:p>
         </p:txBody>
@@ -5042,45 +5184,21 @@
               </a:defRPr>
             </a:pPr>
             <a:r>
-              <a:t>Single best metabolic predictor</a:t>
-            </a:r>
-          </a:p>
-        </p:txBody>
-      </p:sp>
-      <p:pic>
-        <p:nvPicPr>
-          <p:cNvPr id="5" name="Picture 4" descr="best_single_predictor_scatter.png"/>
-          <p:cNvPicPr>
-            <a:picLocks noChangeAspect="1"/>
-          </p:cNvPicPr>
-          <p:nvPr/>
-        </p:nvPicPr>
-        <p:blipFill>
-          <a:blip r:embed="rId2"/>
-          <a:stretch>
-            <a:fillRect/>
-          </a:stretch>
-        </p:blipFill>
-        <p:spPr>
-          <a:xfrm>
-            <a:off x="1490472" y="2057400"/>
-            <a:ext cx="4587240" cy="3931920"/>
-          </a:xfrm>
-          <a:prstGeom prst="rect">
-            <a:avLst/>
-          </a:prstGeom>
-        </p:spPr>
-      </p:pic>
-      <p:sp>
-        <p:nvSpPr>
-          <p:cNvPr id="6" name="TextBox 5"/>
+              <a:t>Both numbers ask the same thing, on a scale of -1 to +1</a:t>
+            </a:r>
+          </a:p>
+        </p:txBody>
+      </p:sp>
+      <p:sp>
+        <p:nvSpPr>
+          <p:cNvPr id="5" name="TextBox 4"/>
           <p:cNvSpPr txBox="1"/>
           <p:nvPr/>
         </p:nvSpPr>
         <p:spPr>
           <a:xfrm>
-            <a:off x="7040880" y="1828800"/>
-            <a:ext cx="4480560" cy="4023360"/>
+            <a:off x="777240" y="2103120"/>
+            <a:ext cx="10607040" cy="548640"/>
           </a:xfrm>
           <a:prstGeom prst="rect">
             <a:avLst/>
@@ -5094,62 +5212,158 @@
           <a:lstStyle/>
           <a:p>
             <a:pPr>
+              <a:defRPr sz="2300" b="1">
+                <a:solidFill>
+                  <a:srgbClr val="1B3A5C"/>
+                </a:solidFill>
+              </a:defRPr>
+            </a:pPr>
+            <a:r>
+              <a:t>Does the test rank the families in their true survival order?</a:t>
+            </a:r>
+          </a:p>
+        </p:txBody>
+      </p:sp>
+      <p:sp>
+        <p:nvSpPr>
+          <p:cNvPr id="6" name="TextBox 5"/>
+          <p:cNvSpPr txBox="1"/>
+          <p:nvPr/>
+        </p:nvSpPr>
+        <p:spPr>
+          <a:xfrm>
+            <a:off x="777240" y="2788920"/>
+            <a:ext cx="10607040" cy="2651760"/>
+          </a:xfrm>
+          <a:prstGeom prst="rect">
+            <a:avLst/>
+          </a:prstGeom>
+          <a:noFill/>
+        </p:spPr>
+        <p:txBody>
+          <a:bodyPr wrap="square">
+            <a:spAutoFit/>
+          </a:bodyPr>
+          <a:lstStyle/>
+          <a:p>
+            <a:pPr>
+              <a:spcBef>
+                <a:spcPts val="1400"/>
+              </a:spcBef>
+              <a:defRPr sz="2100" b="1">
+                <a:solidFill>
+                  <a:srgbClr val="0E7C86"/>
+                </a:solidFill>
+              </a:defRPr>
+            </a:pPr>
+            <a:r>
+              <a:t>Spearman rho</a:t>
+            </a:r>
+          </a:p>
+          <a:p>
+            <a:pPr>
+              <a:spcBef>
+                <a:spcPts val="400"/>
+              </a:spcBef>
               <a:spcAft>
+                <a:spcPts val="1800"/>
+              </a:spcAft>
+              <a:defRPr sz="1800">
+                <a:solidFill>
+                  <a:srgbClr val="444A52"/>
+                </a:solidFill>
+              </a:defRPr>
+            </a:pPr>
+            <a:r>
+              <a:t>A ranking agreement score. +1 = same order (the test's toughest really is the toughest), 0 = unrelated, -1 = reversed. We rank rather than use raw values so one odd family can't distort it.</a:t>
+            </a:r>
+          </a:p>
+          <a:p>
+            <a:pPr>
+              <a:spcBef>
                 <a:spcPts val="1400"/>
+              </a:spcBef>
+              <a:defRPr sz="2100" b="1">
+                <a:solidFill>
+                  <a:srgbClr val="0E7C86"/>
+                </a:solidFill>
+              </a:defRPr>
+            </a:pPr>
+            <a:r>
+              <a:t>LOFO-CV rho</a:t>
+            </a:r>
+          </a:p>
+          <a:p>
+            <a:pPr>
+              <a:spcBef>
+                <a:spcPts val="400"/>
+              </a:spcBef>
+              <a:spcAft>
+                <a:spcPts val="1800"/>
               </a:spcAft>
-              <a:defRPr sz="1700">
+              <a:defRPr sz="1800">
                 <a:solidFill>
                   <a:srgbClr val="444A52"/>
                 </a:solidFill>
               </a:defRPr>
             </a:pPr>
             <a:r>
-              <a:t>• Each dot is a family.</a:t>
-            </a:r>
-          </a:p>
-          <a:p>
-            <a:pPr>
-              <a:spcAft>
-                <a:spcPts val="1400"/>
-              </a:spcAft>
-              <a:defRPr sz="1700">
-                <a:solidFill>
-                  <a:srgbClr val="444A52"/>
+              <a:t>The same score, measured honestly on families the model never saw: hide one family, predict it from the other eight, repeat for all nine, then compare.</a:t>
+            </a:r>
+          </a:p>
+        </p:txBody>
+      </p:sp>
+      <p:sp>
+        <p:nvSpPr>
+          <p:cNvPr id="7" name="Rectangle 6"/>
+          <p:cNvSpPr/>
+          <p:nvPr/>
+        </p:nvSpPr>
+        <p:spPr>
+          <a:xfrm>
+            <a:off x="777240" y="5623560"/>
+            <a:ext cx="10607040" cy="777240"/>
+          </a:xfrm>
+          <a:prstGeom prst="rect">
+            <a:avLst/>
+          </a:prstGeom>
+          <a:solidFill>
+            <a:srgbClr val="EFF3F6"/>
+          </a:solidFill>
+          <a:ln w="15875">
+            <a:solidFill>
+              <a:srgbClr val="0E7C86"/>
+            </a:solidFill>
+          </a:ln>
+          <a:effectLst/>
+        </p:spPr>
+        <p:style>
+          <a:lnRef idx="1">
+            <a:schemeClr val="accent1"/>
+          </a:lnRef>
+          <a:fillRef idx="3">
+            <a:schemeClr val="accent1"/>
+          </a:fillRef>
+          <a:effectRef idx="2">
+            <a:schemeClr val="accent1"/>
+          </a:effectRef>
+          <a:fontRef idx="minor">
+            <a:schemeClr val="lt1"/>
+          </a:fontRef>
+        </p:style>
+        <p:txBody>
+          <a:bodyPr rtlCol="0" anchor="ctr" wrap="square"/>
+          <a:lstStyle/>
+          <a:p>
+            <a:pPr algn="ctr">
+              <a:defRPr sz="1900" b="1">
+                <a:solidFill>
+                  <a:srgbClr val="1B3A5C"/>
                 </a:solidFill>
               </a:defRPr>
             </a:pPr>
             <a:r>
-              <a:t>• X: time to the steepest metabolic decline under freshwater + heat. Further right = crashes later.</a:t>
-            </a:r>
-          </a:p>
-          <a:p>
-            <a:pPr>
-              <a:spcAft>
-                <a:spcPts val="1400"/>
-              </a:spcAft>
-              <a:defRPr sz="1700">
-                <a:solidFill>
-                  <a:srgbClr val="444A52"/>
-                </a:solidFill>
-              </a:defRPr>
-            </a:pPr>
-            <a:r>
-              <a:t>• Y: survival score (higher = tougher).</a:t>
-            </a:r>
-          </a:p>
-          <a:p>
-            <a:pPr>
-              <a:spcAft>
-                <a:spcPts val="1400"/>
-              </a:spcAft>
-              <a:defRPr sz="1700">
-                <a:solidFill>
-                  <a:srgbClr val="444A52"/>
-                </a:solidFill>
-              </a:defRPr>
-            </a:pPr>
-            <a:r>
-              <a:t>• rho = 0.90; cross-validated rho = 0.81 when each family is predicted from the other eight.</a:t>
+              <a:t>Spearman rho = optimistic best case.  LOFO-CV rho = the trustworthy one.</a:t>
             </a:r>
           </a:p>
         </p:txBody>
@@ -5202,7 +5416,7 @@
               </a:defRPr>
             </a:pPr>
             <a:r>
-              <a:t>The counterintuitive part</a:t>
+              <a:t>Tough families crash later</a:t>
             </a:r>
           </a:p>
         </p:txBody>
@@ -5281,21 +5495,45 @@
               </a:defRPr>
             </a:pPr>
             <a:r>
-              <a:t>Hardy oysters stay calm</a:t>
-            </a:r>
-          </a:p>
-        </p:txBody>
-      </p:sp>
-      <p:sp>
-        <p:nvSpPr>
-          <p:cNvPr id="5" name="TextBox 4"/>
+              <a:t>Single best metabolic predictor</a:t>
+            </a:r>
+          </a:p>
+        </p:txBody>
+      </p:sp>
+      <p:pic>
+        <p:nvPicPr>
+          <p:cNvPr id="5" name="Picture 4" descr="best_single_predictor_scatter.png"/>
+          <p:cNvPicPr>
+            <a:picLocks noChangeAspect="1"/>
+          </p:cNvPicPr>
+          <p:nvPr/>
+        </p:nvPicPr>
+        <p:blipFill>
+          <a:blip r:embed="rId2"/>
+          <a:stretch>
+            <a:fillRect/>
+          </a:stretch>
+        </p:blipFill>
+        <p:spPr>
+          <a:xfrm>
+            <a:off x="1490472" y="2057400"/>
+            <a:ext cx="4587240" cy="3931920"/>
+          </a:xfrm>
+          <a:prstGeom prst="rect">
+            <a:avLst/>
+          </a:prstGeom>
+        </p:spPr>
+      </p:pic>
+      <p:sp>
+        <p:nvSpPr>
+          <p:cNvPr id="6" name="TextBox 5"/>
           <p:cNvSpPr txBox="1"/>
           <p:nvPr/>
         </p:nvSpPr>
         <p:spPr>
           <a:xfrm>
-            <a:off x="777240" y="2286000"/>
-            <a:ext cx="10607040" cy="4206240"/>
+            <a:off x="7040880" y="1828800"/>
+            <a:ext cx="4480560" cy="4023360"/>
           </a:xfrm>
           <a:prstGeom prst="rect">
             <a:avLst/>
@@ -5310,61 +5548,61 @@
           <a:p>
             <a:pPr>
               <a:spcAft>
-                <a:spcPts val="2400"/>
+                <a:spcPts val="1400"/>
               </a:spcAft>
-              <a:defRPr sz="2400">
-                <a:solidFill>
-                  <a:srgbClr val="22262B"/>
+              <a:defRPr sz="1700">
+                <a:solidFill>
+                  <a:srgbClr val="444A52"/>
                 </a:solidFill>
               </a:defRPr>
             </a:pPr>
             <a:r>
-              <a:t>• Families whose metabolism spikes hardest when heated survive the least.</a:t>
+              <a:t>• Each dot is a family.</a:t>
             </a:r>
           </a:p>
           <a:p>
             <a:pPr>
               <a:spcAft>
-                <a:spcPts val="2400"/>
+                <a:spcPts val="1400"/>
               </a:spcAft>
-              <a:defRPr sz="2400">
-                <a:solidFill>
-                  <a:srgbClr val="22262B"/>
+              <a:defRPr sz="1700">
+                <a:solidFill>
+                  <a:srgbClr val="444A52"/>
                 </a:solidFill>
               </a:defRPr>
             </a:pPr>
             <a:r>
-              <a:t>• Hardy families keep metabolism restrained — they don't overreact.</a:t>
+              <a:t>• X: time to the steepest metabolic decline under freshwater + heat. Further right = crashes later.</a:t>
             </a:r>
           </a:p>
           <a:p>
             <a:pPr>
               <a:spcAft>
-                <a:spcPts val="2400"/>
+                <a:spcPts val="1400"/>
               </a:spcAft>
-              <a:defRPr sz="2400">
-                <a:solidFill>
-                  <a:srgbClr val="22262B"/>
+              <a:defRPr sz="1700">
+                <a:solidFill>
+                  <a:srgbClr val="444A52"/>
                 </a:solidFill>
               </a:defRPr>
             </a:pPr>
             <a:r>
-              <a:t>• They decline slowly and late rather than crashing early.</a:t>
+              <a:t>• Y: survival score (higher = tougher).</a:t>
             </a:r>
           </a:p>
           <a:p>
             <a:pPr>
               <a:spcAft>
-                <a:spcPts val="2400"/>
+                <a:spcPts val="1400"/>
               </a:spcAft>
-              <a:defRPr sz="2400">
-                <a:solidFill>
-                  <a:srgbClr val="22262B"/>
+              <a:defRPr sz="1700">
+                <a:solidFill>
+                  <a:srgbClr val="444A52"/>
                 </a:solidFill>
               </a:defRPr>
             </a:pPr>
             <a:r>
-              <a:t>• The signal is strongest when the assay is run during stress, not at rest.</a:t>
+              <a:t>• rho = 0.90; cross-validated rho = 0.81 when each family is predicted from the other eight.</a:t>
             </a:r>
           </a:p>
         </p:txBody>
@@ -5378,6 +5616,377 @@
 </file>
 
 <file path=ppt/slides/slide13.xml><?xml version="1.0" encoding="utf-8"?>
+<p:sld xmlns:a="http://schemas.openxmlformats.org/drawingml/2006/main" xmlns:p="http://schemas.openxmlformats.org/presentationml/2006/main" xmlns:r="http://schemas.openxmlformats.org/officeDocument/2006/relationships">
+  <p:cSld>
+    <p:spTree>
+      <p:nvGrpSpPr>
+        <p:cNvPr id="1" name=""/>
+        <p:cNvGrpSpPr/>
+        <p:nvPr/>
+      </p:nvGrpSpPr>
+      <p:grpSpPr/>
+      <p:sp>
+        <p:nvSpPr>
+          <p:cNvPr id="2" name="TextBox 1"/>
+          <p:cNvSpPr txBox="1"/>
+          <p:nvPr/>
+        </p:nvSpPr>
+        <p:spPr>
+          <a:xfrm>
+            <a:off x="640080" y="411480"/>
+            <a:ext cx="10881360" cy="914400"/>
+          </a:xfrm>
+          <a:prstGeom prst="rect">
+            <a:avLst/>
+          </a:prstGeom>
+          <a:noFill/>
+        </p:spPr>
+        <p:txBody>
+          <a:bodyPr wrap="square">
+            <a:spAutoFit/>
+          </a:bodyPr>
+          <a:lstStyle/>
+          <a:p>
+            <a:pPr>
+              <a:defRPr sz="3400" b="1">
+                <a:solidFill>
+                  <a:srgbClr val="1B3A5C"/>
+                </a:solidFill>
+              </a:defRPr>
+            </a:pPr>
+            <a:r>
+              <a:t>The counterintuitive part</a:t>
+            </a:r>
+          </a:p>
+        </p:txBody>
+      </p:sp>
+      <p:sp>
+        <p:nvSpPr>
+          <p:cNvPr id="3" name="Rectangle 2"/>
+          <p:cNvSpPr/>
+          <p:nvPr/>
+        </p:nvSpPr>
+        <p:spPr>
+          <a:xfrm>
+            <a:off x="640080" y="1325880"/>
+            <a:ext cx="1463040" cy="54864"/>
+          </a:xfrm>
+          <a:prstGeom prst="rect">
+            <a:avLst/>
+          </a:prstGeom>
+          <a:solidFill>
+            <a:srgbClr val="0E7C86"/>
+          </a:solidFill>
+          <a:ln>
+            <a:noFill/>
+          </a:ln>
+          <a:effectLst/>
+        </p:spPr>
+        <p:style>
+          <a:lnRef idx="1">
+            <a:schemeClr val="accent1"/>
+          </a:lnRef>
+          <a:fillRef idx="3">
+            <a:schemeClr val="accent1"/>
+          </a:fillRef>
+          <a:effectRef idx="2">
+            <a:schemeClr val="accent1"/>
+          </a:effectRef>
+          <a:fontRef idx="minor">
+            <a:schemeClr val="lt1"/>
+          </a:fontRef>
+        </p:style>
+        <p:txBody>
+          <a:bodyPr rtlCol="0" anchor="ctr"/>
+          <a:lstStyle/>
+          <a:p>
+            <a:pPr algn="ctr"/>
+          </a:p>
+        </p:txBody>
+      </p:sp>
+      <p:sp>
+        <p:nvSpPr>
+          <p:cNvPr id="4" name="TextBox 3"/>
+          <p:cNvSpPr txBox="1"/>
+          <p:nvPr/>
+        </p:nvSpPr>
+        <p:spPr>
+          <a:xfrm>
+            <a:off x="640080" y="1463040"/>
+            <a:ext cx="10881360" cy="457200"/>
+          </a:xfrm>
+          <a:prstGeom prst="rect">
+            <a:avLst/>
+          </a:prstGeom>
+          <a:noFill/>
+        </p:spPr>
+        <p:txBody>
+          <a:bodyPr wrap="square">
+            <a:spAutoFit/>
+          </a:bodyPr>
+          <a:lstStyle/>
+          <a:p>
+            <a:pPr>
+              <a:defRPr sz="1800" i="1">
+                <a:solidFill>
+                  <a:srgbClr val="0E7C86"/>
+                </a:solidFill>
+              </a:defRPr>
+            </a:pPr>
+            <a:r>
+              <a:t>Hardy oysters stay calm</a:t>
+            </a:r>
+          </a:p>
+        </p:txBody>
+      </p:sp>
+      <p:sp>
+        <p:nvSpPr>
+          <p:cNvPr id="5" name="TextBox 4"/>
+          <p:cNvSpPr txBox="1"/>
+          <p:nvPr/>
+        </p:nvSpPr>
+        <p:spPr>
+          <a:xfrm>
+            <a:off x="777240" y="2286000"/>
+            <a:ext cx="10607040" cy="4206240"/>
+          </a:xfrm>
+          <a:prstGeom prst="rect">
+            <a:avLst/>
+          </a:prstGeom>
+          <a:noFill/>
+        </p:spPr>
+        <p:txBody>
+          <a:bodyPr wrap="square">
+            <a:spAutoFit/>
+          </a:bodyPr>
+          <a:lstStyle/>
+          <a:p>
+            <a:pPr>
+              <a:spcAft>
+                <a:spcPts val="2400"/>
+              </a:spcAft>
+              <a:defRPr sz="2400">
+                <a:solidFill>
+                  <a:srgbClr val="22262B"/>
+                </a:solidFill>
+              </a:defRPr>
+            </a:pPr>
+            <a:r>
+              <a:t>• Families whose metabolism spikes hardest when heated survive the least.</a:t>
+            </a:r>
+          </a:p>
+          <a:p>
+            <a:pPr>
+              <a:spcAft>
+                <a:spcPts val="2400"/>
+              </a:spcAft>
+              <a:defRPr sz="2400">
+                <a:solidFill>
+                  <a:srgbClr val="22262B"/>
+                </a:solidFill>
+              </a:defRPr>
+            </a:pPr>
+            <a:r>
+              <a:t>• Hardy families keep metabolism restrained — they don't overreact.</a:t>
+            </a:r>
+          </a:p>
+          <a:p>
+            <a:pPr>
+              <a:spcAft>
+                <a:spcPts val="2400"/>
+              </a:spcAft>
+              <a:defRPr sz="2400">
+                <a:solidFill>
+                  <a:srgbClr val="22262B"/>
+                </a:solidFill>
+              </a:defRPr>
+            </a:pPr>
+            <a:r>
+              <a:t>• They decline slowly and late rather than crashing early.</a:t>
+            </a:r>
+          </a:p>
+          <a:p>
+            <a:pPr>
+              <a:spcAft>
+                <a:spcPts val="2400"/>
+              </a:spcAft>
+              <a:defRPr sz="2400">
+                <a:solidFill>
+                  <a:srgbClr val="22262B"/>
+                </a:solidFill>
+              </a:defRPr>
+            </a:pPr>
+            <a:r>
+              <a:t>• The signal is strongest when the assay is run during stress, not at rest.</a:t>
+            </a:r>
+          </a:p>
+        </p:txBody>
+      </p:sp>
+    </p:spTree>
+  </p:cSld>
+  <p:clrMapOvr>
+    <a:masterClrMapping/>
+  </p:clrMapOvr>
+</p:sld>
+</file>
+
+<file path=ppt/slides/slide14.xml><?xml version="1.0" encoding="utf-8"?>
+<p:sld xmlns:a="http://schemas.openxmlformats.org/drawingml/2006/main" xmlns:p="http://schemas.openxmlformats.org/presentationml/2006/main" xmlns:r="http://schemas.openxmlformats.org/officeDocument/2006/relationships">
+  <p:cSld>
+    <p:spTree>
+      <p:nvGrpSpPr>
+        <p:cNvPr id="1" name=""/>
+        <p:cNvGrpSpPr/>
+        <p:nvPr/>
+      </p:nvGrpSpPr>
+      <p:grpSpPr/>
+      <p:sp>
+        <p:nvSpPr>
+          <p:cNvPr id="2" name="TextBox 1"/>
+          <p:cNvSpPr txBox="1"/>
+          <p:nvPr/>
+        </p:nvSpPr>
+        <p:spPr>
+          <a:xfrm>
+            <a:off x="640080" y="411480"/>
+            <a:ext cx="10881360" cy="914400"/>
+          </a:xfrm>
+          <a:prstGeom prst="rect">
+            <a:avLst/>
+          </a:prstGeom>
+          <a:noFill/>
+        </p:spPr>
+        <p:txBody>
+          <a:bodyPr wrap="square">
+            <a:spAutoFit/>
+          </a:bodyPr>
+          <a:lstStyle/>
+          <a:p>
+            <a:pPr>
+              <a:defRPr sz="3400" b="1">
+                <a:solidFill>
+                  <a:srgbClr val="1B3A5C"/>
+                </a:solidFill>
+              </a:defRPr>
+            </a:pPr>
+            <a:r>
+              <a:t>Four values read from one curve</a:t>
+            </a:r>
+          </a:p>
+        </p:txBody>
+      </p:sp>
+      <p:sp>
+        <p:nvSpPr>
+          <p:cNvPr id="3" name="Rectangle 2"/>
+          <p:cNvSpPr/>
+          <p:nvPr/>
+        </p:nvSpPr>
+        <p:spPr>
+          <a:xfrm>
+            <a:off x="640080" y="1325880"/>
+            <a:ext cx="1463040" cy="54864"/>
+          </a:xfrm>
+          <a:prstGeom prst="rect">
+            <a:avLst/>
+          </a:prstGeom>
+          <a:solidFill>
+            <a:srgbClr val="0E7C86"/>
+          </a:solidFill>
+          <a:ln>
+            <a:noFill/>
+          </a:ln>
+          <a:effectLst/>
+        </p:spPr>
+        <p:style>
+          <a:lnRef idx="1">
+            <a:schemeClr val="accent1"/>
+          </a:lnRef>
+          <a:fillRef idx="3">
+            <a:schemeClr val="accent1"/>
+          </a:fillRef>
+          <a:effectRef idx="2">
+            <a:schemeClr val="accent1"/>
+          </a:effectRef>
+          <a:fontRef idx="minor">
+            <a:schemeClr val="lt1"/>
+          </a:fontRef>
+        </p:style>
+        <p:txBody>
+          <a:bodyPr rtlCol="0" anchor="ctr"/>
+          <a:lstStyle/>
+          <a:p>
+            <a:pPr algn="ctr"/>
+          </a:p>
+        </p:txBody>
+      </p:sp>
+      <p:sp>
+        <p:nvSpPr>
+          <p:cNvPr id="4" name="TextBox 3"/>
+          <p:cNvSpPr txBox="1"/>
+          <p:nvPr/>
+        </p:nvSpPr>
+        <p:spPr>
+          <a:xfrm>
+            <a:off x="640080" y="1463040"/>
+            <a:ext cx="10881360" cy="457200"/>
+          </a:xfrm>
+          <a:prstGeom prst="rect">
+            <a:avLst/>
+          </a:prstGeom>
+          <a:noFill/>
+        </p:spPr>
+        <p:txBody>
+          <a:bodyPr wrap="square">
+            <a:spAutoFit/>
+          </a:bodyPr>
+          <a:lstStyle/>
+          <a:p>
+            <a:pPr>
+              <a:defRPr sz="1800" i="1">
+                <a:solidFill>
+                  <a:srgbClr val="0E7C86"/>
+                </a:solidFill>
+              </a:defRPr>
+            </a:pPr>
+            <a:r>
+              <a:t>Everything in the index comes from the shape of a single oyster's run</a:t>
+            </a:r>
+          </a:p>
+        </p:txBody>
+      </p:sp>
+      <p:pic>
+        <p:nvPicPr>
+          <p:cNvPr id="5" name="Picture 4" descr="index_feature_schematic.png"/>
+          <p:cNvPicPr>
+            <a:picLocks noChangeAspect="1"/>
+          </p:cNvPicPr>
+          <p:nvPr/>
+        </p:nvPicPr>
+        <p:blipFill>
+          <a:blip r:embed="rId2"/>
+          <a:stretch>
+            <a:fillRect/>
+          </a:stretch>
+        </p:blipFill>
+        <p:spPr>
+          <a:xfrm>
+            <a:off x="3032760" y="1828800"/>
+            <a:ext cx="6096000" cy="3657600"/>
+          </a:xfrm>
+          <a:prstGeom prst="rect">
+            <a:avLst/>
+          </a:prstGeom>
+        </p:spPr>
+      </p:pic>
+    </p:spTree>
+  </p:cSld>
+  <p:clrMapOvr>
+    <a:masterClrMapping/>
+  </p:clrMapOvr>
+</p:sld>
+</file>
+
+<file path=ppt/slides/slide15.xml><?xml version="1.0" encoding="utf-8"?>
 <p:sld xmlns:a="http://schemas.openxmlformats.org/drawingml/2006/main" xmlns:p="http://schemas.openxmlformats.org/presentationml/2006/main" xmlns:r="http://schemas.openxmlformats.org/officeDocument/2006/relationships">
   <p:cSld>
     <p:spTree>
@@ -5806,7 +6415,7 @@
 </p:sld>
 </file>
 
-<file path=ppt/slides/slide14.xml><?xml version="1.0" encoding="utf-8"?>
+<file path=ppt/slides/slide16.xml><?xml version="1.0" encoding="utf-8"?>
 <p:sld xmlns:a="http://schemas.openxmlformats.org/drawingml/2006/main" xmlns:p="http://schemas.openxmlformats.org/presentationml/2006/main" xmlns:r="http://schemas.openxmlformats.org/officeDocument/2006/relationships">
   <p:cSld>
     <p:spTree>
@@ -5998,403 +6607,6 @@
             </a:pPr>
             <a:r>
               <a:t>• Toughest (5) and most fragile (7) land at opposite ends.</a:t>
-            </a:r>
-          </a:p>
-        </p:txBody>
-      </p:sp>
-    </p:spTree>
-  </p:cSld>
-  <p:clrMapOvr>
-    <a:masterClrMapping/>
-  </p:clrMapOvr>
-</p:sld>
-</file>
-
-<file path=ppt/slides/slide15.xml><?xml version="1.0" encoding="utf-8"?>
-<p:sld xmlns:a="http://schemas.openxmlformats.org/drawingml/2006/main" xmlns:p="http://schemas.openxmlformats.org/presentationml/2006/main" xmlns:r="http://schemas.openxmlformats.org/officeDocument/2006/relationships">
-  <p:cSld>
-    <p:spTree>
-      <p:nvGrpSpPr>
-        <p:cNvPr id="1" name=""/>
-        <p:cNvGrpSpPr/>
-        <p:nvPr/>
-      </p:nvGrpSpPr>
-      <p:grpSpPr/>
-      <p:sp>
-        <p:nvSpPr>
-          <p:cNvPr id="2" name="Rectangle 1"/>
-          <p:cNvSpPr/>
-          <p:nvPr/>
-        </p:nvSpPr>
-        <p:spPr>
-          <a:xfrm>
-            <a:off x="0" y="0"/>
-            <a:ext cx="12191695" cy="6858000"/>
-          </a:xfrm>
-          <a:prstGeom prst="rect">
-            <a:avLst/>
-          </a:prstGeom>
-          <a:solidFill>
-            <a:srgbClr val="1B3A5C"/>
-          </a:solidFill>
-          <a:ln>
-            <a:noFill/>
-          </a:ln>
-          <a:effectLst/>
-        </p:spPr>
-        <p:style>
-          <a:lnRef idx="1">
-            <a:schemeClr val="accent1"/>
-          </a:lnRef>
-          <a:fillRef idx="3">
-            <a:schemeClr val="accent1"/>
-          </a:fillRef>
-          <a:effectRef idx="2">
-            <a:schemeClr val="accent1"/>
-          </a:effectRef>
-          <a:fontRef idx="minor">
-            <a:schemeClr val="lt1"/>
-          </a:fontRef>
-        </p:style>
-        <p:txBody>
-          <a:bodyPr rtlCol="0" anchor="ctr"/>
-          <a:lstStyle/>
-          <a:p>
-            <a:pPr algn="ctr"/>
-          </a:p>
-        </p:txBody>
-      </p:sp>
-      <p:sp>
-        <p:nvSpPr>
-          <p:cNvPr id="3" name="TextBox 2"/>
-          <p:cNvSpPr txBox="1"/>
-          <p:nvPr/>
-        </p:nvSpPr>
-        <p:spPr>
-          <a:xfrm>
-            <a:off x="1097280" y="2651760"/>
-            <a:ext cx="10058400" cy="1463040"/>
-          </a:xfrm>
-          <a:prstGeom prst="rect">
-            <a:avLst/>
-          </a:prstGeom>
-          <a:noFill/>
-        </p:spPr>
-        <p:txBody>
-          <a:bodyPr wrap="square">
-            <a:spAutoFit/>
-          </a:bodyPr>
-          <a:lstStyle/>
-          <a:p>
-            <a:pPr>
-              <a:defRPr sz="4000" b="1">
-                <a:solidFill>
-                  <a:srgbClr val="FFFFFF"/>
-                </a:solidFill>
-              </a:defRPr>
-            </a:pPr>
-            <a:r>
-              <a:t>Use #2 — Real-time stress on the farm</a:t>
-            </a:r>
-          </a:p>
-          <a:p>
-            <a:pPr>
-              <a:spcBef>
-                <a:spcPts val="1000"/>
-              </a:spcBef>
-              <a:defRPr sz="2000">
-                <a:solidFill>
-                  <a:srgbClr val="9FD3D8"/>
-                </a:solidFill>
-              </a:defRPr>
-            </a:pPr>
-            <a:r>
-              <a:t>A thermometer for physiological condition</a:t>
-            </a:r>
-          </a:p>
-        </p:txBody>
-      </p:sp>
-    </p:spTree>
-  </p:cSld>
-  <p:clrMapOvr>
-    <a:masterClrMapping/>
-  </p:clrMapOvr>
-</p:sld>
-</file>
-
-<file path=ppt/slides/slide16.xml><?xml version="1.0" encoding="utf-8"?>
-<p:sld xmlns:a="http://schemas.openxmlformats.org/drawingml/2006/main" xmlns:p="http://schemas.openxmlformats.org/presentationml/2006/main" xmlns:r="http://schemas.openxmlformats.org/officeDocument/2006/relationships">
-  <p:cSld>
-    <p:spTree>
-      <p:nvGrpSpPr>
-        <p:cNvPr id="1" name=""/>
-        <p:cNvGrpSpPr/>
-        <p:nvPr/>
-      </p:nvGrpSpPr>
-      <p:grpSpPr/>
-      <p:sp>
-        <p:nvSpPr>
-          <p:cNvPr id="2" name="TextBox 1"/>
-          <p:cNvSpPr txBox="1"/>
-          <p:nvPr/>
-        </p:nvSpPr>
-        <p:spPr>
-          <a:xfrm>
-            <a:off x="640080" y="411480"/>
-            <a:ext cx="10881360" cy="914400"/>
-          </a:xfrm>
-          <a:prstGeom prst="rect">
-            <a:avLst/>
-          </a:prstGeom>
-          <a:noFill/>
-        </p:spPr>
-        <p:txBody>
-          <a:bodyPr wrap="square">
-            <a:spAutoFit/>
-          </a:bodyPr>
-          <a:lstStyle/>
-          <a:p>
-            <a:pPr>
-              <a:defRPr sz="3400" b="1">
-                <a:solidFill>
-                  <a:srgbClr val="1B3A5C"/>
-                </a:solidFill>
-              </a:defRPr>
-            </a:pPr>
-            <a:r>
-              <a:t>Reading stress while it's happening</a:t>
-            </a:r>
-          </a:p>
-        </p:txBody>
-      </p:sp>
-      <p:sp>
-        <p:nvSpPr>
-          <p:cNvPr id="3" name="Rectangle 2"/>
-          <p:cNvSpPr/>
-          <p:nvPr/>
-        </p:nvSpPr>
-        <p:spPr>
-          <a:xfrm>
-            <a:off x="640080" y="1325880"/>
-            <a:ext cx="1463040" cy="54864"/>
-          </a:xfrm>
-          <a:prstGeom prst="rect">
-            <a:avLst/>
-          </a:prstGeom>
-          <a:solidFill>
-            <a:srgbClr val="0E7C86"/>
-          </a:solidFill>
-          <a:ln>
-            <a:noFill/>
-          </a:ln>
-          <a:effectLst/>
-        </p:spPr>
-        <p:style>
-          <a:lnRef idx="1">
-            <a:schemeClr val="accent1"/>
-          </a:lnRef>
-          <a:fillRef idx="3">
-            <a:schemeClr val="accent1"/>
-          </a:fillRef>
-          <a:effectRef idx="2">
-            <a:schemeClr val="accent1"/>
-          </a:effectRef>
-          <a:fontRef idx="minor">
-            <a:schemeClr val="lt1"/>
-          </a:fontRef>
-        </p:style>
-        <p:txBody>
-          <a:bodyPr rtlCol="0" anchor="ctr"/>
-          <a:lstStyle/>
-          <a:p>
-            <a:pPr algn="ctr"/>
-          </a:p>
-        </p:txBody>
-      </p:sp>
-      <p:sp>
-        <p:nvSpPr>
-          <p:cNvPr id="4" name="TextBox 3"/>
-          <p:cNvSpPr txBox="1"/>
-          <p:nvPr/>
-        </p:nvSpPr>
-        <p:spPr>
-          <a:xfrm>
-            <a:off x="640080" y="1463040"/>
-            <a:ext cx="10881360" cy="457200"/>
-          </a:xfrm>
-          <a:prstGeom prst="rect">
-            <a:avLst/>
-          </a:prstGeom>
-          <a:noFill/>
-        </p:spPr>
-        <p:txBody>
-          <a:bodyPr wrap="square">
-            <a:spAutoFit/>
-          </a:bodyPr>
-          <a:lstStyle/>
-          <a:p>
-            <a:pPr>
-              <a:defRPr sz="1800" i="1">
-                <a:solidFill>
-                  <a:srgbClr val="0E7C86"/>
-                </a:solidFill>
-              </a:defRPr>
-            </a:pPr>
-            <a:r>
-              <a:t>Same assay, different question</a:t>
-            </a:r>
-          </a:p>
-        </p:txBody>
-      </p:sp>
-      <p:sp>
-        <p:nvSpPr>
-          <p:cNvPr id="5" name="TextBox 4"/>
-          <p:cNvSpPr txBox="1"/>
-          <p:nvPr/>
-        </p:nvSpPr>
-        <p:spPr>
-          <a:xfrm>
-            <a:off x="777240" y="2148840"/>
-            <a:ext cx="10607040" cy="4206240"/>
-          </a:xfrm>
-          <a:prstGeom prst="rect">
-            <a:avLst/>
-          </a:prstGeom>
-          <a:noFill/>
-        </p:spPr>
-        <p:txBody>
-          <a:bodyPr wrap="square">
-            <a:spAutoFit/>
-          </a:bodyPr>
-          <a:lstStyle/>
-          <a:p>
-            <a:pPr>
-              <a:spcAft>
-                <a:spcPts val="1600"/>
-              </a:spcAft>
-              <a:defRPr sz="2100">
-                <a:solidFill>
-                  <a:srgbClr val="22262B"/>
-                </a:solidFill>
-              </a:defRPr>
-            </a:pPr>
-            <a:r>
-              <a:t>• Pull a small sample of animals, run a plate, get an answer the same day.</a:t>
-            </a:r>
-          </a:p>
-          <a:p>
-            <a:pPr>
-              <a:spcAft>
-                <a:spcPts val="1600"/>
-              </a:spcAft>
-              <a:defRPr sz="2100">
-                <a:solidFill>
-                  <a:srgbClr val="22262B"/>
-                </a:solidFill>
-              </a:defRPr>
-            </a:pPr>
-            <a:r>
-              <a:t>• Elevated metabolism under a heat or salinity event flags a crop under load — before mortality shows up.</a:t>
-            </a:r>
-          </a:p>
-          <a:p>
-            <a:pPr>
-              <a:spcAft>
-                <a:spcPts val="1600"/>
-              </a:spcAft>
-              <a:defRPr sz="2100">
-                <a:solidFill>
-                  <a:srgbClr val="22262B"/>
-                </a:solidFill>
-              </a:defRPr>
-            </a:pPr>
-            <a:r>
-              <a:t>• Compare bags, tidal heights, gear types, or sites on the same afternoon.</a:t>
-            </a:r>
-          </a:p>
-          <a:p>
-            <a:pPr>
-              <a:spcAft>
-                <a:spcPts val="1600"/>
-              </a:spcAft>
-              <a:defRPr sz="2100">
-                <a:solidFill>
-                  <a:srgbClr val="22262B"/>
-                </a:solidFill>
-              </a:defRPr>
-            </a:pPr>
-            <a:r>
-              <a:t>• Track recovery after an event: does metabolism return to baseline, and how fast?</a:t>
-            </a:r>
-          </a:p>
-          <a:p>
-            <a:pPr>
-              <a:spcAft>
-                <a:spcPts val="1600"/>
-              </a:spcAft>
-              <a:defRPr sz="2100">
-                <a:solidFill>
-                  <a:srgbClr val="22262B"/>
-                </a:solidFill>
-              </a:defRPr>
-            </a:pPr>
-            <a:r>
-              <a:t>• Non-lethal and cheap enough to repeat weekly through a risky season.</a:t>
-            </a:r>
-          </a:p>
-        </p:txBody>
-      </p:sp>
-      <p:sp>
-        <p:nvSpPr>
-          <p:cNvPr id="6" name="Rectangle 5"/>
-          <p:cNvSpPr/>
-          <p:nvPr/>
-        </p:nvSpPr>
-        <p:spPr>
-          <a:xfrm>
-            <a:off x="777240" y="5623560"/>
-            <a:ext cx="10607040" cy="777240"/>
-          </a:xfrm>
-          <a:prstGeom prst="rect">
-            <a:avLst/>
-          </a:prstGeom>
-          <a:solidFill>
-            <a:srgbClr val="EFF3F6"/>
-          </a:solidFill>
-          <a:ln w="15875">
-            <a:solidFill>
-              <a:srgbClr val="C2187A"/>
-            </a:solidFill>
-          </a:ln>
-          <a:effectLst/>
-        </p:spPr>
-        <p:style>
-          <a:lnRef idx="1">
-            <a:schemeClr val="accent1"/>
-          </a:lnRef>
-          <a:fillRef idx="3">
-            <a:schemeClr val="accent1"/>
-          </a:fillRef>
-          <a:effectRef idx="2">
-            <a:schemeClr val="accent1"/>
-          </a:effectRef>
-          <a:fontRef idx="minor">
-            <a:schemeClr val="lt1"/>
-          </a:fontRef>
-        </p:style>
-        <p:txBody>
-          <a:bodyPr rtlCol="0" anchor="ctr" wrap="square"/>
-          <a:lstStyle/>
-          <a:p>
-            <a:pPr algn="ctr">
-              <a:defRPr sz="1900" b="1">
-                <a:solidFill>
-                  <a:srgbClr val="1B3A5C"/>
-                </a:solidFill>
-              </a:defRPr>
-            </a:pPr>
-            <a:r>
-              <a:t>Turns "the water got hot last week" into a number you can act on.</a:t>
             </a:r>
           </a:p>
         </p:txBody>
@@ -6419,55 +6631,20 @@
       <p:grpSpPr/>
       <p:sp>
         <p:nvSpPr>
-          <p:cNvPr id="2" name="TextBox 1"/>
-          <p:cNvSpPr txBox="1"/>
-          <p:nvPr/>
-        </p:nvSpPr>
-        <p:spPr>
-          <a:xfrm>
-            <a:off x="640080" y="411480"/>
-            <a:ext cx="10881360" cy="914400"/>
-          </a:xfrm>
-          <a:prstGeom prst="rect">
-            <a:avLst/>
-          </a:prstGeom>
-          <a:noFill/>
-        </p:spPr>
-        <p:txBody>
-          <a:bodyPr wrap="square">
-            <a:spAutoFit/>
-          </a:bodyPr>
-          <a:lstStyle/>
-          <a:p>
-            <a:pPr>
-              <a:defRPr sz="3400" b="1">
-                <a:solidFill>
-                  <a:srgbClr val="1B3A5C"/>
-                </a:solidFill>
-              </a:defRPr>
-            </a:pPr>
-            <a:r>
-              <a:t>What's next</a:t>
-            </a:r>
-          </a:p>
-        </p:txBody>
-      </p:sp>
-      <p:sp>
-        <p:nvSpPr>
-          <p:cNvPr id="3" name="Rectangle 2"/>
+          <p:cNvPr id="2" name="Rectangle 1"/>
           <p:cNvSpPr/>
           <p:nvPr/>
         </p:nvSpPr>
         <p:spPr>
           <a:xfrm>
-            <a:off x="640080" y="1325880"/>
-            <a:ext cx="1463040" cy="54864"/>
+            <a:off x="0" y="0"/>
+            <a:ext cx="12191695" cy="6858000"/>
           </a:xfrm>
           <a:prstGeom prst="rect">
             <a:avLst/>
           </a:prstGeom>
           <a:solidFill>
-            <a:srgbClr val="0E7C86"/>
+            <a:srgbClr val="1B3A5C"/>
           </a:solidFill>
           <a:ln>
             <a:noFill/>
@@ -6498,14 +6675,14 @@
       </p:sp>
       <p:sp>
         <p:nvSpPr>
-          <p:cNvPr id="4" name="TextBox 3"/>
+          <p:cNvPr id="3" name="TextBox 2"/>
           <p:cNvSpPr txBox="1"/>
           <p:nvPr/>
         </p:nvSpPr>
         <p:spPr>
           <a:xfrm>
-            <a:off x="777240" y="2103120"/>
-            <a:ext cx="10607040" cy="4206240"/>
+            <a:off x="1097280" y="2651760"/>
+            <a:ext cx="10058400" cy="1463040"/>
           </a:xfrm>
           <a:prstGeom prst="rect">
             <a:avLst/>
@@ -6519,101 +6696,29 @@
           <a:lstStyle/>
           <a:p>
             <a:pPr>
-              <a:spcAft>
-                <a:spcPts val="1200"/>
-              </a:spcAft>
-              <a:defRPr sz="2100">
-                <a:solidFill>
-                  <a:srgbClr val="22262B"/>
+              <a:defRPr sz="4000" b="1">
+                <a:solidFill>
+                  <a:srgbClr val="FFFFFF"/>
                 </a:solidFill>
               </a:defRPr>
             </a:pPr>
             <a:r>
-              <a:t>• Broaden the index with additional assays:</a:t>
-            </a:r>
-          </a:p>
-          <a:p>
-            <a:pPr lvl="1">
+              <a:t>Use #2 — Real-time stress on the farm</a:t>
+            </a:r>
+          </a:p>
+          <a:p>
+            <a:pPr>
               <a:spcBef>
-                <a:spcPts val="200"/>
+                <a:spcPts val="1000"/>
               </a:spcBef>
-              <a:spcAft>
-                <a:spcPts val="1200"/>
-              </a:spcAft>
-              <a:defRPr sz="1700">
-                <a:solidFill>
-                  <a:srgbClr val="444A52"/>
+              <a:defRPr sz="2000">
+                <a:solidFill>
+                  <a:srgbClr val="9FD3D8"/>
                 </a:solidFill>
               </a:defRPr>
             </a:pPr>
             <a:r>
-              <a:t>– Glycogen (heat vs. control, 3 h)</a:t>
-            </a:r>
-          </a:p>
-          <a:p>
-            <a:pPr lvl="1">
-              <a:spcBef>
-                <a:spcPts val="200"/>
-              </a:spcBef>
-              <a:spcAft>
-                <a:spcPts val="1200"/>
-              </a:spcAft>
-              <a:defRPr sz="1700">
-                <a:solidFill>
-                  <a:srgbClr val="444A52"/>
-                </a:solidFill>
-              </a:defRPr>
-            </a:pPr>
-            <a:r>
-              <a:t>– Na+/K+ ATPase</a:t>
-            </a:r>
-          </a:p>
-          <a:p>
-            <a:pPr lvl="1">
-              <a:spcBef>
-                <a:spcPts val="200"/>
-              </a:spcBef>
-              <a:spcAft>
-                <a:spcPts val="1200"/>
-              </a:spcAft>
-              <a:defRPr sz="1700">
-                <a:solidFill>
-                  <a:srgbClr val="444A52"/>
-                </a:solidFill>
-              </a:defRPr>
-            </a:pPr>
-            <a:r>
-              <a:t>– Citrate synthase</a:t>
-            </a:r>
-          </a:p>
-          <a:p>
-            <a:pPr>
-              <a:spcAft>
-                <a:spcPts val="1200"/>
-              </a:spcAft>
-              <a:defRPr sz="2100">
-                <a:solidFill>
-                  <a:srgbClr val="22262B"/>
-                </a:solidFill>
-              </a:defRPr>
-            </a:pPr>
-            <a:r>
-              <a:t>• Validate predictions against field outplants across PNW sites.</a:t>
-            </a:r>
-          </a:p>
-          <a:p>
-            <a:pPr>
-              <a:spcAft>
-                <a:spcPts val="1200"/>
-              </a:spcAft>
-              <a:defRPr sz="2100">
-                <a:solidFill>
-                  <a:srgbClr val="22262B"/>
-                </a:solidFill>
-              </a:defRPr>
-            </a:pPr>
-            <a:r>
-              <a:t>• Package a grower-facing protocol and a simple scoring sheet.</a:t>
+              <a:t>A thermometer for physiological condition</a:t>
             </a:r>
           </a:p>
         </p:txBody>
@@ -6666,7 +6771,7 @@
               </a:defRPr>
             </a:pPr>
             <a:r>
-              <a:t>Takeaways</a:t>
+              <a:t>Reading stress while it's happening</a:t>
             </a:r>
           </a:p>
         </p:txBody>
@@ -6723,8 +6828,8 @@
         </p:nvSpPr>
         <p:spPr>
           <a:xfrm>
-            <a:off x="777240" y="2194560"/>
-            <a:ext cx="10607040" cy="4206240"/>
+            <a:off x="640080" y="1463040"/>
+            <a:ext cx="10881360" cy="457200"/>
           </a:xfrm>
           <a:prstGeom prst="rect">
             <a:avLst/>
@@ -6738,69 +6843,119 @@
           <a:lstStyle/>
           <a:p>
             <a:pPr>
-              <a:spcAft>
-                <a:spcPts val="2200"/>
-              </a:spcAft>
-              <a:defRPr sz="2200">
-                <a:solidFill>
-                  <a:srgbClr val="22262B"/>
+              <a:defRPr sz="1800" i="1">
+                <a:solidFill>
+                  <a:srgbClr val="0E7C86"/>
                 </a:solidFill>
               </a:defRPr>
             </a:pPr>
             <a:r>
-              <a:t>• Resazurin turns metabolism into a color change — cheap, non-lethal, 96 animals at a time.</a:t>
-            </a:r>
-          </a:p>
+              <a:t>Same assay, different question</a:t>
+            </a:r>
+          </a:p>
+        </p:txBody>
+      </p:sp>
+      <p:sp>
+        <p:nvSpPr>
+          <p:cNvPr id="5" name="TextBox 4"/>
+          <p:cNvSpPr txBox="1"/>
+          <p:nvPr/>
+        </p:nvSpPr>
+        <p:spPr>
+          <a:xfrm>
+            <a:off x="777240" y="2148840"/>
+            <a:ext cx="10607040" cy="4206240"/>
+          </a:xfrm>
+          <a:prstGeom prst="rect">
+            <a:avLst/>
+          </a:prstGeom>
+          <a:noFill/>
+        </p:spPr>
+        <p:txBody>
+          <a:bodyPr wrap="square">
+            <a:spAutoFit/>
+          </a:bodyPr>
+          <a:lstStyle/>
           <a:p>
             <a:pPr>
               <a:spcAft>
-                <a:spcPts val="2200"/>
+                <a:spcPts val="1600"/>
               </a:spcAft>
-              <a:defRPr sz="2200">
+              <a:defRPr sz="2100">
                 <a:solidFill>
                   <a:srgbClr val="22262B"/>
                 </a:solidFill>
               </a:defRPr>
             </a:pPr>
             <a:r>
-              <a:t>• Published and validated against oxygen consumption (PeerJ 2026).</a:t>
+              <a:t>• Pull a small sample of animals, run a plate, get an answer the same day.</a:t>
             </a:r>
           </a:p>
           <a:p>
             <a:pPr>
               <a:spcAft>
-                <a:spcPts val="2200"/>
+                <a:spcPts val="1600"/>
               </a:spcAft>
-              <a:defRPr sz="2200">
+              <a:defRPr sz="2100">
                 <a:solidFill>
                   <a:srgbClr val="22262B"/>
                 </a:solidFill>
               </a:defRPr>
             </a:pPr>
             <a:r>
-              <a:t>• Predicts phenotype: metabolic curve shape forecasts family hardiness (cross-validated rho ≈ 0.8).</a:t>
+              <a:t>• Elevated metabolism under a heat or salinity event flags a crop under load — before mortality shows up.</a:t>
             </a:r>
           </a:p>
           <a:p>
             <a:pPr>
               <a:spcAft>
-                <a:spcPts val="2200"/>
+                <a:spcPts val="1600"/>
               </a:spcAft>
-              <a:defRPr sz="2200">
+              <a:defRPr sz="2100">
                 <a:solidFill>
                   <a:srgbClr val="22262B"/>
                 </a:solidFill>
               </a:defRPr>
             </a:pPr>
             <a:r>
-              <a:t>• Measures stress in real time: a same-day readout of how hard your crop is working.</a:t>
-            </a:r>
-          </a:p>
-        </p:txBody>
-      </p:sp>
-      <p:sp>
-        <p:nvSpPr>
-          <p:cNvPr id="5" name="Rectangle 4"/>
+              <a:t>• Compare bags, tidal heights, gear types, or sites on the same afternoon.</a:t>
+            </a:r>
+          </a:p>
+          <a:p>
+            <a:pPr>
+              <a:spcAft>
+                <a:spcPts val="1600"/>
+              </a:spcAft>
+              <a:defRPr sz="2100">
+                <a:solidFill>
+                  <a:srgbClr val="22262B"/>
+                </a:solidFill>
+              </a:defRPr>
+            </a:pPr>
+            <a:r>
+              <a:t>• Track recovery after an event: does metabolism return to baseline, and how fast?</a:t>
+            </a:r>
+          </a:p>
+          <a:p>
+            <a:pPr>
+              <a:spcAft>
+                <a:spcPts val="1600"/>
+              </a:spcAft>
+              <a:defRPr sz="2100">
+                <a:solidFill>
+                  <a:srgbClr val="22262B"/>
+                </a:solidFill>
+              </a:defRPr>
+            </a:pPr>
+            <a:r>
+              <a:t>• Non-lethal and cheap enough to repeat weekly through a risky season.</a:t>
+            </a:r>
+          </a:p>
+        </p:txBody>
+      </p:sp>
+      <p:sp>
+        <p:nvSpPr>
+          <p:cNvPr id="6" name="Rectangle 5"/>
           <p:cNvSpPr/>
           <p:nvPr/>
         </p:nvSpPr>
@@ -6817,7 +6972,7 @@
           </a:solidFill>
           <a:ln w="15875">
             <a:solidFill>
-              <a:srgbClr val="0E7C86"/>
+              <a:srgbClr val="C2187A"/>
             </a:solidFill>
           </a:ln>
           <a:effectLst/>
@@ -6848,7 +7003,226 @@
               </a:defRPr>
             </a:pPr>
             <a:r>
-              <a:t>FUNDING  - USDA-WRAC - sormi.science</a:t>
+              <a:t>Turns "the water got hot last week" into a number you can act on.</a:t>
+            </a:r>
+          </a:p>
+        </p:txBody>
+      </p:sp>
+    </p:spTree>
+  </p:cSld>
+  <p:clrMapOvr>
+    <a:masterClrMapping/>
+  </p:clrMapOvr>
+</p:sld>
+</file>
+
+<file path=ppt/slides/slide19.xml><?xml version="1.0" encoding="utf-8"?>
+<p:sld xmlns:a="http://schemas.openxmlformats.org/drawingml/2006/main" xmlns:p="http://schemas.openxmlformats.org/presentationml/2006/main" xmlns:r="http://schemas.openxmlformats.org/officeDocument/2006/relationships">
+  <p:cSld>
+    <p:spTree>
+      <p:nvGrpSpPr>
+        <p:cNvPr id="1" name=""/>
+        <p:cNvGrpSpPr/>
+        <p:nvPr/>
+      </p:nvGrpSpPr>
+      <p:grpSpPr/>
+      <p:sp>
+        <p:nvSpPr>
+          <p:cNvPr id="2" name="TextBox 1"/>
+          <p:cNvSpPr txBox="1"/>
+          <p:nvPr/>
+        </p:nvSpPr>
+        <p:spPr>
+          <a:xfrm>
+            <a:off x="640080" y="411480"/>
+            <a:ext cx="10881360" cy="914400"/>
+          </a:xfrm>
+          <a:prstGeom prst="rect">
+            <a:avLst/>
+          </a:prstGeom>
+          <a:noFill/>
+        </p:spPr>
+        <p:txBody>
+          <a:bodyPr wrap="square">
+            <a:spAutoFit/>
+          </a:bodyPr>
+          <a:lstStyle/>
+          <a:p>
+            <a:pPr>
+              <a:defRPr sz="3400" b="1">
+                <a:solidFill>
+                  <a:srgbClr val="1B3A5C"/>
+                </a:solidFill>
+              </a:defRPr>
+            </a:pPr>
+            <a:r>
+              <a:t>What's next</a:t>
+            </a:r>
+          </a:p>
+        </p:txBody>
+      </p:sp>
+      <p:sp>
+        <p:nvSpPr>
+          <p:cNvPr id="3" name="Rectangle 2"/>
+          <p:cNvSpPr/>
+          <p:nvPr/>
+        </p:nvSpPr>
+        <p:spPr>
+          <a:xfrm>
+            <a:off x="640080" y="1325880"/>
+            <a:ext cx="1463040" cy="54864"/>
+          </a:xfrm>
+          <a:prstGeom prst="rect">
+            <a:avLst/>
+          </a:prstGeom>
+          <a:solidFill>
+            <a:srgbClr val="0E7C86"/>
+          </a:solidFill>
+          <a:ln>
+            <a:noFill/>
+          </a:ln>
+          <a:effectLst/>
+        </p:spPr>
+        <p:style>
+          <a:lnRef idx="1">
+            <a:schemeClr val="accent1"/>
+          </a:lnRef>
+          <a:fillRef idx="3">
+            <a:schemeClr val="accent1"/>
+          </a:fillRef>
+          <a:effectRef idx="2">
+            <a:schemeClr val="accent1"/>
+          </a:effectRef>
+          <a:fontRef idx="minor">
+            <a:schemeClr val="lt1"/>
+          </a:fontRef>
+        </p:style>
+        <p:txBody>
+          <a:bodyPr rtlCol="0" anchor="ctr"/>
+          <a:lstStyle/>
+          <a:p>
+            <a:pPr algn="ctr"/>
+          </a:p>
+        </p:txBody>
+      </p:sp>
+      <p:sp>
+        <p:nvSpPr>
+          <p:cNvPr id="4" name="TextBox 3"/>
+          <p:cNvSpPr txBox="1"/>
+          <p:nvPr/>
+        </p:nvSpPr>
+        <p:spPr>
+          <a:xfrm>
+            <a:off x="777240" y="2103120"/>
+            <a:ext cx="10607040" cy="4206240"/>
+          </a:xfrm>
+          <a:prstGeom prst="rect">
+            <a:avLst/>
+          </a:prstGeom>
+          <a:noFill/>
+        </p:spPr>
+        <p:txBody>
+          <a:bodyPr wrap="square">
+            <a:spAutoFit/>
+          </a:bodyPr>
+          <a:lstStyle/>
+          <a:p>
+            <a:pPr>
+              <a:spcAft>
+                <a:spcPts val="1200"/>
+              </a:spcAft>
+              <a:defRPr sz="2100">
+                <a:solidFill>
+                  <a:srgbClr val="22262B"/>
+                </a:solidFill>
+              </a:defRPr>
+            </a:pPr>
+            <a:r>
+              <a:t>• Broaden the index with additional assays:</a:t>
+            </a:r>
+          </a:p>
+          <a:p>
+            <a:pPr lvl="1">
+              <a:spcBef>
+                <a:spcPts val="200"/>
+              </a:spcBef>
+              <a:spcAft>
+                <a:spcPts val="1200"/>
+              </a:spcAft>
+              <a:defRPr sz="1700">
+                <a:solidFill>
+                  <a:srgbClr val="444A52"/>
+                </a:solidFill>
+              </a:defRPr>
+            </a:pPr>
+            <a:r>
+              <a:t>– Glycogen (heat vs. control, 3 h)</a:t>
+            </a:r>
+          </a:p>
+          <a:p>
+            <a:pPr lvl="1">
+              <a:spcBef>
+                <a:spcPts val="200"/>
+              </a:spcBef>
+              <a:spcAft>
+                <a:spcPts val="1200"/>
+              </a:spcAft>
+              <a:defRPr sz="1700">
+                <a:solidFill>
+                  <a:srgbClr val="444A52"/>
+                </a:solidFill>
+              </a:defRPr>
+            </a:pPr>
+            <a:r>
+              <a:t>– Na+/K+ ATPase</a:t>
+            </a:r>
+          </a:p>
+          <a:p>
+            <a:pPr lvl="1">
+              <a:spcBef>
+                <a:spcPts val="200"/>
+              </a:spcBef>
+              <a:spcAft>
+                <a:spcPts val="1200"/>
+              </a:spcAft>
+              <a:defRPr sz="1700">
+                <a:solidFill>
+                  <a:srgbClr val="444A52"/>
+                </a:solidFill>
+              </a:defRPr>
+            </a:pPr>
+            <a:r>
+              <a:t>– Citrate synthase</a:t>
+            </a:r>
+          </a:p>
+          <a:p>
+            <a:pPr>
+              <a:spcAft>
+                <a:spcPts val="1200"/>
+              </a:spcAft>
+              <a:defRPr sz="2100">
+                <a:solidFill>
+                  <a:srgbClr val="22262B"/>
+                </a:solidFill>
+              </a:defRPr>
+            </a:pPr>
+            <a:r>
+              <a:t>• Validate predictions against field outplants across PNW sites.</a:t>
+            </a:r>
+          </a:p>
+          <a:p>
+            <a:pPr>
+              <a:spcAft>
+                <a:spcPts val="1200"/>
+              </a:spcAft>
+              <a:defRPr sz="2100">
+                <a:solidFill>
+                  <a:srgbClr val="22262B"/>
+                </a:solidFill>
+              </a:defRPr>
+            </a:pPr>
+            <a:r>
+              <a:t>• Package a grower-facing protocol and a simple scoring sheet.</a:t>
             </a:r>
           </a:p>
         </p:txBody>
@@ -7104,6 +7478,241 @@
             </a:pPr>
             <a:r>
               <a:t>We need a fast, cheap, non-lethal measure of how an oyster is doing — right now.</a:t>
+            </a:r>
+          </a:p>
+        </p:txBody>
+      </p:sp>
+    </p:spTree>
+  </p:cSld>
+  <p:clrMapOvr>
+    <a:masterClrMapping/>
+  </p:clrMapOvr>
+</p:sld>
+</file>
+
+<file path=ppt/slides/slide20.xml><?xml version="1.0" encoding="utf-8"?>
+<p:sld xmlns:a="http://schemas.openxmlformats.org/drawingml/2006/main" xmlns:p="http://schemas.openxmlformats.org/presentationml/2006/main" xmlns:r="http://schemas.openxmlformats.org/officeDocument/2006/relationships">
+  <p:cSld>
+    <p:spTree>
+      <p:nvGrpSpPr>
+        <p:cNvPr id="1" name=""/>
+        <p:cNvGrpSpPr/>
+        <p:nvPr/>
+      </p:nvGrpSpPr>
+      <p:grpSpPr/>
+      <p:sp>
+        <p:nvSpPr>
+          <p:cNvPr id="2" name="TextBox 1"/>
+          <p:cNvSpPr txBox="1"/>
+          <p:nvPr/>
+        </p:nvSpPr>
+        <p:spPr>
+          <a:xfrm>
+            <a:off x="640080" y="411480"/>
+            <a:ext cx="10881360" cy="914400"/>
+          </a:xfrm>
+          <a:prstGeom prst="rect">
+            <a:avLst/>
+          </a:prstGeom>
+          <a:noFill/>
+        </p:spPr>
+        <p:txBody>
+          <a:bodyPr wrap="square">
+            <a:spAutoFit/>
+          </a:bodyPr>
+          <a:lstStyle/>
+          <a:p>
+            <a:pPr>
+              <a:defRPr sz="3400" b="1">
+                <a:solidFill>
+                  <a:srgbClr val="1B3A5C"/>
+                </a:solidFill>
+              </a:defRPr>
+            </a:pPr>
+            <a:r>
+              <a:t>Takeaways</a:t>
+            </a:r>
+          </a:p>
+        </p:txBody>
+      </p:sp>
+      <p:sp>
+        <p:nvSpPr>
+          <p:cNvPr id="3" name="Rectangle 2"/>
+          <p:cNvSpPr/>
+          <p:nvPr/>
+        </p:nvSpPr>
+        <p:spPr>
+          <a:xfrm>
+            <a:off x="640080" y="1325880"/>
+            <a:ext cx="1463040" cy="54864"/>
+          </a:xfrm>
+          <a:prstGeom prst="rect">
+            <a:avLst/>
+          </a:prstGeom>
+          <a:solidFill>
+            <a:srgbClr val="0E7C86"/>
+          </a:solidFill>
+          <a:ln>
+            <a:noFill/>
+          </a:ln>
+          <a:effectLst/>
+        </p:spPr>
+        <p:style>
+          <a:lnRef idx="1">
+            <a:schemeClr val="accent1"/>
+          </a:lnRef>
+          <a:fillRef idx="3">
+            <a:schemeClr val="accent1"/>
+          </a:fillRef>
+          <a:effectRef idx="2">
+            <a:schemeClr val="accent1"/>
+          </a:effectRef>
+          <a:fontRef idx="minor">
+            <a:schemeClr val="lt1"/>
+          </a:fontRef>
+        </p:style>
+        <p:txBody>
+          <a:bodyPr rtlCol="0" anchor="ctr"/>
+          <a:lstStyle/>
+          <a:p>
+            <a:pPr algn="ctr"/>
+          </a:p>
+        </p:txBody>
+      </p:sp>
+      <p:sp>
+        <p:nvSpPr>
+          <p:cNvPr id="4" name="TextBox 3"/>
+          <p:cNvSpPr txBox="1"/>
+          <p:nvPr/>
+        </p:nvSpPr>
+        <p:spPr>
+          <a:xfrm>
+            <a:off x="777240" y="2194560"/>
+            <a:ext cx="10607040" cy="4206240"/>
+          </a:xfrm>
+          <a:prstGeom prst="rect">
+            <a:avLst/>
+          </a:prstGeom>
+          <a:noFill/>
+        </p:spPr>
+        <p:txBody>
+          <a:bodyPr wrap="square">
+            <a:spAutoFit/>
+          </a:bodyPr>
+          <a:lstStyle/>
+          <a:p>
+            <a:pPr>
+              <a:spcAft>
+                <a:spcPts val="2200"/>
+              </a:spcAft>
+              <a:defRPr sz="2200">
+                <a:solidFill>
+                  <a:srgbClr val="22262B"/>
+                </a:solidFill>
+              </a:defRPr>
+            </a:pPr>
+            <a:r>
+              <a:t>• Resazurin turns metabolism into a color change — cheap, non-lethal, 96 animals at a time.</a:t>
+            </a:r>
+          </a:p>
+          <a:p>
+            <a:pPr>
+              <a:spcAft>
+                <a:spcPts val="2200"/>
+              </a:spcAft>
+              <a:defRPr sz="2200">
+                <a:solidFill>
+                  <a:srgbClr val="22262B"/>
+                </a:solidFill>
+              </a:defRPr>
+            </a:pPr>
+            <a:r>
+              <a:t>• Published and validated against oxygen consumption (PeerJ 2026).</a:t>
+            </a:r>
+          </a:p>
+          <a:p>
+            <a:pPr>
+              <a:spcAft>
+                <a:spcPts val="2200"/>
+              </a:spcAft>
+              <a:defRPr sz="2200">
+                <a:solidFill>
+                  <a:srgbClr val="22262B"/>
+                </a:solidFill>
+              </a:defRPr>
+            </a:pPr>
+            <a:r>
+              <a:t>• Predicts phenotype: metabolic curve shape forecasts family hardiness (cross-validated rho ≈ 0.8).</a:t>
+            </a:r>
+          </a:p>
+          <a:p>
+            <a:pPr>
+              <a:spcAft>
+                <a:spcPts val="2200"/>
+              </a:spcAft>
+              <a:defRPr sz="2200">
+                <a:solidFill>
+                  <a:srgbClr val="22262B"/>
+                </a:solidFill>
+              </a:defRPr>
+            </a:pPr>
+            <a:r>
+              <a:t>• Measures stress in real time: a same-day readout of how hard your crop is working.</a:t>
+            </a:r>
+          </a:p>
+        </p:txBody>
+      </p:sp>
+      <p:sp>
+        <p:nvSpPr>
+          <p:cNvPr id="5" name="Rectangle 4"/>
+          <p:cNvSpPr/>
+          <p:nvPr/>
+        </p:nvSpPr>
+        <p:spPr>
+          <a:xfrm>
+            <a:off x="777240" y="5623560"/>
+            <a:ext cx="10607040" cy="777240"/>
+          </a:xfrm>
+          <a:prstGeom prst="rect">
+            <a:avLst/>
+          </a:prstGeom>
+          <a:solidFill>
+            <a:srgbClr val="EFF3F6"/>
+          </a:solidFill>
+          <a:ln w="15875">
+            <a:solidFill>
+              <a:srgbClr val="0E7C86"/>
+            </a:solidFill>
+          </a:ln>
+          <a:effectLst/>
+        </p:spPr>
+        <p:style>
+          <a:lnRef idx="1">
+            <a:schemeClr val="accent1"/>
+          </a:lnRef>
+          <a:fillRef idx="3">
+            <a:schemeClr val="accent1"/>
+          </a:fillRef>
+          <a:effectRef idx="2">
+            <a:schemeClr val="accent1"/>
+          </a:effectRef>
+          <a:fontRef idx="minor">
+            <a:schemeClr val="lt1"/>
+          </a:fontRef>
+        </p:style>
+        <p:txBody>
+          <a:bodyPr rtlCol="0" anchor="ctr" wrap="square"/>
+          <a:lstStyle/>
+          <a:p>
+            <a:pPr algn="ctr">
+              <a:defRPr sz="1900" b="1">
+                <a:solidFill>
+                  <a:srgbClr val="1B3A5C"/>
+                </a:solidFill>
+              </a:defRPr>
+            </a:pPr>
+            <a:r>
+              <a:t>FUNDING  - USDA-WRAC - sormi.science</a:t>
             </a:r>
           </a:p>
         </p:txBody>

--- a/Future-Shellf-PCSGA-2026.pptx
+++ b/Future-Shellf-PCSGA-2026.pptx
@@ -4,29 +4,31 @@
   <p:sldMasterIdLst>
     <p:sldMasterId id="2147483648" r:id="rId1"/>
   </p:sldMasterIdLst>
+  <p:notesMasterIdLst>
+    <p:notesMasterId r:id="rId21"/>
+  </p:notesMasterIdLst>
   <p:sldIdLst>
-    <p:sldId id="256" r:id="rId7"/>
-    <p:sldId id="257" r:id="rId9"/>
-    <p:sldId id="258" r:id="rId10"/>
-    <p:sldId id="259" r:id="rId11"/>
-    <p:sldId id="260" r:id="rId12"/>
-    <p:sldId id="261" r:id="rId13"/>
-    <p:sldId id="262" r:id="rId14"/>
-    <p:sldId id="263" r:id="rId15"/>
-    <p:sldId id="264" r:id="rId16"/>
-    <p:sldId id="265" r:id="rId17"/>
-    <p:sldId id="266" r:id="rId18"/>
-    <p:sldId id="267" r:id="rId19"/>
-    <p:sldId id="268" r:id="rId20"/>
-    <p:sldId id="269" r:id="rId21"/>
-    <p:sldId id="270" r:id="rId22"/>
-    <p:sldId id="271" r:id="rId23"/>
-    <p:sldId id="272" r:id="rId24"/>
-    <p:sldId id="273" r:id="rId25"/>
-    <p:sldId id="274" r:id="rId26"/>
-    <p:sldId id="275" r:id="rId27"/>
+    <p:sldId id="256" r:id="rId2"/>
+    <p:sldId id="257" r:id="rId3"/>
+    <p:sldId id="258" r:id="rId4"/>
+    <p:sldId id="259" r:id="rId5"/>
+    <p:sldId id="260" r:id="rId6"/>
+    <p:sldId id="261" r:id="rId7"/>
+    <p:sldId id="262" r:id="rId8"/>
+    <p:sldId id="263" r:id="rId9"/>
+    <p:sldId id="264" r:id="rId10"/>
+    <p:sldId id="265" r:id="rId11"/>
+    <p:sldId id="266" r:id="rId12"/>
+    <p:sldId id="267" r:id="rId13"/>
+    <p:sldId id="268" r:id="rId14"/>
+    <p:sldId id="269" r:id="rId15"/>
+    <p:sldId id="270" r:id="rId16"/>
+    <p:sldId id="271" r:id="rId17"/>
+    <p:sldId id="272" r:id="rId18"/>
+    <p:sldId id="273" r:id="rId19"/>
+    <p:sldId id="275" r:id="rId20"/>
   </p:sldIdLst>
-  <p:sldSz cx="12191695" cy="6858000" type="screen4x3"/>
+  <p:sldSz cx="12192000" cy="6858000"/>
   <p:notesSz cx="6858000" cy="9144000"/>
   <p:defaultTextStyle>
     <a:defPPr>
@@ -123,11 +125,27 @@
       </a:defRPr>
     </a:lvl9pPr>
   </p:defaultTextStyle>
+  <p:extLst>
+    <p:ext uri="{EFAFB233-063F-42B5-8137-9DF3F51BA10A}">
+      <p15:sldGuideLst xmlns:p15="http://schemas.microsoft.com/office/powerpoint/2012/main">
+        <p15:guide id="1" orient="horz" pos="2160">
+          <p15:clr>
+            <a:srgbClr val="A4A3A4"/>
+          </p15:clr>
+        </p15:guide>
+        <p15:guide id="2" pos="2880">
+          <p15:clr>
+            <a:srgbClr val="A4A3A4"/>
+          </p15:clr>
+        </p15:guide>
+      </p15:sldGuideLst>
+    </p:ext>
+  </p:extLst>
 </p:presentation>
 </file>
 
 <file path=ppt/notesMasters/notesMaster1.xml><?xml version="1.0" encoding="utf-8"?>
-<p:notesMaster xmlns:a="http://schemas.openxmlformats.org/drawingml/2006/main" xmlns:p="http://schemas.openxmlformats.org/presentationml/2006/main" xmlns:r="http://schemas.openxmlformats.org/officeDocument/2006/relationships">
+<p:notesMaster xmlns:a="http://schemas.openxmlformats.org/drawingml/2006/main" xmlns:r="http://schemas.openxmlformats.org/officeDocument/2006/relationships" xmlns:p="http://schemas.openxmlformats.org/presentationml/2006/main">
   <p:cSld>
     <p:bg>
       <p:bgRef idx="1001">
@@ -148,241 +166,16 @@
           <a:chExt cx="0" cy="0"/>
         </a:xfrm>
       </p:grpSpPr>
-      <p:sp>
-        <p:nvSpPr>
-          <p:cNvPr id="2" name="Header Placeholder 1"/>
-          <p:cNvSpPr>
-            <a:spLocks noGrp="1"/>
-          </p:cNvSpPr>
-          <p:nvPr>
-            <p:ph type="hdr" sz="quarter"/>
-          </p:nvPr>
-        </p:nvSpPr>
-        <p:spPr>
-          <a:xfrm>
-            <a:off x="0" y="0"/>
-            <a:ext cx="2971800" cy="457200"/>
-          </a:xfrm>
-          <a:prstGeom prst="rect">
-            <a:avLst/>
-          </a:prstGeom>
-        </p:spPr>
-        <p:txBody>
-          <a:bodyPr vert="horz" lIns="91440" tIns="45720" rIns="91440" bIns="45720" rtlCol="0"/>
-          <a:lstStyle>
-            <a:lvl1pPr algn="l">
-              <a:defRPr sz="1200"/>
-            </a:lvl1pPr>
-          </a:lstStyle>
-          <a:p>
-            <a:endParaRPr lang="en-US"/>
-          </a:p>
-        </p:txBody>
-      </p:sp>
-      <p:sp>
-        <p:nvSpPr>
-          <p:cNvPr id="3" name="Date Placeholder 2"/>
-          <p:cNvSpPr>
-            <a:spLocks noGrp="1"/>
-          </p:cNvSpPr>
-          <p:nvPr>
-            <p:ph type="dt" idx="1"/>
-          </p:nvPr>
-        </p:nvSpPr>
-        <p:spPr>
-          <a:xfrm>
-            <a:off x="3884613" y="0"/>
-            <a:ext cx="2971800" cy="457200"/>
-          </a:xfrm>
-          <a:prstGeom prst="rect">
-            <a:avLst/>
-          </a:prstGeom>
-        </p:spPr>
-        <p:txBody>
-          <a:bodyPr vert="horz" lIns="91440" tIns="45720" rIns="91440" bIns="45720" rtlCol="0"/>
-          <a:lstStyle>
-            <a:lvl1pPr algn="r">
-              <a:defRPr sz="1200"/>
-            </a:lvl1pPr>
-          </a:lstStyle>
-          <a:p>
-            <a:fld id="{0F89C1C7-3DCD-1040-A9CF-14679D8B5DDD}" type="datetimeFigureOut">
-              <a:rPr lang="en-US" smtClean="0"/>
-              <a:t>10/17/16</a:t>
-            </a:fld>
-            <a:endParaRPr lang="en-US"/>
-          </a:p>
-        </p:txBody>
-      </p:sp>
-      <p:sp>
-        <p:nvSpPr>
-          <p:cNvPr id="4" name="Slide Image Placeholder 3"/>
-          <p:cNvSpPr>
-            <a:spLocks noGrp="1" noRot="1" noChangeAspect="1"/>
-          </p:cNvSpPr>
-          <p:nvPr>
-            <p:ph type="sldImg" idx="2"/>
-          </p:nvPr>
-        </p:nvSpPr>
-        <p:spPr>
-          <a:xfrm>
-            <a:off x="1143000" y="685800"/>
-            <a:ext cx="4572000" cy="3429000"/>
-          </a:xfrm>
-          <a:prstGeom prst="rect">
-            <a:avLst/>
-          </a:prstGeom>
-          <a:noFill/>
-          <a:ln w="12700">
-            <a:solidFill>
-              <a:prstClr val="black"/>
-            </a:solidFill>
-          </a:ln>
-        </p:spPr>
-        <p:txBody>
-          <a:bodyPr vert="horz" lIns="91440" tIns="45720" rIns="91440" bIns="45720" rtlCol="0" anchor="ctr"/>
-          <a:lstStyle/>
-          <a:p>
-            <a:endParaRPr lang="en-US"/>
-          </a:p>
-        </p:txBody>
-      </p:sp>
-      <p:sp>
-        <p:nvSpPr>
-          <p:cNvPr id="5" name="Notes Placeholder 4"/>
-          <p:cNvSpPr>
-            <a:spLocks noGrp="1"/>
-          </p:cNvSpPr>
-          <p:nvPr>
-            <p:ph type="body" sz="quarter" idx="3"/>
-          </p:nvPr>
-        </p:nvSpPr>
-        <p:spPr>
-          <a:xfrm>
-            <a:off x="685800" y="4343400"/>
-            <a:ext cx="5486400" cy="4114800"/>
-          </a:xfrm>
-          <a:prstGeom prst="rect">
-            <a:avLst/>
-          </a:prstGeom>
-        </p:spPr>
-        <p:txBody>
-          <a:bodyPr vert="horz" lIns="91440" tIns="45720" rIns="91440" bIns="45720" rtlCol="0"/>
-          <a:lstStyle/>
-          <a:p>
-            <a:pPr lvl="0"/>
-            <a:r>
-              <a:rPr lang="en-US" smtClean="0"/>
-              <a:t>Click to edit Master text styles</a:t>
-            </a:r>
-          </a:p>
-          <a:p>
-            <a:pPr lvl="1"/>
-            <a:r>
-              <a:rPr lang="en-US" smtClean="0"/>
-              <a:t>Second level</a:t>
-            </a:r>
-          </a:p>
-          <a:p>
-            <a:pPr lvl="2"/>
-            <a:r>
-              <a:rPr lang="en-US" smtClean="0"/>
-              <a:t>Third level</a:t>
-            </a:r>
-          </a:p>
-          <a:p>
-            <a:pPr lvl="3"/>
-            <a:r>
-              <a:rPr lang="en-US" smtClean="0"/>
-              <a:t>Fourth level</a:t>
-            </a:r>
-          </a:p>
-          <a:p>
-            <a:pPr lvl="4"/>
-            <a:r>
-              <a:rPr lang="en-US" smtClean="0"/>
-              <a:t>Fifth level</a:t>
-            </a:r>
-            <a:endParaRPr lang="en-US"/>
-          </a:p>
-        </p:txBody>
-      </p:sp>
-      <p:sp>
-        <p:nvSpPr>
-          <p:cNvPr id="6" name="Footer Placeholder 5"/>
-          <p:cNvSpPr>
-            <a:spLocks noGrp="1"/>
-          </p:cNvSpPr>
-          <p:nvPr>
-            <p:ph type="ftr" sz="quarter" idx="4"/>
-          </p:nvPr>
-        </p:nvSpPr>
-        <p:spPr>
-          <a:xfrm>
-            <a:off x="0" y="8685213"/>
-            <a:ext cx="2971800" cy="457200"/>
-          </a:xfrm>
-          <a:prstGeom prst="rect">
-            <a:avLst/>
-          </a:prstGeom>
-        </p:spPr>
-        <p:txBody>
-          <a:bodyPr vert="horz" lIns="91440" tIns="45720" rIns="91440" bIns="45720" rtlCol="0" anchor="b"/>
-          <a:lstStyle>
-            <a:lvl1pPr algn="l">
-              <a:defRPr sz="1200"/>
-            </a:lvl1pPr>
-          </a:lstStyle>
-          <a:p>
-            <a:endParaRPr lang="en-US"/>
-          </a:p>
-        </p:txBody>
-      </p:sp>
-      <p:sp>
-        <p:nvSpPr>
-          <p:cNvPr id="7" name="Slide Number Placeholder 6"/>
-          <p:cNvSpPr>
-            <a:spLocks noGrp="1"/>
-          </p:cNvSpPr>
-          <p:nvPr>
-            <p:ph type="sldNum" sz="quarter" idx="5"/>
-          </p:nvPr>
-        </p:nvSpPr>
-        <p:spPr>
-          <a:xfrm>
-            <a:off x="3884613" y="8685213"/>
-            <a:ext cx="2971800" cy="457200"/>
-          </a:xfrm>
-          <a:prstGeom prst="rect">
-            <a:avLst/>
-          </a:prstGeom>
-        </p:spPr>
-        <p:txBody>
-          <a:bodyPr vert="horz" lIns="91440" tIns="45720" rIns="91440" bIns="45720" rtlCol="0" anchor="b"/>
-          <a:lstStyle>
-            <a:lvl1pPr algn="r">
-              <a:defRPr sz="1200"/>
-            </a:lvl1pPr>
-          </a:lstStyle>
-          <a:p>
-            <a:fld id="{BB5E49A5-4136-284D-997B-48E1D791AD67}" type="slidenum">
-              <a:rPr lang="en-US" smtClean="0"/>
-              <a:t>‹#›</a:t>
-            </a:fld>
-            <a:endParaRPr lang="en-US"/>
-          </a:p>
-        </p:txBody>
-      </p:sp>
     </p:spTree>
     <p:extLst>
       <p:ext uri="{BB962C8B-B14F-4D97-AF65-F5344CB8AC3E}">
-        <p14:creationId xmlns:p14="http://schemas.microsoft.com/office/powerpoint/2010/main" val="2623252185"/>
+        <p14:creationId xmlns:p14="http://schemas.microsoft.com/office/powerpoint/2010/main" val="369783723"/>
       </p:ext>
     </p:extLst>
   </p:cSld>
   <p:clrMap bg1="lt1" tx1="dk1" bg2="lt2" tx2="dk2" accent1="accent1" accent2="accent2" accent3="accent3" accent4="accent4" accent5="accent5" accent6="accent6" hlink="hlink" folHlink="folHlink"/>
   <p:notesStyle>
-    <a:lvl1pPr marL="0" algn="l" defTabSz="457200" rtl="0" eaLnBrk="1" latinLnBrk="0" hangingPunct="1">
+    <a:lvl1pPr marL="0" algn="l" defTabSz="914400" rtl="0" eaLnBrk="1" latinLnBrk="0" hangingPunct="1">
       <a:defRPr sz="1200" kern="1200">
         <a:solidFill>
           <a:schemeClr val="tx1"/>
@@ -392,7 +185,7 @@
         <a:cs typeface="+mn-cs"/>
       </a:defRPr>
     </a:lvl1pPr>
-    <a:lvl2pPr marL="457200" algn="l" defTabSz="457200" rtl="0" eaLnBrk="1" latinLnBrk="0" hangingPunct="1">
+    <a:lvl2pPr marL="457200" algn="l" defTabSz="914400" rtl="0" eaLnBrk="1" latinLnBrk="0" hangingPunct="1">
       <a:defRPr sz="1200" kern="1200">
         <a:solidFill>
           <a:schemeClr val="tx1"/>
@@ -402,7 +195,7 @@
         <a:cs typeface="+mn-cs"/>
       </a:defRPr>
     </a:lvl2pPr>
-    <a:lvl3pPr marL="914400" algn="l" defTabSz="457200" rtl="0" eaLnBrk="1" latinLnBrk="0" hangingPunct="1">
+    <a:lvl3pPr marL="914400" algn="l" defTabSz="914400" rtl="0" eaLnBrk="1" latinLnBrk="0" hangingPunct="1">
       <a:defRPr sz="1200" kern="1200">
         <a:solidFill>
           <a:schemeClr val="tx1"/>
@@ -412,7 +205,7 @@
         <a:cs typeface="+mn-cs"/>
       </a:defRPr>
     </a:lvl3pPr>
-    <a:lvl4pPr marL="1371600" algn="l" defTabSz="457200" rtl="0" eaLnBrk="1" latinLnBrk="0" hangingPunct="1">
+    <a:lvl4pPr marL="1371600" algn="l" defTabSz="914400" rtl="0" eaLnBrk="1" latinLnBrk="0" hangingPunct="1">
       <a:defRPr sz="1200" kern="1200">
         <a:solidFill>
           <a:schemeClr val="tx1"/>
@@ -422,7 +215,7 @@
         <a:cs typeface="+mn-cs"/>
       </a:defRPr>
     </a:lvl4pPr>
-    <a:lvl5pPr marL="1828800" algn="l" defTabSz="457200" rtl="0" eaLnBrk="1" latinLnBrk="0" hangingPunct="1">
+    <a:lvl5pPr marL="1828800" algn="l" defTabSz="914400" rtl="0" eaLnBrk="1" latinLnBrk="0" hangingPunct="1">
       <a:defRPr sz="1200" kern="1200">
         <a:solidFill>
           <a:schemeClr val="tx1"/>
@@ -432,7 +225,7 @@
         <a:cs typeface="+mn-cs"/>
       </a:defRPr>
     </a:lvl5pPr>
-    <a:lvl6pPr marL="2286000" algn="l" defTabSz="457200" rtl="0" eaLnBrk="1" latinLnBrk="0" hangingPunct="1">
+    <a:lvl6pPr marL="2286000" algn="l" defTabSz="914400" rtl="0" eaLnBrk="1" latinLnBrk="0" hangingPunct="1">
       <a:defRPr sz="1200" kern="1200">
         <a:solidFill>
           <a:schemeClr val="tx1"/>
@@ -442,7 +235,7 @@
         <a:cs typeface="+mn-cs"/>
       </a:defRPr>
     </a:lvl6pPr>
-    <a:lvl7pPr marL="2743200" algn="l" defTabSz="457200" rtl="0" eaLnBrk="1" latinLnBrk="0" hangingPunct="1">
+    <a:lvl7pPr marL="2743200" algn="l" defTabSz="914400" rtl="0" eaLnBrk="1" latinLnBrk="0" hangingPunct="1">
       <a:defRPr sz="1200" kern="1200">
         <a:solidFill>
           <a:schemeClr val="tx1"/>
@@ -452,7 +245,7 @@
         <a:cs typeface="+mn-cs"/>
       </a:defRPr>
     </a:lvl7pPr>
-    <a:lvl8pPr marL="3200400" algn="l" defTabSz="457200" rtl="0" eaLnBrk="1" latinLnBrk="0" hangingPunct="1">
+    <a:lvl8pPr marL="3200400" algn="l" defTabSz="914400" rtl="0" eaLnBrk="1" latinLnBrk="0" hangingPunct="1">
       <a:defRPr sz="1200" kern="1200">
         <a:solidFill>
           <a:schemeClr val="tx1"/>
@@ -462,7 +255,7 @@
         <a:cs typeface="+mn-cs"/>
       </a:defRPr>
     </a:lvl8pPr>
-    <a:lvl9pPr marL="3657600" algn="l" defTabSz="457200" rtl="0" eaLnBrk="1" latinLnBrk="0" hangingPunct="1">
+    <a:lvl9pPr marL="3657600" algn="l" defTabSz="914400" rtl="0" eaLnBrk="1" latinLnBrk="0" hangingPunct="1">
       <a:defRPr sz="1200" kern="1200">
         <a:solidFill>
           <a:schemeClr val="tx1"/>
@@ -477,7 +270,7 @@
 </file>
 
 <file path=ppt/notesSlides/notesSlide1.xml><?xml version="1.0" encoding="utf-8"?>
-<p:notes xmlns:a="http://schemas.openxmlformats.org/drawingml/2006/main" xmlns:p="http://schemas.openxmlformats.org/presentationml/2006/main" xmlns:r="http://schemas.openxmlformats.org/officeDocument/2006/relationships">
+<p:notes xmlns:a="http://schemas.openxmlformats.org/drawingml/2006/main" xmlns:r="http://schemas.openxmlformats.org/officeDocument/2006/relationships" xmlns:p="http://schemas.openxmlformats.org/presentationml/2006/main">
   <p:cSld>
     <p:spTree>
       <p:nvGrpSpPr>
@@ -497,43 +290,43 @@
         <p:nvSpPr>
           <p:cNvPr id="2" name="Slide Image Placeholder 1"/>
           <p:cNvSpPr>
+            <a:spLocks noGrp="1" noRot="1" noChangeAspect="1"/>
+          </p:cNvSpPr>
+          <p:nvPr>
+            <p:ph type="sldImg" idx="2"/>
+          </p:nvPr>
+        </p:nvSpPr>
+        <p:spPr/>
+      </p:sp>
+      <p:sp>
+        <p:nvSpPr>
+          <p:cNvPr id="3" name="Notes Placeholder 2"/>
+          <p:cNvSpPr>
             <a:spLocks noGrp="1"/>
           </p:cNvSpPr>
           <p:nvPr>
-            <p:ph type="sldImg" idx="2"/>
+            <p:ph type="body" sz="quarter" idx="3"/>
           </p:nvPr>
         </p:nvSpPr>
         <p:spPr/>
-      </p:sp>
-      <p:sp>
-        <p:nvSpPr>
-          <p:cNvPr id="3" name="Notes Placeholder 2"/>
+        <p:txBody>
+          <a:bodyPr/>
+          <a:lstStyle/>
+          <a:p>
+            <a:r>
+              <a:t>12-minute talk. Two things growers can use: predict phenotype before you grow it out, and read stress on the farm in real time.</a:t>
+            </a:r>
+          </a:p>
+        </p:txBody>
+      </p:sp>
+      <p:sp>
+        <p:nvSpPr>
+          <p:cNvPr id="4" name="Slide Number Placeholder 3"/>
           <p:cNvSpPr>
             <a:spLocks noGrp="1"/>
           </p:cNvSpPr>
           <p:nvPr>
-            <p:ph type="body" idx="3" sz="quarter"/>
-          </p:nvPr>
-        </p:nvSpPr>
-        <p:spPr/>
-        <p:txBody>
-          <a:bodyPr/>
-          <a:lstStyle/>
-          <a:p>
-            <a:r>
-              <a:t>12-minute talk. Two things growers can use: predict phenotype before you grow it out, and read stress on the farm in real time.</a:t>
-            </a:r>
-          </a:p>
-        </p:txBody>
-      </p:sp>
-      <p:sp>
-        <p:nvSpPr>
-          <p:cNvPr id="4" name="Slide Number Placeholder 3"/>
-          <p:cNvSpPr>
-            <a:spLocks noGrp="1"/>
-          </p:cNvSpPr>
-          <p:nvPr>
-            <p:ph type="sldNum" idx="5" sz="quarter"/>
+            <p:ph type="sldNum" sz="quarter" idx="5"/>
           </p:nvPr>
         </p:nvSpPr>
         <p:spPr/>
@@ -547,7 +340,7 @@
 </file>
 
 <file path=ppt/notesSlides/notesSlide10.xml><?xml version="1.0" encoding="utf-8"?>
-<p:notes xmlns:a="http://schemas.openxmlformats.org/drawingml/2006/main" xmlns:p="http://schemas.openxmlformats.org/presentationml/2006/main" xmlns:r="http://schemas.openxmlformats.org/officeDocument/2006/relationships">
+<p:notes xmlns:a="http://schemas.openxmlformats.org/drawingml/2006/main" xmlns:r="http://schemas.openxmlformats.org/officeDocument/2006/relationships" xmlns:p="http://schemas.openxmlformats.org/presentationml/2006/main">
   <p:cSld>
     <p:spTree>
       <p:nvGrpSpPr>
@@ -567,43 +360,43 @@
         <p:nvSpPr>
           <p:cNvPr id="2" name="Slide Image Placeholder 1"/>
           <p:cNvSpPr>
+            <a:spLocks noGrp="1" noRot="1" noChangeAspect="1"/>
+          </p:cNvSpPr>
+          <p:nvPr>
+            <p:ph type="sldImg" idx="2"/>
+          </p:nvPr>
+        </p:nvSpPr>
+        <p:spPr/>
+      </p:sp>
+      <p:sp>
+        <p:nvSpPr>
+          <p:cNvPr id="3" name="Notes Placeholder 2"/>
+          <p:cNvSpPr>
             <a:spLocks noGrp="1"/>
           </p:cNvSpPr>
           <p:nvPr>
-            <p:ph type="sldImg" idx="2"/>
+            <p:ph type="body" sz="quarter" idx="3"/>
           </p:nvPr>
         </p:nvSpPr>
         <p:spPr/>
-      </p:sp>
-      <p:sp>
-        <p:nvSpPr>
-          <p:cNvPr id="3" name="Notes Placeholder 2"/>
+        <p:txBody>
+          <a:bodyPr/>
+          <a:lstStyle/>
+          <a:p>
+            <a:r>
+              <a:t>A small gap between the two means the prediction isn't just memorizing our nine families. Spend ~45 s here — every rho on the next three slides depends on it.</a:t>
+            </a:r>
+          </a:p>
+        </p:txBody>
+      </p:sp>
+      <p:sp>
+        <p:nvSpPr>
+          <p:cNvPr id="4" name="Slide Number Placeholder 3"/>
           <p:cNvSpPr>
             <a:spLocks noGrp="1"/>
           </p:cNvSpPr>
           <p:nvPr>
-            <p:ph type="body" idx="3" sz="quarter"/>
-          </p:nvPr>
-        </p:nvSpPr>
-        <p:spPr/>
-        <p:txBody>
-          <a:bodyPr/>
-          <a:lstStyle/>
-          <a:p>
-            <a:r>
-              <a:t>A small gap between the two means the prediction isn't just memorizing our nine families. Spend ~45 s here — every rho on the next three slides depends on it.</a:t>
-            </a:r>
-          </a:p>
-        </p:txBody>
-      </p:sp>
-      <p:sp>
-        <p:nvSpPr>
-          <p:cNvPr id="4" name="Slide Number Placeholder 3"/>
-          <p:cNvSpPr>
-            <a:spLocks noGrp="1"/>
-          </p:cNvSpPr>
-          <p:nvPr>
-            <p:ph type="sldNum" idx="5" sz="quarter"/>
+            <p:ph type="sldNum" sz="quarter" idx="5"/>
           </p:nvPr>
         </p:nvSpPr>
         <p:spPr/>
@@ -617,7 +410,7 @@
 </file>
 
 <file path=ppt/notesSlides/notesSlide11.xml><?xml version="1.0" encoding="utf-8"?>
-<p:notes xmlns:a="http://schemas.openxmlformats.org/drawingml/2006/main" xmlns:p="http://schemas.openxmlformats.org/presentationml/2006/main" xmlns:r="http://schemas.openxmlformats.org/officeDocument/2006/relationships">
+<p:notes xmlns:a="http://schemas.openxmlformats.org/drawingml/2006/main" xmlns:r="http://schemas.openxmlformats.org/officeDocument/2006/relationships" xmlns:p="http://schemas.openxmlformats.org/presentationml/2006/main">
   <p:cSld>
     <p:spTree>
       <p:nvGrpSpPr>
@@ -637,43 +430,43 @@
         <p:nvSpPr>
           <p:cNvPr id="2" name="Slide Image Placeholder 1"/>
           <p:cNvSpPr>
+            <a:spLocks noGrp="1" noRot="1" noChangeAspect="1"/>
+          </p:cNvSpPr>
+          <p:nvPr>
+            <p:ph type="sldImg" idx="2"/>
+          </p:nvPr>
+        </p:nvSpPr>
+        <p:spPr/>
+      </p:sp>
+      <p:sp>
+        <p:nvSpPr>
+          <p:cNvPr id="3" name="Notes Placeholder 2"/>
+          <p:cNvSpPr>
             <a:spLocks noGrp="1"/>
           </p:cNvSpPr>
           <p:nvPr>
-            <p:ph type="sldImg" idx="2"/>
+            <p:ph type="body" sz="quarter" idx="3"/>
           </p:nvPr>
         </p:nvSpPr>
         <p:spPr/>
-      </p:sp>
-      <p:sp>
-        <p:nvSpPr>
-          <p:cNvPr id="3" name="Notes Placeholder 2"/>
+        <p:txBody>
+          <a:bodyPr/>
+          <a:lstStyle/>
+          <a:p>
+            <a:r>
+              <a:t>Leave-one-family-out CV is the honest number.</a:t>
+            </a:r>
+          </a:p>
+        </p:txBody>
+      </p:sp>
+      <p:sp>
+        <p:nvSpPr>
+          <p:cNvPr id="4" name="Slide Number Placeholder 3"/>
           <p:cNvSpPr>
             <a:spLocks noGrp="1"/>
           </p:cNvSpPr>
           <p:nvPr>
-            <p:ph type="body" idx="3" sz="quarter"/>
-          </p:nvPr>
-        </p:nvSpPr>
-        <p:spPr/>
-        <p:txBody>
-          <a:bodyPr/>
-          <a:lstStyle/>
-          <a:p>
-            <a:r>
-              <a:t>Leave-one-family-out CV is the honest number.</a:t>
-            </a:r>
-          </a:p>
-        </p:txBody>
-      </p:sp>
-      <p:sp>
-        <p:nvSpPr>
-          <p:cNvPr id="4" name="Slide Number Placeholder 3"/>
-          <p:cNvSpPr>
-            <a:spLocks noGrp="1"/>
-          </p:cNvSpPr>
-          <p:nvPr>
-            <p:ph type="sldNum" idx="5" sz="quarter"/>
+            <p:ph type="sldNum" sz="quarter" idx="5"/>
           </p:nvPr>
         </p:nvSpPr>
         <p:spPr/>
@@ -687,7 +480,7 @@
 </file>
 
 <file path=ppt/notesSlides/notesSlide12.xml><?xml version="1.0" encoding="utf-8"?>
-<p:notes xmlns:a="http://schemas.openxmlformats.org/drawingml/2006/main" xmlns:p="http://schemas.openxmlformats.org/presentationml/2006/main" xmlns:r="http://schemas.openxmlformats.org/officeDocument/2006/relationships">
+<p:notes xmlns:a="http://schemas.openxmlformats.org/drawingml/2006/main" xmlns:r="http://schemas.openxmlformats.org/officeDocument/2006/relationships" xmlns:p="http://schemas.openxmlformats.org/presentationml/2006/main">
   <p:cSld>
     <p:spTree>
       <p:nvGrpSpPr>
@@ -707,43 +500,43 @@
         <p:nvSpPr>
           <p:cNvPr id="2" name="Slide Image Placeholder 1"/>
           <p:cNvSpPr>
+            <a:spLocks noGrp="1" noRot="1" noChangeAspect="1"/>
+          </p:cNvSpPr>
+          <p:nvPr>
+            <p:ph type="sldImg" idx="2"/>
+          </p:nvPr>
+        </p:nvSpPr>
+        <p:spPr/>
+      </p:sp>
+      <p:sp>
+        <p:nvSpPr>
+          <p:cNvPr id="3" name="Notes Placeholder 2"/>
+          <p:cNvSpPr>
             <a:spLocks noGrp="1"/>
           </p:cNvSpPr>
           <p:nvPr>
-            <p:ph type="sldImg" idx="2"/>
+            <p:ph type="body" sz="quarter" idx="3"/>
           </p:nvPr>
         </p:nvSpPr>
         <p:spPr/>
-      </p:sp>
-      <p:sp>
-        <p:nvSpPr>
-          <p:cNvPr id="3" name="Notes Placeholder 2"/>
+        <p:txBody>
+          <a:bodyPr/>
+          <a:lstStyle/>
+          <a:p>
+            <a:r>
+              <a:t>Metabolic depression as a resilience strategy — consistent with the PeerJ survival result.</a:t>
+            </a:r>
+          </a:p>
+        </p:txBody>
+      </p:sp>
+      <p:sp>
+        <p:nvSpPr>
+          <p:cNvPr id="4" name="Slide Number Placeholder 3"/>
           <p:cNvSpPr>
             <a:spLocks noGrp="1"/>
           </p:cNvSpPr>
           <p:nvPr>
-            <p:ph type="body" idx="3" sz="quarter"/>
-          </p:nvPr>
-        </p:nvSpPr>
-        <p:spPr/>
-        <p:txBody>
-          <a:bodyPr/>
-          <a:lstStyle/>
-          <a:p>
-            <a:r>
-              <a:t>Metabolic depression as a resilience strategy — consistent with the PeerJ survival result.</a:t>
-            </a:r>
-          </a:p>
-        </p:txBody>
-      </p:sp>
-      <p:sp>
-        <p:nvSpPr>
-          <p:cNvPr id="4" name="Slide Number Placeholder 3"/>
-          <p:cNvSpPr>
-            <a:spLocks noGrp="1"/>
-          </p:cNvSpPr>
-          <p:nvPr>
-            <p:ph type="sldNum" idx="5" sz="quarter"/>
+            <p:ph type="sldNum" sz="quarter" idx="5"/>
           </p:nvPr>
         </p:nvSpPr>
         <p:spPr/>
@@ -757,7 +550,7 @@
 </file>
 
 <file path=ppt/notesSlides/notesSlide13.xml><?xml version="1.0" encoding="utf-8"?>
-<p:notes xmlns:a="http://schemas.openxmlformats.org/drawingml/2006/main" xmlns:p="http://schemas.openxmlformats.org/presentationml/2006/main" xmlns:r="http://schemas.openxmlformats.org/officeDocument/2006/relationships">
+<p:notes xmlns:a="http://schemas.openxmlformats.org/drawingml/2006/main" xmlns:r="http://schemas.openxmlformats.org/officeDocument/2006/relationships" xmlns:p="http://schemas.openxmlformats.org/presentationml/2006/main">
   <p:cSld>
     <p:spTree>
       <p:nvGrpSpPr>
@@ -777,43 +570,43 @@
         <p:nvSpPr>
           <p:cNvPr id="2" name="Slide Image Placeholder 1"/>
           <p:cNvSpPr>
+            <a:spLocks noGrp="1" noRot="1" noChangeAspect="1"/>
+          </p:cNvSpPr>
+          <p:nvPr>
+            <p:ph type="sldImg" idx="2"/>
+          </p:nvPr>
+        </p:nvSpPr>
+        <p:spPr/>
+      </p:sp>
+      <p:sp>
+        <p:nvSpPr>
+          <p:cNvPr id="3" name="Notes Placeholder 2"/>
+          <p:cNvSpPr>
             <a:spLocks noGrp="1"/>
           </p:cNvSpPr>
           <p:nvPr>
-            <p:ph type="sldImg" idx="2"/>
+            <p:ph type="body" sz="quarter" idx="3"/>
           </p:nvPr>
         </p:nvSpPr>
         <p:spPr/>
-      </p:sp>
-      <p:sp>
-        <p:nvSpPr>
-          <p:cNvPr id="3" name="Notes Placeholder 2"/>
+        <p:txBody>
+          <a:bodyPr/>
+          <a:lstStyle/>
+          <a:p>
+            <a:r>
+              <a:t>Walk the curve once: climbs, peaks, then drops. Early rise, steadiness, time to steepest drop, depth of collapse. Then the next slide says which direction is good.</a:t>
+            </a:r>
+          </a:p>
+        </p:txBody>
+      </p:sp>
+      <p:sp>
+        <p:nvSpPr>
+          <p:cNvPr id="4" name="Slide Number Placeholder 3"/>
           <p:cNvSpPr>
             <a:spLocks noGrp="1"/>
           </p:cNvSpPr>
           <p:nvPr>
-            <p:ph type="body" idx="3" sz="quarter"/>
-          </p:nvPr>
-        </p:nvSpPr>
-        <p:spPr/>
-        <p:txBody>
-          <a:bodyPr/>
-          <a:lstStyle/>
-          <a:p>
-            <a:r>
-              <a:t>Walk the curve once: climbs, peaks, then drops. Early rise, steadiness, time to steepest drop, depth of collapse. Then the next slide says which direction is good.</a:t>
-            </a:r>
-          </a:p>
-        </p:txBody>
-      </p:sp>
-      <p:sp>
-        <p:nvSpPr>
-          <p:cNvPr id="4" name="Slide Number Placeholder 3"/>
-          <p:cNvSpPr>
-            <a:spLocks noGrp="1"/>
-          </p:cNvSpPr>
-          <p:nvPr>
-            <p:ph type="sldNum" idx="5" sz="quarter"/>
+            <p:ph type="sldNum" sz="quarter" idx="5"/>
           </p:nvPr>
         </p:nvSpPr>
         <p:spPr/>
@@ -827,7 +620,7 @@
 </file>
 
 <file path=ppt/notesSlides/notesSlide14.xml><?xml version="1.0" encoding="utf-8"?>
-<p:notes xmlns:a="http://schemas.openxmlformats.org/drawingml/2006/main" xmlns:p="http://schemas.openxmlformats.org/presentationml/2006/main" xmlns:r="http://schemas.openxmlformats.org/officeDocument/2006/relationships">
+<p:notes xmlns:a="http://schemas.openxmlformats.org/drawingml/2006/main" xmlns:r="http://schemas.openxmlformats.org/officeDocument/2006/relationships" xmlns:p="http://schemas.openxmlformats.org/presentationml/2006/main">
   <p:cSld>
     <p:spTree>
       <p:nvGrpSpPr>
@@ -847,43 +640,43 @@
         <p:nvSpPr>
           <p:cNvPr id="2" name="Slide Image Placeholder 1"/>
           <p:cNvSpPr>
+            <a:spLocks noGrp="1" noRot="1" noChangeAspect="1"/>
+          </p:cNvSpPr>
+          <p:nvPr>
+            <p:ph type="sldImg" idx="2"/>
+          </p:nvPr>
+        </p:nvSpPr>
+        <p:spPr/>
+      </p:sp>
+      <p:sp>
+        <p:nvSpPr>
+          <p:cNvPr id="3" name="Notes Placeholder 2"/>
+          <p:cNvSpPr>
             <a:spLocks noGrp="1"/>
           </p:cNvSpPr>
           <p:nvPr>
-            <p:ph type="sldImg" idx="2"/>
+            <p:ph type="body" sz="quarter" idx="3"/>
           </p:nvPr>
         </p:nvSpPr>
         <p:spPr/>
-      </p:sp>
-      <p:sp>
-        <p:nvSpPr>
-          <p:cNvPr id="3" name="Notes Placeholder 2"/>
+        <p:txBody>
+          <a:bodyPr/>
+          <a:lstStyle/>
+          <a:p>
+            <a:r>
+              <a:t>Measured under freshwater + heat. Blending averages out individual noise.</a:t>
+            </a:r>
+          </a:p>
+        </p:txBody>
+      </p:sp>
+      <p:sp>
+        <p:nvSpPr>
+          <p:cNvPr id="4" name="Slide Number Placeholder 3"/>
           <p:cNvSpPr>
             <a:spLocks noGrp="1"/>
           </p:cNvSpPr>
           <p:nvPr>
-            <p:ph type="body" idx="3" sz="quarter"/>
-          </p:nvPr>
-        </p:nvSpPr>
-        <p:spPr/>
-        <p:txBody>
-          <a:bodyPr/>
-          <a:lstStyle/>
-          <a:p>
-            <a:r>
-              <a:t>Measured under freshwater + heat. Blending averages out individual noise.</a:t>
-            </a:r>
-          </a:p>
-        </p:txBody>
-      </p:sp>
-      <p:sp>
-        <p:nvSpPr>
-          <p:cNvPr id="4" name="Slide Number Placeholder 3"/>
-          <p:cNvSpPr>
-            <a:spLocks noGrp="1"/>
-          </p:cNvSpPr>
-          <p:nvPr>
-            <p:ph type="sldNum" idx="5" sz="quarter"/>
+            <p:ph type="sldNum" sz="quarter" idx="5"/>
           </p:nvPr>
         </p:nvSpPr>
         <p:spPr/>
@@ -897,7 +690,7 @@
 </file>
 
 <file path=ppt/notesSlides/notesSlide15.xml><?xml version="1.0" encoding="utf-8"?>
-<p:notes xmlns:a="http://schemas.openxmlformats.org/drawingml/2006/main" xmlns:p="http://schemas.openxmlformats.org/presentationml/2006/main" xmlns:r="http://schemas.openxmlformats.org/officeDocument/2006/relationships">
+<p:notes xmlns:a="http://schemas.openxmlformats.org/drawingml/2006/main" xmlns:r="http://schemas.openxmlformats.org/officeDocument/2006/relationships" xmlns:p="http://schemas.openxmlformats.org/presentationml/2006/main">
   <p:cSld>
     <p:spTree>
       <p:nvGrpSpPr>
@@ -917,43 +710,43 @@
         <p:nvSpPr>
           <p:cNvPr id="2" name="Slide Image Placeholder 1"/>
           <p:cNvSpPr>
+            <a:spLocks noGrp="1" noRot="1" noChangeAspect="1"/>
+          </p:cNvSpPr>
+          <p:nvPr>
+            <p:ph type="sldImg" idx="2"/>
+          </p:nvPr>
+        </p:nvSpPr>
+        <p:spPr/>
+      </p:sp>
+      <p:sp>
+        <p:nvSpPr>
+          <p:cNvPr id="3" name="Notes Placeholder 2"/>
+          <p:cNvSpPr>
             <a:spLocks noGrp="1"/>
           </p:cNvSpPr>
           <p:nvPr>
-            <p:ph type="sldImg" idx="2"/>
+            <p:ph type="body" sz="quarter" idx="3"/>
           </p:nvPr>
         </p:nvSpPr>
         <p:spPr/>
-      </p:sp>
-      <p:sp>
-        <p:nvSpPr>
-          <p:cNvPr id="3" name="Notes Placeholder 2"/>
+        <p:txBody>
+          <a:bodyPr/>
+          <a:lstStyle/>
+          <a:p>
+            <a:r>
+              <a:t>Half a day of dye work stands in for a season of grow-out.</a:t>
+            </a:r>
+          </a:p>
+        </p:txBody>
+      </p:sp>
+      <p:sp>
+        <p:nvSpPr>
+          <p:cNvPr id="4" name="Slide Number Placeholder 3"/>
           <p:cNvSpPr>
             <a:spLocks noGrp="1"/>
           </p:cNvSpPr>
           <p:nvPr>
-            <p:ph type="body" idx="3" sz="quarter"/>
-          </p:nvPr>
-        </p:nvSpPr>
-        <p:spPr/>
-        <p:txBody>
-          <a:bodyPr/>
-          <a:lstStyle/>
-          <a:p>
-            <a:r>
-              <a:t>Half a day of dye work stands in for a season of grow-out.</a:t>
-            </a:r>
-          </a:p>
-        </p:txBody>
-      </p:sp>
-      <p:sp>
-        <p:nvSpPr>
-          <p:cNvPr id="4" name="Slide Number Placeholder 3"/>
-          <p:cNvSpPr>
-            <a:spLocks noGrp="1"/>
-          </p:cNvSpPr>
-          <p:nvPr>
-            <p:ph type="sldNum" idx="5" sz="quarter"/>
+            <p:ph type="sldNum" sz="quarter" idx="5"/>
           </p:nvPr>
         </p:nvSpPr>
         <p:spPr/>
@@ -967,7 +760,7 @@
 </file>
 
 <file path=ppt/notesSlides/notesSlide16.xml><?xml version="1.0" encoding="utf-8"?>
-<p:notes xmlns:a="http://schemas.openxmlformats.org/drawingml/2006/main" xmlns:p="http://schemas.openxmlformats.org/presentationml/2006/main" xmlns:r="http://schemas.openxmlformats.org/officeDocument/2006/relationships">
+<p:notes xmlns:a="http://schemas.openxmlformats.org/drawingml/2006/main" xmlns:r="http://schemas.openxmlformats.org/officeDocument/2006/relationships" xmlns:p="http://schemas.openxmlformats.org/presentationml/2006/main">
   <p:cSld>
     <p:spTree>
       <p:nvGrpSpPr>
@@ -987,43 +780,43 @@
         <p:nvSpPr>
           <p:cNvPr id="2" name="Slide Image Placeholder 1"/>
           <p:cNvSpPr>
+            <a:spLocks noGrp="1" noRot="1" noChangeAspect="1"/>
+          </p:cNvSpPr>
+          <p:nvPr>
+            <p:ph type="sldImg" idx="2"/>
+          </p:nvPr>
+        </p:nvSpPr>
+        <p:spPr/>
+      </p:sp>
+      <p:sp>
+        <p:nvSpPr>
+          <p:cNvPr id="3" name="Notes Placeholder 2"/>
+          <p:cNvSpPr>
             <a:spLocks noGrp="1"/>
           </p:cNvSpPr>
           <p:nvPr>
-            <p:ph type="sldImg" idx="2"/>
+            <p:ph type="body" sz="quarter" idx="3"/>
           </p:nvPr>
         </p:nvSpPr>
         <p:spPr/>
-      </p:sp>
-      <p:sp>
-        <p:nvSpPr>
-          <p:cNvPr id="3" name="Notes Placeholder 2"/>
+        <p:txBody>
+          <a:bodyPr/>
+          <a:lstStyle/>
+          <a:p>
+            <a:r>
+              <a:t>This is the operational pitch: early warning + management comparison.</a:t>
+            </a:r>
+          </a:p>
+        </p:txBody>
+      </p:sp>
+      <p:sp>
+        <p:nvSpPr>
+          <p:cNvPr id="4" name="Slide Number Placeholder 3"/>
           <p:cNvSpPr>
             <a:spLocks noGrp="1"/>
           </p:cNvSpPr>
           <p:nvPr>
-            <p:ph type="body" idx="3" sz="quarter"/>
-          </p:nvPr>
-        </p:nvSpPr>
-        <p:spPr/>
-        <p:txBody>
-          <a:bodyPr/>
-          <a:lstStyle/>
-          <a:p>
-            <a:r>
-              <a:t>This is the operational pitch: early warning + management comparison.</a:t>
-            </a:r>
-          </a:p>
-        </p:txBody>
-      </p:sp>
-      <p:sp>
-        <p:nvSpPr>
-          <p:cNvPr id="4" name="Slide Number Placeholder 3"/>
-          <p:cNvSpPr>
-            <a:spLocks noGrp="1"/>
-          </p:cNvSpPr>
-          <p:nvPr>
-            <p:ph type="sldNum" idx="5" sz="quarter"/>
+            <p:ph type="sldNum" sz="quarter" idx="5"/>
           </p:nvPr>
         </p:nvSpPr>
         <p:spPr/>
@@ -1037,7 +830,7 @@
 </file>
 
 <file path=ppt/notesSlides/notesSlide17.xml><?xml version="1.0" encoding="utf-8"?>
-<p:notes xmlns:a="http://schemas.openxmlformats.org/drawingml/2006/main" xmlns:p="http://schemas.openxmlformats.org/presentationml/2006/main" xmlns:r="http://schemas.openxmlformats.org/officeDocument/2006/relationships">
+<p:notes xmlns:a="http://schemas.openxmlformats.org/drawingml/2006/main" xmlns:r="http://schemas.openxmlformats.org/officeDocument/2006/relationships" xmlns:p="http://schemas.openxmlformats.org/presentationml/2006/main">
   <p:cSld>
     <p:spTree>
       <p:nvGrpSpPr>
@@ -1057,43 +850,43 @@
         <p:nvSpPr>
           <p:cNvPr id="2" name="Slide Image Placeholder 1"/>
           <p:cNvSpPr>
+            <a:spLocks noGrp="1" noRot="1" noChangeAspect="1"/>
+          </p:cNvSpPr>
+          <p:nvPr>
+            <p:ph type="sldImg" idx="2"/>
+          </p:nvPr>
+        </p:nvSpPr>
+        <p:spPr/>
+      </p:sp>
+      <p:sp>
+        <p:nvSpPr>
+          <p:cNvPr id="3" name="Notes Placeholder 2"/>
+          <p:cNvSpPr>
             <a:spLocks noGrp="1"/>
           </p:cNvSpPr>
           <p:nvPr>
-            <p:ph type="sldImg" idx="2"/>
+            <p:ph type="body" sz="quarter" idx="3"/>
           </p:nvPr>
         </p:nvSpPr>
         <p:spPr/>
-      </p:sp>
-      <p:sp>
-        <p:nvSpPr>
-          <p:cNvPr id="3" name="Notes Placeholder 2"/>
+        <p:txBody>
+          <a:bodyPr/>
+          <a:lstStyle/>
+          <a:p>
+            <a:r>
+              <a:t>Land on the two grower uses.</a:t>
+            </a:r>
+          </a:p>
+        </p:txBody>
+      </p:sp>
+      <p:sp>
+        <p:nvSpPr>
+          <p:cNvPr id="4" name="Slide Number Placeholder 3"/>
           <p:cNvSpPr>
             <a:spLocks noGrp="1"/>
           </p:cNvSpPr>
           <p:nvPr>
-            <p:ph type="body" idx="3" sz="quarter"/>
-          </p:nvPr>
-        </p:nvSpPr>
-        <p:spPr/>
-        <p:txBody>
-          <a:bodyPr/>
-          <a:lstStyle/>
-          <a:p>
-            <a:r>
-              <a:t>Short — leave time for questions.</a:t>
-            </a:r>
-          </a:p>
-        </p:txBody>
-      </p:sp>
-      <p:sp>
-        <p:nvSpPr>
-          <p:cNvPr id="4" name="Slide Number Placeholder 3"/>
-          <p:cNvSpPr>
-            <a:spLocks noGrp="1"/>
-          </p:cNvSpPr>
-          <p:nvPr>
-            <p:ph type="sldNum" idx="5" sz="quarter"/>
+            <p:ph type="sldNum" sz="quarter" idx="5"/>
           </p:nvPr>
         </p:nvSpPr>
         <p:spPr/>
@@ -1106,8 +899,8 @@
 </p:notes>
 </file>
 
-<file path=ppt/notesSlides/notesSlide18.xml><?xml version="1.0" encoding="utf-8"?>
-<p:notes xmlns:a="http://schemas.openxmlformats.org/drawingml/2006/main" xmlns:p="http://schemas.openxmlformats.org/presentationml/2006/main" xmlns:r="http://schemas.openxmlformats.org/officeDocument/2006/relationships">
+<file path=ppt/notesSlides/notesSlide2.xml><?xml version="1.0" encoding="utf-8"?>
+<p:notes xmlns:a="http://schemas.openxmlformats.org/drawingml/2006/main" xmlns:r="http://schemas.openxmlformats.org/officeDocument/2006/relationships" xmlns:p="http://schemas.openxmlformats.org/presentationml/2006/main">
   <p:cSld>
     <p:spTree>
       <p:nvGrpSpPr>
@@ -1127,43 +920,43 @@
         <p:nvSpPr>
           <p:cNvPr id="2" name="Slide Image Placeholder 1"/>
           <p:cNvSpPr>
+            <a:spLocks noGrp="1" noRot="1" noChangeAspect="1"/>
+          </p:cNvSpPr>
+          <p:nvPr>
+            <p:ph type="sldImg" idx="2"/>
+          </p:nvPr>
+        </p:nvSpPr>
+        <p:spPr/>
+      </p:sp>
+      <p:sp>
+        <p:nvSpPr>
+          <p:cNvPr id="3" name="Notes Placeholder 2"/>
+          <p:cNvSpPr>
             <a:spLocks noGrp="1"/>
           </p:cNvSpPr>
           <p:nvPr>
-            <p:ph type="sldImg" idx="2"/>
+            <p:ph type="body" sz="quarter" idx="3"/>
           </p:nvPr>
         </p:nvSpPr>
         <p:spPr/>
-      </p:sp>
-      <p:sp>
-        <p:nvSpPr>
-          <p:cNvPr id="3" name="Notes Placeholder 2"/>
+        <p:txBody>
+          <a:bodyPr/>
+          <a:lstStyle/>
+          <a:p>
+            <a:r>
+              <a:t>Set up the grower problem before introducing the tool.</a:t>
+            </a:r>
+          </a:p>
+        </p:txBody>
+      </p:sp>
+      <p:sp>
+        <p:nvSpPr>
+          <p:cNvPr id="4" name="Slide Number Placeholder 3"/>
           <p:cNvSpPr>
             <a:spLocks noGrp="1"/>
           </p:cNvSpPr>
           <p:nvPr>
-            <p:ph type="body" idx="3" sz="quarter"/>
-          </p:nvPr>
-        </p:nvSpPr>
-        <p:spPr/>
-        <p:txBody>
-          <a:bodyPr/>
-          <a:lstStyle/>
-          <a:p>
-            <a:r>
-              <a:t>Land on the two grower uses.</a:t>
-            </a:r>
-          </a:p>
-        </p:txBody>
-      </p:sp>
-      <p:sp>
-        <p:nvSpPr>
-          <p:cNvPr id="4" name="Slide Number Placeholder 3"/>
-          <p:cNvSpPr>
-            <a:spLocks noGrp="1"/>
-          </p:cNvSpPr>
-          <p:nvPr>
-            <p:ph type="sldNum" idx="5" sz="quarter"/>
+            <p:ph type="sldNum" sz="quarter" idx="5"/>
           </p:nvPr>
         </p:nvSpPr>
         <p:spPr/>
@@ -1176,8 +969,8 @@
 </p:notes>
 </file>
 
-<file path=ppt/notesSlides/notesSlide2.xml><?xml version="1.0" encoding="utf-8"?>
-<p:notes xmlns:a="http://schemas.openxmlformats.org/drawingml/2006/main" xmlns:p="http://schemas.openxmlformats.org/presentationml/2006/main" xmlns:r="http://schemas.openxmlformats.org/officeDocument/2006/relationships">
+<file path=ppt/notesSlides/notesSlide3.xml><?xml version="1.0" encoding="utf-8"?>
+<p:notes xmlns:a="http://schemas.openxmlformats.org/drawingml/2006/main" xmlns:r="http://schemas.openxmlformats.org/officeDocument/2006/relationships" xmlns:p="http://schemas.openxmlformats.org/presentationml/2006/main">
   <p:cSld>
     <p:spTree>
       <p:nvGrpSpPr>
@@ -1197,43 +990,43 @@
         <p:nvSpPr>
           <p:cNvPr id="2" name="Slide Image Placeholder 1"/>
           <p:cNvSpPr>
+            <a:spLocks noGrp="1" noRot="1" noChangeAspect="1"/>
+          </p:cNvSpPr>
+          <p:nvPr>
+            <p:ph type="sldImg" idx="2"/>
+          </p:nvPr>
+        </p:nvSpPr>
+        <p:spPr/>
+      </p:sp>
+      <p:sp>
+        <p:nvSpPr>
+          <p:cNvPr id="3" name="Notes Placeholder 2"/>
+          <p:cNvSpPr>
             <a:spLocks noGrp="1"/>
           </p:cNvSpPr>
           <p:nvPr>
-            <p:ph type="sldImg" idx="2"/>
+            <p:ph type="body" sz="quarter" idx="3"/>
           </p:nvPr>
         </p:nvSpPr>
         <p:spPr/>
-      </p:sp>
-      <p:sp>
-        <p:nvSpPr>
-          <p:cNvPr id="3" name="Notes Placeholder 2"/>
+        <p:txBody>
+          <a:bodyPr/>
+          <a:lstStyle/>
+          <a:p>
+            <a:r>
+              <a:t>Left plate: early in the incubation. Right plate: 4-6 hours later. You can literally see metabolism.</a:t>
+            </a:r>
+          </a:p>
+        </p:txBody>
+      </p:sp>
+      <p:sp>
+        <p:nvSpPr>
+          <p:cNvPr id="4" name="Slide Number Placeholder 3"/>
           <p:cNvSpPr>
             <a:spLocks noGrp="1"/>
           </p:cNvSpPr>
           <p:nvPr>
-            <p:ph type="body" idx="3" sz="quarter"/>
-          </p:nvPr>
-        </p:nvSpPr>
-        <p:spPr/>
-        <p:txBody>
-          <a:bodyPr/>
-          <a:lstStyle/>
-          <a:p>
-            <a:r>
-              <a:t>Set up the grower problem before introducing the tool.</a:t>
-            </a:r>
-          </a:p>
-        </p:txBody>
-      </p:sp>
-      <p:sp>
-        <p:nvSpPr>
-          <p:cNvPr id="4" name="Slide Number Placeholder 3"/>
-          <p:cNvSpPr>
-            <a:spLocks noGrp="1"/>
-          </p:cNvSpPr>
-          <p:nvPr>
-            <p:ph type="sldNum" idx="5" sz="quarter"/>
+            <p:ph type="sldNum" sz="quarter" idx="5"/>
           </p:nvPr>
         </p:nvSpPr>
         <p:spPr/>
@@ -1246,8 +1039,8 @@
 </p:notes>
 </file>
 
-<file path=ppt/notesSlides/notesSlide3.xml><?xml version="1.0" encoding="utf-8"?>
-<p:notes xmlns:a="http://schemas.openxmlformats.org/drawingml/2006/main" xmlns:p="http://schemas.openxmlformats.org/presentationml/2006/main" xmlns:r="http://schemas.openxmlformats.org/officeDocument/2006/relationships">
+<file path=ppt/notesSlides/notesSlide4.xml><?xml version="1.0" encoding="utf-8"?>
+<p:notes xmlns:a="http://schemas.openxmlformats.org/drawingml/2006/main" xmlns:r="http://schemas.openxmlformats.org/officeDocument/2006/relationships" xmlns:p="http://schemas.openxmlformats.org/presentationml/2006/main">
   <p:cSld>
     <p:spTree>
       <p:nvGrpSpPr>
@@ -1267,43 +1060,43 @@
         <p:nvSpPr>
           <p:cNvPr id="2" name="Slide Image Placeholder 1"/>
           <p:cNvSpPr>
+            <a:spLocks noGrp="1" noRot="1" noChangeAspect="1"/>
+          </p:cNvSpPr>
+          <p:nvPr>
+            <p:ph type="sldImg" idx="2"/>
+          </p:nvPr>
+        </p:nvSpPr>
+        <p:spPr/>
+      </p:sp>
+      <p:sp>
+        <p:nvSpPr>
+          <p:cNvPr id="3" name="Notes Placeholder 2"/>
+          <p:cNvSpPr>
             <a:spLocks noGrp="1"/>
           </p:cNvSpPr>
           <p:nvPr>
-            <p:ph type="sldImg" idx="2"/>
+            <p:ph type="body" sz="quarter" idx="3"/>
           </p:nvPr>
         </p:nvSpPr>
         <p:spPr/>
-      </p:sp>
-      <p:sp>
-        <p:nvSpPr>
-          <p:cNvPr id="3" name="Notes Placeholder 2"/>
+        <p:txBody>
+          <a:bodyPr/>
+          <a:lstStyle/>
+          <a:p>
+            <a:r>
+              <a:t>Emphasize throughput: this is the reason it is useful operationally.</a:t>
+            </a:r>
+          </a:p>
+        </p:txBody>
+      </p:sp>
+      <p:sp>
+        <p:nvSpPr>
+          <p:cNvPr id="4" name="Slide Number Placeholder 3"/>
           <p:cNvSpPr>
             <a:spLocks noGrp="1"/>
           </p:cNvSpPr>
           <p:nvPr>
-            <p:ph type="body" idx="3" sz="quarter"/>
-          </p:nvPr>
-        </p:nvSpPr>
-        <p:spPr/>
-        <p:txBody>
-          <a:bodyPr/>
-          <a:lstStyle/>
-          <a:p>
-            <a:r>
-              <a:t>Left plate: early in the incubation. Right plate: 4-6 hours later. You can literally see metabolism.</a:t>
-            </a:r>
-          </a:p>
-        </p:txBody>
-      </p:sp>
-      <p:sp>
-        <p:nvSpPr>
-          <p:cNvPr id="4" name="Slide Number Placeholder 3"/>
-          <p:cNvSpPr>
-            <a:spLocks noGrp="1"/>
-          </p:cNvSpPr>
-          <p:nvPr>
-            <p:ph type="sldNum" idx="5" sz="quarter"/>
+            <p:ph type="sldNum" sz="quarter" idx="5"/>
           </p:nvPr>
         </p:nvSpPr>
         <p:spPr/>
@@ -1316,8 +1109,8 @@
 </p:notes>
 </file>
 
-<file path=ppt/notesSlides/notesSlide4.xml><?xml version="1.0" encoding="utf-8"?>
-<p:notes xmlns:a="http://schemas.openxmlformats.org/drawingml/2006/main" xmlns:p="http://schemas.openxmlformats.org/presentationml/2006/main" xmlns:r="http://schemas.openxmlformats.org/officeDocument/2006/relationships">
+<file path=ppt/notesSlides/notesSlide5.xml><?xml version="1.0" encoding="utf-8"?>
+<p:notes xmlns:a="http://schemas.openxmlformats.org/drawingml/2006/main" xmlns:r="http://schemas.openxmlformats.org/officeDocument/2006/relationships" xmlns:p="http://schemas.openxmlformats.org/presentationml/2006/main">
   <p:cSld>
     <p:spTree>
       <p:nvGrpSpPr>
@@ -1337,43 +1130,43 @@
         <p:nvSpPr>
           <p:cNvPr id="2" name="Slide Image Placeholder 1"/>
           <p:cNvSpPr>
+            <a:spLocks noGrp="1" noRot="1" noChangeAspect="1"/>
+          </p:cNvSpPr>
+          <p:nvPr>
+            <p:ph type="sldImg" idx="2"/>
+          </p:nvPr>
+        </p:nvSpPr>
+        <p:spPr/>
+      </p:sp>
+      <p:sp>
+        <p:nvSpPr>
+          <p:cNvPr id="3" name="Notes Placeholder 2"/>
+          <p:cNvSpPr>
             <a:spLocks noGrp="1"/>
           </p:cNvSpPr>
           <p:nvPr>
-            <p:ph type="sldImg" idx="2"/>
+            <p:ph type="body" sz="quarter" idx="3"/>
           </p:nvPr>
         </p:nvSpPr>
         <p:spPr/>
-      </p:sp>
-      <p:sp>
-        <p:nvSpPr>
-          <p:cNvPr id="3" name="Notes Placeholder 2"/>
+        <p:txBody>
+          <a:bodyPr/>
+          <a:lstStyle/>
+          <a:p>
+            <a:r>
+              <a:t>Highlight that the method paper is out — this is not preliminary.</a:t>
+            </a:r>
+          </a:p>
+        </p:txBody>
+      </p:sp>
+      <p:sp>
+        <p:nvSpPr>
+          <p:cNvPr id="4" name="Slide Number Placeholder 3"/>
           <p:cNvSpPr>
             <a:spLocks noGrp="1"/>
           </p:cNvSpPr>
           <p:nvPr>
-            <p:ph type="body" idx="3" sz="quarter"/>
-          </p:nvPr>
-        </p:nvSpPr>
-        <p:spPr/>
-        <p:txBody>
-          <a:bodyPr/>
-          <a:lstStyle/>
-          <a:p>
-            <a:r>
-              <a:t>Emphasize throughput: this is the reason it is useful operationally.</a:t>
-            </a:r>
-          </a:p>
-        </p:txBody>
-      </p:sp>
-      <p:sp>
-        <p:nvSpPr>
-          <p:cNvPr id="4" name="Slide Number Placeholder 3"/>
-          <p:cNvSpPr>
-            <a:spLocks noGrp="1"/>
-          </p:cNvSpPr>
-          <p:nvPr>
-            <p:ph type="sldNum" idx="5" sz="quarter"/>
+            <p:ph type="sldNum" sz="quarter" idx="5"/>
           </p:nvPr>
         </p:nvSpPr>
         <p:spPr/>
@@ -1386,8 +1179,8 @@
 </p:notes>
 </file>
 
-<file path=ppt/notesSlides/notesSlide5.xml><?xml version="1.0" encoding="utf-8"?>
-<p:notes xmlns:a="http://schemas.openxmlformats.org/drawingml/2006/main" xmlns:p="http://schemas.openxmlformats.org/presentationml/2006/main" xmlns:r="http://schemas.openxmlformats.org/officeDocument/2006/relationships">
+<file path=ppt/notesSlides/notesSlide6.xml><?xml version="1.0" encoding="utf-8"?>
+<p:notes xmlns:a="http://schemas.openxmlformats.org/drawingml/2006/main" xmlns:r="http://schemas.openxmlformats.org/officeDocument/2006/relationships" xmlns:p="http://schemas.openxmlformats.org/presentationml/2006/main">
   <p:cSld>
     <p:spTree>
       <p:nvGrpSpPr>
@@ -1407,43 +1200,43 @@
         <p:nvSpPr>
           <p:cNvPr id="2" name="Slide Image Placeholder 1"/>
           <p:cNvSpPr>
+            <a:spLocks noGrp="1" noRot="1" noChangeAspect="1"/>
+          </p:cNvSpPr>
+          <p:nvPr>
+            <p:ph type="sldImg" idx="2"/>
+          </p:nvPr>
+        </p:nvSpPr>
+        <p:spPr/>
+      </p:sp>
+      <p:sp>
+        <p:nvSpPr>
+          <p:cNvPr id="3" name="Notes Placeholder 2"/>
+          <p:cNvSpPr>
             <a:spLocks noGrp="1"/>
           </p:cNvSpPr>
           <p:nvPr>
-            <p:ph type="sldImg" idx="2"/>
+            <p:ph type="body" sz="quarter" idx="3"/>
           </p:nvPr>
         </p:nvSpPr>
         <p:spPr/>
-      </p:sp>
-      <p:sp>
-        <p:nvSpPr>
-          <p:cNvPr id="3" name="Notes Placeholder 2"/>
+        <p:txBody>
+          <a:bodyPr/>
+          <a:lstStyle/>
+          <a:p>
+            <a:r>
+              <a:t>Objectives 3, 4, 5 of the paper, compressed.</a:t>
+            </a:r>
+          </a:p>
+        </p:txBody>
+      </p:sp>
+      <p:sp>
+        <p:nvSpPr>
+          <p:cNvPr id="4" name="Slide Number Placeholder 3"/>
           <p:cNvSpPr>
             <a:spLocks noGrp="1"/>
           </p:cNvSpPr>
           <p:nvPr>
-            <p:ph type="body" idx="3" sz="quarter"/>
-          </p:nvPr>
-        </p:nvSpPr>
-        <p:spPr/>
-        <p:txBody>
-          <a:bodyPr/>
-          <a:lstStyle/>
-          <a:p>
-            <a:r>
-              <a:t>Highlight that the method paper is out — this is not preliminary.</a:t>
-            </a:r>
-          </a:p>
-        </p:txBody>
-      </p:sp>
-      <p:sp>
-        <p:nvSpPr>
-          <p:cNvPr id="4" name="Slide Number Placeholder 3"/>
-          <p:cNvSpPr>
-            <a:spLocks noGrp="1"/>
-          </p:cNvSpPr>
-          <p:nvPr>
-            <p:ph type="sldNum" idx="5" sz="quarter"/>
+            <p:ph type="sldNum" sz="quarter" idx="5"/>
           </p:nvPr>
         </p:nvSpPr>
         <p:spPr/>
@@ -1456,8 +1249,8 @@
 </p:notes>
 </file>
 
-<file path=ppt/notesSlides/notesSlide6.xml><?xml version="1.0" encoding="utf-8"?>
-<p:notes xmlns:a="http://schemas.openxmlformats.org/drawingml/2006/main" xmlns:p="http://schemas.openxmlformats.org/presentationml/2006/main" xmlns:r="http://schemas.openxmlformats.org/officeDocument/2006/relationships">
+<file path=ppt/notesSlides/notesSlide7.xml><?xml version="1.0" encoding="utf-8"?>
+<p:notes xmlns:a="http://schemas.openxmlformats.org/drawingml/2006/main" xmlns:r="http://schemas.openxmlformats.org/officeDocument/2006/relationships" xmlns:p="http://schemas.openxmlformats.org/presentationml/2006/main">
   <p:cSld>
     <p:spTree>
       <p:nvGrpSpPr>
@@ -1477,43 +1270,43 @@
         <p:nvSpPr>
           <p:cNvPr id="2" name="Slide Image Placeholder 1"/>
           <p:cNvSpPr>
+            <a:spLocks noGrp="1" noRot="1" noChangeAspect="1"/>
+          </p:cNvSpPr>
+          <p:nvPr>
+            <p:ph type="sldImg" idx="2"/>
+          </p:nvPr>
+        </p:nvSpPr>
+        <p:spPr/>
+      </p:sp>
+      <p:sp>
+        <p:nvSpPr>
+          <p:cNvPr id="3" name="Notes Placeholder 2"/>
+          <p:cNvSpPr>
             <a:spLocks noGrp="1"/>
           </p:cNvSpPr>
           <p:nvPr>
-            <p:ph type="sldImg" idx="2"/>
+            <p:ph type="body" sz="quarter" idx="3"/>
           </p:nvPr>
         </p:nvSpPr>
         <p:spPr/>
-      </p:sp>
-      <p:sp>
-        <p:nvSpPr>
-          <p:cNvPr id="3" name="Notes Placeholder 2"/>
+        <p:txBody>
+          <a:bodyPr/>
+          <a:lstStyle/>
+          <a:p>
+            <a:r>
+              <a:t>20 oysters per family per trial; time of death logged repeatedly.</a:t>
+            </a:r>
+          </a:p>
+        </p:txBody>
+      </p:sp>
+      <p:sp>
+        <p:nvSpPr>
+          <p:cNvPr id="4" name="Slide Number Placeholder 3"/>
           <p:cNvSpPr>
             <a:spLocks noGrp="1"/>
           </p:cNvSpPr>
           <p:nvPr>
-            <p:ph type="body" idx="3" sz="quarter"/>
-          </p:nvPr>
-        </p:nvSpPr>
-        <p:spPr/>
-        <p:txBody>
-          <a:bodyPr/>
-          <a:lstStyle/>
-          <a:p>
-            <a:r>
-              <a:t>Objectives 3, 4, 5 of the paper, compressed.</a:t>
-            </a:r>
-          </a:p>
-        </p:txBody>
-      </p:sp>
-      <p:sp>
-        <p:nvSpPr>
-          <p:cNvPr id="4" name="Slide Number Placeholder 3"/>
-          <p:cNvSpPr>
-            <a:spLocks noGrp="1"/>
-          </p:cNvSpPr>
-          <p:nvPr>
-            <p:ph type="sldNum" idx="5" sz="quarter"/>
+            <p:ph type="sldNum" sz="quarter" idx="5"/>
           </p:nvPr>
         </p:nvSpPr>
         <p:spPr/>
@@ -1526,8 +1319,8 @@
 </p:notes>
 </file>
 
-<file path=ppt/notesSlides/notesSlide7.xml><?xml version="1.0" encoding="utf-8"?>
-<p:notes xmlns:a="http://schemas.openxmlformats.org/drawingml/2006/main" xmlns:p="http://schemas.openxmlformats.org/presentationml/2006/main" xmlns:r="http://schemas.openxmlformats.org/officeDocument/2006/relationships">
+<file path=ppt/notesSlides/notesSlide8.xml><?xml version="1.0" encoding="utf-8"?>
+<p:notes xmlns:a="http://schemas.openxmlformats.org/drawingml/2006/main" xmlns:r="http://schemas.openxmlformats.org/officeDocument/2006/relationships" xmlns:p="http://schemas.openxmlformats.org/presentationml/2006/main">
   <p:cSld>
     <p:spTree>
       <p:nvGrpSpPr>
@@ -1547,43 +1340,43 @@
         <p:nvSpPr>
           <p:cNvPr id="2" name="Slide Image Placeholder 1"/>
           <p:cNvSpPr>
+            <a:spLocks noGrp="1" noRot="1" noChangeAspect="1"/>
+          </p:cNvSpPr>
+          <p:nvPr>
+            <p:ph type="sldImg" idx="2"/>
+          </p:nvPr>
+        </p:nvSpPr>
+        <p:spPr/>
+      </p:sp>
+      <p:sp>
+        <p:nvSpPr>
+          <p:cNvPr id="3" name="Notes Placeholder 2"/>
+          <p:cNvSpPr>
             <a:spLocks noGrp="1"/>
           </p:cNvSpPr>
           <p:nvPr>
-            <p:ph type="sldImg" idx="2"/>
+            <p:ph type="body" sz="quarter" idx="3"/>
           </p:nvPr>
         </p:nvSpPr>
         <p:spPr/>
-      </p:sp>
-      <p:sp>
-        <p:nvSpPr>
-          <p:cNvPr id="3" name="Notes Placeholder 2"/>
+        <p:txBody>
+          <a:bodyPr/>
+          <a:lstStyle/>
+          <a:p>
+            <a:r>
+              <a:t>Keep this brief — it's plumbing, not the point.</a:t>
+            </a:r>
+          </a:p>
+        </p:txBody>
+      </p:sp>
+      <p:sp>
+        <p:nvSpPr>
+          <p:cNvPr id="4" name="Slide Number Placeholder 3"/>
           <p:cNvSpPr>
             <a:spLocks noGrp="1"/>
           </p:cNvSpPr>
           <p:nvPr>
-            <p:ph type="body" idx="3" sz="quarter"/>
-          </p:nvPr>
-        </p:nvSpPr>
-        <p:spPr/>
-        <p:txBody>
-          <a:bodyPr/>
-          <a:lstStyle/>
-          <a:p>
-            <a:r>
-              <a:t>20 oysters per family per trial; time of death logged repeatedly.</a:t>
-            </a:r>
-          </a:p>
-        </p:txBody>
-      </p:sp>
-      <p:sp>
-        <p:nvSpPr>
-          <p:cNvPr id="4" name="Slide Number Placeholder 3"/>
-          <p:cNvSpPr>
-            <a:spLocks noGrp="1"/>
-          </p:cNvSpPr>
-          <p:nvPr>
-            <p:ph type="sldNum" idx="5" sz="quarter"/>
+            <p:ph type="sldNum" sz="quarter" idx="5"/>
           </p:nvPr>
         </p:nvSpPr>
         <p:spPr/>
@@ -1596,8 +1389,8 @@
 </p:notes>
 </file>
 
-<file path=ppt/notesSlides/notesSlide8.xml><?xml version="1.0" encoding="utf-8"?>
-<p:notes xmlns:a="http://schemas.openxmlformats.org/drawingml/2006/main" xmlns:p="http://schemas.openxmlformats.org/presentationml/2006/main" xmlns:r="http://schemas.openxmlformats.org/officeDocument/2006/relationships">
+<file path=ppt/notesSlides/notesSlide9.xml><?xml version="1.0" encoding="utf-8"?>
+<p:notes xmlns:a="http://schemas.openxmlformats.org/drawingml/2006/main" xmlns:r="http://schemas.openxmlformats.org/officeDocument/2006/relationships" xmlns:p="http://schemas.openxmlformats.org/presentationml/2006/main">
   <p:cSld>
     <p:spTree>
       <p:nvGrpSpPr>
@@ -1617,113 +1410,43 @@
         <p:nvSpPr>
           <p:cNvPr id="2" name="Slide Image Placeholder 1"/>
           <p:cNvSpPr>
+            <a:spLocks noGrp="1" noRot="1" noChangeAspect="1"/>
+          </p:cNvSpPr>
+          <p:nvPr>
+            <p:ph type="sldImg" idx="2"/>
+          </p:nvPr>
+        </p:nvSpPr>
+        <p:spPr/>
+      </p:sp>
+      <p:sp>
+        <p:nvSpPr>
+          <p:cNvPr id="3" name="Notes Placeholder 2"/>
+          <p:cNvSpPr>
             <a:spLocks noGrp="1"/>
           </p:cNvSpPr>
           <p:nvPr>
-            <p:ph type="sldImg" idx="2"/>
+            <p:ph type="body" sz="quarter" idx="3"/>
           </p:nvPr>
         </p:nvSpPr>
         <p:spPr/>
-      </p:sp>
-      <p:sp>
-        <p:nvSpPr>
-          <p:cNvPr id="3" name="Notes Placeholder 2"/>
+        <p:txBody>
+          <a:bodyPr/>
+          <a:lstStyle/>
+          <a:p>
+            <a:r>
+              <a:t>This is the truth we want to predict.</a:t>
+            </a:r>
+          </a:p>
+        </p:txBody>
+      </p:sp>
+      <p:sp>
+        <p:nvSpPr>
+          <p:cNvPr id="4" name="Slide Number Placeholder 3"/>
           <p:cNvSpPr>
             <a:spLocks noGrp="1"/>
           </p:cNvSpPr>
           <p:nvPr>
-            <p:ph type="body" idx="3" sz="quarter"/>
-          </p:nvPr>
-        </p:nvSpPr>
-        <p:spPr/>
-        <p:txBody>
-          <a:bodyPr/>
-          <a:lstStyle/>
-          <a:p>
-            <a:r>
-              <a:t>Keep this brief — it's plumbing, not the point.</a:t>
-            </a:r>
-          </a:p>
-        </p:txBody>
-      </p:sp>
-      <p:sp>
-        <p:nvSpPr>
-          <p:cNvPr id="4" name="Slide Number Placeholder 3"/>
-          <p:cNvSpPr>
-            <a:spLocks noGrp="1"/>
-          </p:cNvSpPr>
-          <p:nvPr>
-            <p:ph type="sldNum" idx="5" sz="quarter"/>
-          </p:nvPr>
-        </p:nvSpPr>
-        <p:spPr/>
-      </p:sp>
-    </p:spTree>
-  </p:cSld>
-  <p:clrMapOvr>
-    <a:masterClrMapping/>
-  </p:clrMapOvr>
-</p:notes>
-</file>
-
-<file path=ppt/notesSlides/notesSlide9.xml><?xml version="1.0" encoding="utf-8"?>
-<p:notes xmlns:a="http://schemas.openxmlformats.org/drawingml/2006/main" xmlns:p="http://schemas.openxmlformats.org/presentationml/2006/main" xmlns:r="http://schemas.openxmlformats.org/officeDocument/2006/relationships">
-  <p:cSld>
-    <p:spTree>
-      <p:nvGrpSpPr>
-        <p:cNvPr id="1" name=""/>
-        <p:cNvGrpSpPr/>
-        <p:nvPr/>
-      </p:nvGrpSpPr>
-      <p:grpSpPr>
-        <a:xfrm>
-          <a:off x="0" y="0"/>
-          <a:ext cx="0" cy="0"/>
-          <a:chOff x="0" y="0"/>
-          <a:chExt cx="0" cy="0"/>
-        </a:xfrm>
-      </p:grpSpPr>
-      <p:sp>
-        <p:nvSpPr>
-          <p:cNvPr id="2" name="Slide Image Placeholder 1"/>
-          <p:cNvSpPr>
-            <a:spLocks noGrp="1"/>
-          </p:cNvSpPr>
-          <p:nvPr>
-            <p:ph type="sldImg" idx="2"/>
-          </p:nvPr>
-        </p:nvSpPr>
-        <p:spPr/>
-      </p:sp>
-      <p:sp>
-        <p:nvSpPr>
-          <p:cNvPr id="3" name="Notes Placeholder 2"/>
-          <p:cNvSpPr>
-            <a:spLocks noGrp="1"/>
-          </p:cNvSpPr>
-          <p:nvPr>
-            <p:ph type="body" idx="3" sz="quarter"/>
-          </p:nvPr>
-        </p:nvSpPr>
-        <p:spPr/>
-        <p:txBody>
-          <a:bodyPr/>
-          <a:lstStyle/>
-          <a:p>
-            <a:r>
-              <a:t>This is the truth we want to predict.</a:t>
-            </a:r>
-          </a:p>
-        </p:txBody>
-      </p:sp>
-      <p:sp>
-        <p:nvSpPr>
-          <p:cNvPr id="4" name="Slide Number Placeholder 3"/>
-          <p:cNvSpPr>
-            <a:spLocks noGrp="1"/>
-          </p:cNvSpPr>
-          <p:nvPr>
-            <p:ph type="sldNum" idx="5" sz="quarter"/>
+            <p:ph type="sldNum" sz="quarter" idx="5"/>
           </p:nvPr>
         </p:nvSpPr>
         <p:spPr/>
@@ -1774,10 +1497,9 @@
           <a:lstStyle/>
           <a:p>
             <a:r>
-              <a:rPr lang="en-US" smtClean="0"/>
+              <a:rPr lang="en-US"/>
               <a:t>Click to edit Master title style</a:t>
             </a:r>
-            <a:endParaRPr lang="en-US"/>
           </a:p>
         </p:txBody>
       </p:sp>
@@ -1893,10 +1615,9 @@
           </a:lstStyle>
           <a:p>
             <a:r>
-              <a:rPr lang="en-US" smtClean="0"/>
+              <a:rPr lang="en-US"/>
               <a:t>Click to edit Master subtitle style</a:t>
             </a:r>
-            <a:endParaRPr lang="en-US"/>
           </a:p>
         </p:txBody>
       </p:sp>
@@ -1917,7 +1638,7 @@
           <a:p>
             <a:fld id="{5BCAD085-E8A6-8845-BD4E-CB4CCA059FC4}" type="datetimeFigureOut">
               <a:rPr lang="en-US" smtClean="0"/>
-              <a:t>1/27/13</a:t>
+              <a:t>9/14/26</a:t>
             </a:fld>
             <a:endParaRPr lang="en-US"/>
           </a:p>
@@ -2011,10 +1732,9 @@
           <a:lstStyle/>
           <a:p>
             <a:r>
-              <a:rPr lang="en-US" smtClean="0"/>
+              <a:rPr lang="en-US"/>
               <a:t>Click to edit Master title style</a:t>
             </a:r>
-            <a:endParaRPr lang="en-US"/>
           </a:p>
         </p:txBody>
       </p:sp>
@@ -2035,38 +1755,37 @@
           <a:p>
             <a:pPr lvl="0"/>
             <a:r>
-              <a:rPr lang="en-US" smtClean="0"/>
+              <a:rPr lang="en-US"/>
               <a:t>Click to edit Master text styles</a:t>
             </a:r>
           </a:p>
           <a:p>
             <a:pPr lvl="1"/>
             <a:r>
-              <a:rPr lang="en-US" smtClean="0"/>
+              <a:rPr lang="en-US"/>
               <a:t>Second level</a:t>
             </a:r>
           </a:p>
           <a:p>
             <a:pPr lvl="2"/>
             <a:r>
-              <a:rPr lang="en-US" smtClean="0"/>
+              <a:rPr lang="en-US"/>
               <a:t>Third level</a:t>
             </a:r>
           </a:p>
           <a:p>
             <a:pPr lvl="3"/>
             <a:r>
-              <a:rPr lang="en-US" smtClean="0"/>
+              <a:rPr lang="en-US"/>
               <a:t>Fourth level</a:t>
             </a:r>
           </a:p>
           <a:p>
             <a:pPr lvl="4"/>
             <a:r>
-              <a:rPr lang="en-US" smtClean="0"/>
+              <a:rPr lang="en-US"/>
               <a:t>Fifth level</a:t>
             </a:r>
-            <a:endParaRPr lang="en-US"/>
           </a:p>
         </p:txBody>
       </p:sp>
@@ -2087,7 +1806,7 @@
           <a:p>
             <a:fld id="{5BCAD085-E8A6-8845-BD4E-CB4CCA059FC4}" type="datetimeFigureOut">
               <a:rPr lang="en-US" smtClean="0"/>
-              <a:t>1/27/13</a:t>
+              <a:t>9/14/26</a:t>
             </a:fld>
             <a:endParaRPr lang="en-US"/>
           </a:p>
@@ -2186,10 +1905,9 @@
           <a:lstStyle/>
           <a:p>
             <a:r>
-              <a:rPr lang="en-US" smtClean="0"/>
+              <a:rPr lang="en-US"/>
               <a:t>Click to edit Master title style</a:t>
             </a:r>
-            <a:endParaRPr lang="en-US"/>
           </a:p>
         </p:txBody>
       </p:sp>
@@ -2215,38 +1933,37 @@
           <a:p>
             <a:pPr lvl="0"/>
             <a:r>
-              <a:rPr lang="en-US" smtClean="0"/>
+              <a:rPr lang="en-US"/>
               <a:t>Click to edit Master text styles</a:t>
             </a:r>
           </a:p>
           <a:p>
             <a:pPr lvl="1"/>
             <a:r>
-              <a:rPr lang="en-US" smtClean="0"/>
+              <a:rPr lang="en-US"/>
               <a:t>Second level</a:t>
             </a:r>
           </a:p>
           <a:p>
             <a:pPr lvl="2"/>
             <a:r>
-              <a:rPr lang="en-US" smtClean="0"/>
+              <a:rPr lang="en-US"/>
               <a:t>Third level</a:t>
             </a:r>
           </a:p>
           <a:p>
             <a:pPr lvl="3"/>
             <a:r>
-              <a:rPr lang="en-US" smtClean="0"/>
+              <a:rPr lang="en-US"/>
               <a:t>Fourth level</a:t>
             </a:r>
           </a:p>
           <a:p>
             <a:pPr lvl="4"/>
             <a:r>
-              <a:rPr lang="en-US" smtClean="0"/>
+              <a:rPr lang="en-US"/>
               <a:t>Fifth level</a:t>
             </a:r>
-            <a:endParaRPr lang="en-US"/>
           </a:p>
         </p:txBody>
       </p:sp>
@@ -2267,7 +1984,7 @@
           <a:p>
             <a:fld id="{5BCAD085-E8A6-8845-BD4E-CB4CCA059FC4}" type="datetimeFigureOut">
               <a:rPr lang="en-US" smtClean="0"/>
-              <a:t>1/27/13</a:t>
+              <a:t>9/14/26</a:t>
             </a:fld>
             <a:endParaRPr lang="en-US"/>
           </a:p>
@@ -2361,10 +2078,9 @@
           <a:lstStyle/>
           <a:p>
             <a:r>
-              <a:rPr lang="en-US" smtClean="0"/>
+              <a:rPr lang="en-US"/>
               <a:t>Click to edit Master title style</a:t>
             </a:r>
-            <a:endParaRPr lang="en-US"/>
           </a:p>
         </p:txBody>
       </p:sp>
@@ -2385,38 +2101,37 @@
           <a:p>
             <a:pPr lvl="0"/>
             <a:r>
-              <a:rPr lang="en-US" smtClean="0"/>
+              <a:rPr lang="en-US"/>
               <a:t>Click to edit Master text styles</a:t>
             </a:r>
           </a:p>
           <a:p>
             <a:pPr lvl="1"/>
             <a:r>
-              <a:rPr lang="en-US" smtClean="0"/>
+              <a:rPr lang="en-US"/>
               <a:t>Second level</a:t>
             </a:r>
           </a:p>
           <a:p>
             <a:pPr lvl="2"/>
             <a:r>
-              <a:rPr lang="en-US" smtClean="0"/>
+              <a:rPr lang="en-US"/>
               <a:t>Third level</a:t>
             </a:r>
           </a:p>
           <a:p>
             <a:pPr lvl="3"/>
             <a:r>
-              <a:rPr lang="en-US" smtClean="0"/>
+              <a:rPr lang="en-US"/>
               <a:t>Fourth level</a:t>
             </a:r>
           </a:p>
           <a:p>
             <a:pPr lvl="4"/>
             <a:r>
-              <a:rPr lang="en-US" smtClean="0"/>
+              <a:rPr lang="en-US"/>
               <a:t>Fifth level</a:t>
             </a:r>
-            <a:endParaRPr lang="en-US"/>
           </a:p>
         </p:txBody>
       </p:sp>
@@ -2437,7 +2152,7 @@
           <a:p>
             <a:fld id="{5BCAD085-E8A6-8845-BD4E-CB4CCA059FC4}" type="datetimeFigureOut">
               <a:rPr lang="en-US" smtClean="0"/>
-              <a:t>1/27/13</a:t>
+              <a:t>9/14/26</a:t>
             </a:fld>
             <a:endParaRPr lang="en-US"/>
           </a:p>
@@ -2540,10 +2255,9 @@
           </a:lstStyle>
           <a:p>
             <a:r>
-              <a:rPr lang="en-US" smtClean="0"/>
+              <a:rPr lang="en-US"/>
               <a:t>Click to edit Master title style</a:t>
             </a:r>
-            <a:endParaRPr lang="en-US"/>
           </a:p>
         </p:txBody>
       </p:sp>
@@ -2660,7 +2374,7 @@
           <a:p>
             <a:pPr lvl="0"/>
             <a:r>
-              <a:rPr lang="en-US" smtClean="0"/>
+              <a:rPr lang="en-US"/>
               <a:t>Click to edit Master text styles</a:t>
             </a:r>
           </a:p>
@@ -2683,7 +2397,7 @@
           <a:p>
             <a:fld id="{5BCAD085-E8A6-8845-BD4E-CB4CCA059FC4}" type="datetimeFigureOut">
               <a:rPr lang="en-US" smtClean="0"/>
-              <a:t>1/27/13</a:t>
+              <a:t>9/14/26</a:t>
             </a:fld>
             <a:endParaRPr lang="en-US"/>
           </a:p>
@@ -2777,10 +2491,9 @@
           <a:lstStyle/>
           <a:p>
             <a:r>
-              <a:rPr lang="en-US" smtClean="0"/>
+              <a:rPr lang="en-US"/>
               <a:t>Click to edit Master title style</a:t>
             </a:r>
-            <a:endParaRPr lang="en-US"/>
           </a:p>
         </p:txBody>
       </p:sp>
@@ -2834,38 +2547,37 @@
           <a:p>
             <a:pPr lvl="0"/>
             <a:r>
-              <a:rPr lang="en-US" smtClean="0"/>
+              <a:rPr lang="en-US"/>
               <a:t>Click to edit Master text styles</a:t>
             </a:r>
           </a:p>
           <a:p>
             <a:pPr lvl="1"/>
             <a:r>
-              <a:rPr lang="en-US" smtClean="0"/>
+              <a:rPr lang="en-US"/>
               <a:t>Second level</a:t>
             </a:r>
           </a:p>
           <a:p>
             <a:pPr lvl="2"/>
             <a:r>
-              <a:rPr lang="en-US" smtClean="0"/>
+              <a:rPr lang="en-US"/>
               <a:t>Third level</a:t>
             </a:r>
           </a:p>
           <a:p>
             <a:pPr lvl="3"/>
             <a:r>
-              <a:rPr lang="en-US" smtClean="0"/>
+              <a:rPr lang="en-US"/>
               <a:t>Fourth level</a:t>
             </a:r>
           </a:p>
           <a:p>
             <a:pPr lvl="4"/>
             <a:r>
-              <a:rPr lang="en-US" smtClean="0"/>
+              <a:rPr lang="en-US"/>
               <a:t>Fifth level</a:t>
             </a:r>
-            <a:endParaRPr lang="en-US"/>
           </a:p>
         </p:txBody>
       </p:sp>
@@ -2919,38 +2631,37 @@
           <a:p>
             <a:pPr lvl="0"/>
             <a:r>
-              <a:rPr lang="en-US" smtClean="0"/>
+              <a:rPr lang="en-US"/>
               <a:t>Click to edit Master text styles</a:t>
             </a:r>
           </a:p>
           <a:p>
             <a:pPr lvl="1"/>
             <a:r>
-              <a:rPr lang="en-US" smtClean="0"/>
+              <a:rPr lang="en-US"/>
               <a:t>Second level</a:t>
             </a:r>
           </a:p>
           <a:p>
             <a:pPr lvl="2"/>
             <a:r>
-              <a:rPr lang="en-US" smtClean="0"/>
+              <a:rPr lang="en-US"/>
               <a:t>Third level</a:t>
             </a:r>
           </a:p>
           <a:p>
             <a:pPr lvl="3"/>
             <a:r>
-              <a:rPr lang="en-US" smtClean="0"/>
+              <a:rPr lang="en-US"/>
               <a:t>Fourth level</a:t>
             </a:r>
           </a:p>
           <a:p>
             <a:pPr lvl="4"/>
             <a:r>
-              <a:rPr lang="en-US" smtClean="0"/>
+              <a:rPr lang="en-US"/>
               <a:t>Fifth level</a:t>
             </a:r>
-            <a:endParaRPr lang="en-US"/>
           </a:p>
         </p:txBody>
       </p:sp>
@@ -2971,7 +2682,7 @@
           <a:p>
             <a:fld id="{5BCAD085-E8A6-8845-BD4E-CB4CCA059FC4}" type="datetimeFigureOut">
               <a:rPr lang="en-US" smtClean="0"/>
-              <a:t>1/27/13</a:t>
+              <a:t>9/14/26</a:t>
             </a:fld>
             <a:endParaRPr lang="en-US"/>
           </a:p>
@@ -3069,10 +2780,9 @@
           </a:lstStyle>
           <a:p>
             <a:r>
-              <a:rPr lang="en-US" smtClean="0"/>
+              <a:rPr lang="en-US"/>
               <a:t>Click to edit Master title style</a:t>
             </a:r>
-            <a:endParaRPr lang="en-US"/>
           </a:p>
         </p:txBody>
       </p:sp>
@@ -3135,7 +2845,7 @@
           <a:p>
             <a:pPr lvl="0"/>
             <a:r>
-              <a:rPr lang="en-US" smtClean="0"/>
+              <a:rPr lang="en-US"/>
               <a:t>Click to edit Master text styles</a:t>
             </a:r>
           </a:p>
@@ -3191,38 +2901,37 @@
           <a:p>
             <a:pPr lvl="0"/>
             <a:r>
-              <a:rPr lang="en-US" smtClean="0"/>
+              <a:rPr lang="en-US"/>
               <a:t>Click to edit Master text styles</a:t>
             </a:r>
           </a:p>
           <a:p>
             <a:pPr lvl="1"/>
             <a:r>
-              <a:rPr lang="en-US" smtClean="0"/>
+              <a:rPr lang="en-US"/>
               <a:t>Second level</a:t>
             </a:r>
           </a:p>
           <a:p>
             <a:pPr lvl="2"/>
             <a:r>
-              <a:rPr lang="en-US" smtClean="0"/>
+              <a:rPr lang="en-US"/>
               <a:t>Third level</a:t>
             </a:r>
           </a:p>
           <a:p>
             <a:pPr lvl="3"/>
             <a:r>
-              <a:rPr lang="en-US" smtClean="0"/>
+              <a:rPr lang="en-US"/>
               <a:t>Fourth level</a:t>
             </a:r>
           </a:p>
           <a:p>
             <a:pPr lvl="4"/>
             <a:r>
-              <a:rPr lang="en-US" smtClean="0"/>
+              <a:rPr lang="en-US"/>
               <a:t>Fifth level</a:t>
             </a:r>
-            <a:endParaRPr lang="en-US"/>
           </a:p>
         </p:txBody>
       </p:sp>
@@ -3285,7 +2994,7 @@
           <a:p>
             <a:pPr lvl="0"/>
             <a:r>
-              <a:rPr lang="en-US" smtClean="0"/>
+              <a:rPr lang="en-US"/>
               <a:t>Click to edit Master text styles</a:t>
             </a:r>
           </a:p>
@@ -3341,38 +3050,37 @@
           <a:p>
             <a:pPr lvl="0"/>
             <a:r>
-              <a:rPr lang="en-US" smtClean="0"/>
+              <a:rPr lang="en-US"/>
               <a:t>Click to edit Master text styles</a:t>
             </a:r>
           </a:p>
           <a:p>
             <a:pPr lvl="1"/>
             <a:r>
-              <a:rPr lang="en-US" smtClean="0"/>
+              <a:rPr lang="en-US"/>
               <a:t>Second level</a:t>
             </a:r>
           </a:p>
           <a:p>
             <a:pPr lvl="2"/>
             <a:r>
-              <a:rPr lang="en-US" smtClean="0"/>
+              <a:rPr lang="en-US"/>
               <a:t>Third level</a:t>
             </a:r>
           </a:p>
           <a:p>
             <a:pPr lvl="3"/>
             <a:r>
-              <a:rPr lang="en-US" smtClean="0"/>
+              <a:rPr lang="en-US"/>
               <a:t>Fourth level</a:t>
             </a:r>
           </a:p>
           <a:p>
             <a:pPr lvl="4"/>
             <a:r>
-              <a:rPr lang="en-US" smtClean="0"/>
+              <a:rPr lang="en-US"/>
               <a:t>Fifth level</a:t>
             </a:r>
-            <a:endParaRPr lang="en-US"/>
           </a:p>
         </p:txBody>
       </p:sp>
@@ -3393,7 +3101,7 @@
           <a:p>
             <a:fld id="{5BCAD085-E8A6-8845-BD4E-CB4CCA059FC4}" type="datetimeFigureOut">
               <a:rPr lang="en-US" smtClean="0"/>
-              <a:t>1/27/13</a:t>
+              <a:t>9/14/26</a:t>
             </a:fld>
             <a:endParaRPr lang="en-US"/>
           </a:p>
@@ -3487,10 +3195,9 @@
           <a:lstStyle/>
           <a:p>
             <a:r>
-              <a:rPr lang="en-US" smtClean="0"/>
+              <a:rPr lang="en-US"/>
               <a:t>Click to edit Master title style</a:t>
             </a:r>
-            <a:endParaRPr lang="en-US"/>
           </a:p>
         </p:txBody>
       </p:sp>
@@ -3511,7 +3218,7 @@
           <a:p>
             <a:fld id="{5BCAD085-E8A6-8845-BD4E-CB4CCA059FC4}" type="datetimeFigureOut">
               <a:rPr lang="en-US" smtClean="0"/>
-              <a:t>1/27/13</a:t>
+              <a:t>9/14/26</a:t>
             </a:fld>
             <a:endParaRPr lang="en-US"/>
           </a:p>
@@ -3606,7 +3313,7 @@
           <a:p>
             <a:fld id="{5BCAD085-E8A6-8845-BD4E-CB4CCA059FC4}" type="datetimeFigureOut">
               <a:rPr lang="en-US" smtClean="0"/>
-              <a:t>1/27/13</a:t>
+              <a:t>9/14/26</a:t>
             </a:fld>
             <a:endParaRPr lang="en-US"/>
           </a:p>
@@ -3709,10 +3416,9 @@
           </a:lstStyle>
           <a:p>
             <a:r>
-              <a:rPr lang="en-US" smtClean="0"/>
+              <a:rPr lang="en-US"/>
               <a:t>Click to edit Master title style</a:t>
             </a:r>
-            <a:endParaRPr lang="en-US"/>
           </a:p>
         </p:txBody>
       </p:sp>
@@ -3766,38 +3472,37 @@
           <a:p>
             <a:pPr lvl="0"/>
             <a:r>
-              <a:rPr lang="en-US" smtClean="0"/>
+              <a:rPr lang="en-US"/>
               <a:t>Click to edit Master text styles</a:t>
             </a:r>
           </a:p>
           <a:p>
             <a:pPr lvl="1"/>
             <a:r>
-              <a:rPr lang="en-US" smtClean="0"/>
+              <a:rPr lang="en-US"/>
               <a:t>Second level</a:t>
             </a:r>
           </a:p>
           <a:p>
             <a:pPr lvl="2"/>
             <a:r>
-              <a:rPr lang="en-US" smtClean="0"/>
+              <a:rPr lang="en-US"/>
               <a:t>Third level</a:t>
             </a:r>
           </a:p>
           <a:p>
             <a:pPr lvl="3"/>
             <a:r>
-              <a:rPr lang="en-US" smtClean="0"/>
+              <a:rPr lang="en-US"/>
               <a:t>Fourth level</a:t>
             </a:r>
           </a:p>
           <a:p>
             <a:pPr lvl="4"/>
             <a:r>
-              <a:rPr lang="en-US" smtClean="0"/>
+              <a:rPr lang="en-US"/>
               <a:t>Fifth level</a:t>
             </a:r>
-            <a:endParaRPr lang="en-US"/>
           </a:p>
         </p:txBody>
       </p:sp>
@@ -3860,7 +3565,7 @@
           <a:p>
             <a:pPr lvl="0"/>
             <a:r>
-              <a:rPr lang="en-US" smtClean="0"/>
+              <a:rPr lang="en-US"/>
               <a:t>Click to edit Master text styles</a:t>
             </a:r>
           </a:p>
@@ -3883,7 +3588,7 @@
           <a:p>
             <a:fld id="{5BCAD085-E8A6-8845-BD4E-CB4CCA059FC4}" type="datetimeFigureOut">
               <a:rPr lang="en-US" smtClean="0"/>
-              <a:t>1/27/13</a:t>
+              <a:t>9/14/26</a:t>
             </a:fld>
             <a:endParaRPr lang="en-US"/>
           </a:p>
@@ -3986,10 +3691,9 @@
           </a:lstStyle>
           <a:p>
             <a:r>
-              <a:rPr lang="en-US" smtClean="0"/>
+              <a:rPr lang="en-US"/>
               <a:t>Click to edit Master title style</a:t>
             </a:r>
-            <a:endParaRPr lang="en-US"/>
           </a:p>
         </p:txBody>
       </p:sp>
@@ -4113,7 +3817,7 @@
           <a:p>
             <a:pPr lvl="0"/>
             <a:r>
-              <a:rPr lang="en-US" smtClean="0"/>
+              <a:rPr lang="en-US"/>
               <a:t>Click to edit Master text styles</a:t>
             </a:r>
           </a:p>
@@ -4136,7 +3840,7 @@
           <a:p>
             <a:fld id="{5BCAD085-E8A6-8845-BD4E-CB4CCA059FC4}" type="datetimeFigureOut">
               <a:rPr lang="en-US" smtClean="0"/>
-              <a:t>1/27/13</a:t>
+              <a:t>9/14/26</a:t>
             </a:fld>
             <a:endParaRPr lang="en-US"/>
           </a:p>
@@ -4245,10 +3949,9 @@
           <a:lstStyle/>
           <a:p>
             <a:r>
-              <a:rPr lang="en-US" smtClean="0"/>
+              <a:rPr lang="en-US"/>
               <a:t>Click to edit Master title style</a:t>
             </a:r>
-            <a:endParaRPr lang="en-US"/>
           </a:p>
         </p:txBody>
       </p:sp>
@@ -4279,38 +3982,37 @@
           <a:p>
             <a:pPr lvl="0"/>
             <a:r>
-              <a:rPr lang="en-US" smtClean="0"/>
+              <a:rPr lang="en-US"/>
               <a:t>Click to edit Master text styles</a:t>
             </a:r>
           </a:p>
           <a:p>
             <a:pPr lvl="1"/>
             <a:r>
-              <a:rPr lang="en-US" smtClean="0"/>
+              <a:rPr lang="en-US"/>
               <a:t>Second level</a:t>
             </a:r>
           </a:p>
           <a:p>
             <a:pPr lvl="2"/>
             <a:r>
-              <a:rPr lang="en-US" smtClean="0"/>
+              <a:rPr lang="en-US"/>
               <a:t>Third level</a:t>
             </a:r>
           </a:p>
           <a:p>
             <a:pPr lvl="3"/>
             <a:r>
-              <a:rPr lang="en-US" smtClean="0"/>
+              <a:rPr lang="en-US"/>
               <a:t>Fourth level</a:t>
             </a:r>
           </a:p>
           <a:p>
             <a:pPr lvl="4"/>
             <a:r>
-              <a:rPr lang="en-US" smtClean="0"/>
+              <a:rPr lang="en-US"/>
               <a:t>Fifth level</a:t>
             </a:r>
-            <a:endParaRPr lang="en-US"/>
           </a:p>
         </p:txBody>
       </p:sp>
@@ -4349,7 +4051,7 @@
           <a:p>
             <a:fld id="{5BCAD085-E8A6-8845-BD4E-CB4CCA059FC4}" type="datetimeFigureOut">
               <a:rPr lang="en-US" smtClean="0"/>
-              <a:t>1/27/13</a:t>
+              <a:t>9/14/26</a:t>
             </a:fld>
             <a:endParaRPr lang="en-US"/>
           </a:p>
@@ -4708,7 +4410,7 @@
 </file>
 
 <file path=ppt/slides/slide1.xml><?xml version="1.0" encoding="utf-8"?>
-<p:sld xmlns:a="http://schemas.openxmlformats.org/drawingml/2006/main" xmlns:p="http://schemas.openxmlformats.org/presentationml/2006/main" xmlns:r="http://schemas.openxmlformats.org/officeDocument/2006/relationships">
+<p:sld xmlns:a="http://schemas.openxmlformats.org/drawingml/2006/main" xmlns:r="http://schemas.openxmlformats.org/officeDocument/2006/relationships" xmlns:p="http://schemas.openxmlformats.org/presentationml/2006/main">
   <p:cSld>
     <p:spTree>
       <p:nvGrpSpPr>
@@ -4716,7 +4418,14 @@
         <p:cNvGrpSpPr/>
         <p:nvPr/>
       </p:nvGrpSpPr>
-      <p:grpSpPr/>
+      <p:grpSpPr>
+        <a:xfrm>
+          <a:off x="0" y="0"/>
+          <a:ext cx="0" cy="0"/>
+          <a:chOff x="0" y="0"/>
+          <a:chExt cx="0" cy="0"/>
+        </a:xfrm>
+      </p:grpSpPr>
       <p:sp>
         <p:nvSpPr>
           <p:cNvPr id="2" name="Rectangle 1"/>
@@ -4758,6 +4467,7 @@
           <a:lstStyle/>
           <a:p>
             <a:pPr algn="ctr"/>
+            <a:endParaRPr/>
           </a:p>
         </p:txBody>
       </p:sp>
@@ -4890,7 +4600,7 @@
 </file>
 
 <file path=ppt/slides/slide10.xml><?xml version="1.0" encoding="utf-8"?>
-<p:sld xmlns:a="http://schemas.openxmlformats.org/drawingml/2006/main" xmlns:p="http://schemas.openxmlformats.org/presentationml/2006/main" xmlns:r="http://schemas.openxmlformats.org/officeDocument/2006/relationships">
+<p:sld xmlns:a="http://schemas.openxmlformats.org/drawingml/2006/main" xmlns:r="http://schemas.openxmlformats.org/officeDocument/2006/relationships" xmlns:p="http://schemas.openxmlformats.org/presentationml/2006/main">
   <p:cSld>
     <p:spTree>
       <p:nvGrpSpPr>
@@ -4898,7 +4608,14 @@
         <p:cNvGrpSpPr/>
         <p:nvPr/>
       </p:nvGrpSpPr>
-      <p:grpSpPr/>
+      <p:grpSpPr>
+        <a:xfrm>
+          <a:off x="0" y="0"/>
+          <a:ext cx="0" cy="0"/>
+          <a:chOff x="0" y="0"/>
+          <a:chExt cx="0" cy="0"/>
+        </a:xfrm>
+      </p:grpSpPr>
       <p:sp>
         <p:nvSpPr>
           <p:cNvPr id="2" name="TextBox 1"/>
@@ -4975,6 +4692,7 @@
           <a:lstStyle/>
           <a:p>
             <a:pPr algn="ctr"/>
+            <a:endParaRPr/>
           </a:p>
         </p:txBody>
       </p:sp>
@@ -4987,7 +4705,7 @@
           <p:nvPr/>
         </p:nvPicPr>
         <p:blipFill>
-          <a:blip r:embed="rId2"/>
+          <a:blip r:embed="rId3"/>
           <a:stretch>
             <a:fillRect/>
           </a:stretch>
@@ -5041,7 +4759,7 @@
           </a:fontRef>
         </p:style>
         <p:txBody>
-          <a:bodyPr rtlCol="0" anchor="ctr" wrap="square"/>
+          <a:bodyPr wrap="square" rtlCol="0" anchor="ctr"/>
           <a:lstStyle/>
           <a:p>
             <a:pPr algn="ctr">
@@ -5066,7 +4784,7 @@
 </file>
 
 <file path=ppt/slides/slide11.xml><?xml version="1.0" encoding="utf-8"?>
-<p:sld xmlns:a="http://schemas.openxmlformats.org/drawingml/2006/main" xmlns:p="http://schemas.openxmlformats.org/presentationml/2006/main" xmlns:r="http://schemas.openxmlformats.org/officeDocument/2006/relationships">
+<p:sld xmlns:a="http://schemas.openxmlformats.org/drawingml/2006/main" xmlns:r="http://schemas.openxmlformats.org/officeDocument/2006/relationships" xmlns:p="http://schemas.openxmlformats.org/presentationml/2006/main">
   <p:cSld>
     <p:spTree>
       <p:nvGrpSpPr>
@@ -5074,7 +4792,14 @@
         <p:cNvGrpSpPr/>
         <p:nvPr/>
       </p:nvGrpSpPr>
-      <p:grpSpPr/>
+      <p:grpSpPr>
+        <a:xfrm>
+          <a:off x="0" y="0"/>
+          <a:ext cx="0" cy="0"/>
+          <a:chOff x="0" y="0"/>
+          <a:chExt cx="0" cy="0"/>
+        </a:xfrm>
+      </p:grpSpPr>
       <p:sp>
         <p:nvSpPr>
           <p:cNvPr id="2" name="TextBox 1"/>
@@ -5151,6 +4876,7 @@
           <a:lstStyle/>
           <a:p>
             <a:pPr algn="ctr"/>
+            <a:endParaRPr/>
           </a:p>
         </p:txBody>
       </p:sp>
@@ -5352,7 +5078,7 @@
           </a:fontRef>
         </p:style>
         <p:txBody>
-          <a:bodyPr rtlCol="0" anchor="ctr" wrap="square"/>
+          <a:bodyPr wrap="square" rtlCol="0" anchor="ctr"/>
           <a:lstStyle/>
           <a:p>
             <a:pPr algn="ctr">
@@ -5377,7 +5103,7 @@
 </file>
 
 <file path=ppt/slides/slide12.xml><?xml version="1.0" encoding="utf-8"?>
-<p:sld xmlns:a="http://schemas.openxmlformats.org/drawingml/2006/main" xmlns:p="http://schemas.openxmlformats.org/presentationml/2006/main" xmlns:r="http://schemas.openxmlformats.org/officeDocument/2006/relationships">
+<p:sld xmlns:a="http://schemas.openxmlformats.org/drawingml/2006/main" xmlns:r="http://schemas.openxmlformats.org/officeDocument/2006/relationships" xmlns:p="http://schemas.openxmlformats.org/presentationml/2006/main">
   <p:cSld>
     <p:spTree>
       <p:nvGrpSpPr>
@@ -5385,7 +5111,14 @@
         <p:cNvGrpSpPr/>
         <p:nvPr/>
       </p:nvGrpSpPr>
-      <p:grpSpPr/>
+      <p:grpSpPr>
+        <a:xfrm>
+          <a:off x="0" y="0"/>
+          <a:ext cx="0" cy="0"/>
+          <a:chOff x="0" y="0"/>
+          <a:chExt cx="0" cy="0"/>
+        </a:xfrm>
+      </p:grpSpPr>
       <p:sp>
         <p:nvSpPr>
           <p:cNvPr id="2" name="TextBox 1"/>
@@ -5462,6 +5195,7 @@
           <a:lstStyle/>
           <a:p>
             <a:pPr algn="ctr"/>
+            <a:endParaRPr/>
           </a:p>
         </p:txBody>
       </p:sp>
@@ -5509,7 +5243,7 @@
           <p:nvPr/>
         </p:nvPicPr>
         <p:blipFill>
-          <a:blip r:embed="rId2"/>
+          <a:blip r:embed="rId3"/>
           <a:stretch>
             <a:fillRect/>
           </a:stretch>
@@ -5616,7 +5350,7 @@
 </file>
 
 <file path=ppt/slides/slide13.xml><?xml version="1.0" encoding="utf-8"?>
-<p:sld xmlns:a="http://schemas.openxmlformats.org/drawingml/2006/main" xmlns:p="http://schemas.openxmlformats.org/presentationml/2006/main" xmlns:r="http://schemas.openxmlformats.org/officeDocument/2006/relationships">
+<p:sld xmlns:a="http://schemas.openxmlformats.org/drawingml/2006/main" xmlns:r="http://schemas.openxmlformats.org/officeDocument/2006/relationships" xmlns:p="http://schemas.openxmlformats.org/presentationml/2006/main">
   <p:cSld>
     <p:spTree>
       <p:nvGrpSpPr>
@@ -5624,7 +5358,14 @@
         <p:cNvGrpSpPr/>
         <p:nvPr/>
       </p:nvGrpSpPr>
-      <p:grpSpPr/>
+      <p:grpSpPr>
+        <a:xfrm>
+          <a:off x="0" y="0"/>
+          <a:ext cx="0" cy="0"/>
+          <a:chOff x="0" y="0"/>
+          <a:chExt cx="0" cy="0"/>
+        </a:xfrm>
+      </p:grpSpPr>
       <p:sp>
         <p:nvSpPr>
           <p:cNvPr id="2" name="TextBox 1"/>
@@ -5701,6 +5442,7 @@
           <a:lstStyle/>
           <a:p>
             <a:pPr algn="ctr"/>
+            <a:endParaRPr/>
           </a:p>
         </p:txBody>
       </p:sp>
@@ -5831,7 +5573,7 @@
 </file>
 
 <file path=ppt/slides/slide14.xml><?xml version="1.0" encoding="utf-8"?>
-<p:sld xmlns:a="http://schemas.openxmlformats.org/drawingml/2006/main" xmlns:p="http://schemas.openxmlformats.org/presentationml/2006/main" xmlns:r="http://schemas.openxmlformats.org/officeDocument/2006/relationships">
+<p:sld xmlns:a="http://schemas.openxmlformats.org/drawingml/2006/main" xmlns:r="http://schemas.openxmlformats.org/officeDocument/2006/relationships" xmlns:p="http://schemas.openxmlformats.org/presentationml/2006/main">
   <p:cSld>
     <p:spTree>
       <p:nvGrpSpPr>
@@ -5839,7 +5581,14 @@
         <p:cNvGrpSpPr/>
         <p:nvPr/>
       </p:nvGrpSpPr>
-      <p:grpSpPr/>
+      <p:grpSpPr>
+        <a:xfrm>
+          <a:off x="0" y="0"/>
+          <a:ext cx="0" cy="0"/>
+          <a:chOff x="0" y="0"/>
+          <a:chExt cx="0" cy="0"/>
+        </a:xfrm>
+      </p:grpSpPr>
       <p:sp>
         <p:nvSpPr>
           <p:cNvPr id="2" name="TextBox 1"/>
@@ -5916,6 +5665,7 @@
           <a:lstStyle/>
           <a:p>
             <a:pPr algn="ctr"/>
+            <a:endParaRPr/>
           </a:p>
         </p:txBody>
       </p:sp>
@@ -5963,14 +5713,14 @@
           <p:nvPr/>
         </p:nvPicPr>
         <p:blipFill>
-          <a:blip r:embed="rId2"/>
+          <a:blip r:embed="rId3"/>
           <a:stretch>
             <a:fillRect/>
           </a:stretch>
         </p:blipFill>
         <p:spPr>
           <a:xfrm>
-            <a:off x="3032760" y="1828800"/>
+            <a:off x="3032760" y="2349796"/>
             <a:ext cx="6096000" cy="3657600"/>
           </a:xfrm>
           <a:prstGeom prst="rect">
@@ -5987,7 +5737,7 @@
 </file>
 
 <file path=ppt/slides/slide15.xml><?xml version="1.0" encoding="utf-8"?>
-<p:sld xmlns:a="http://schemas.openxmlformats.org/drawingml/2006/main" xmlns:p="http://schemas.openxmlformats.org/presentationml/2006/main" xmlns:r="http://schemas.openxmlformats.org/officeDocument/2006/relationships">
+<p:sld xmlns:a="http://schemas.openxmlformats.org/drawingml/2006/main" xmlns:r="http://schemas.openxmlformats.org/officeDocument/2006/relationships" xmlns:p="http://schemas.openxmlformats.org/presentationml/2006/main">
   <p:cSld>
     <p:spTree>
       <p:nvGrpSpPr>
@@ -5995,7 +5745,14 @@
         <p:cNvGrpSpPr/>
         <p:nvPr/>
       </p:nvGrpSpPr>
-      <p:grpSpPr/>
+      <p:grpSpPr>
+        <a:xfrm>
+          <a:off x="0" y="0"/>
+          <a:ext cx="0" cy="0"/>
+          <a:chOff x="0" y="0"/>
+          <a:chExt cx="0" cy="0"/>
+        </a:xfrm>
+      </p:grpSpPr>
       <p:sp>
         <p:nvSpPr>
           <p:cNvPr id="2" name="TextBox 1"/>
@@ -6072,6 +5829,7 @@
           <a:lstStyle/>
           <a:p>
             <a:pPr algn="ctr"/>
+            <a:endParaRPr/>
           </a:p>
         </p:txBody>
       </p:sp>
@@ -6129,9 +5887,27 @@
                 <a:tableStyleId>{5C22544A-7EE6-4342-B048-85BDC9FD1C3A}</a:tableStyleId>
               </a:tblPr>
               <a:tblGrid>
-                <a:gridCol w="2926080"/>
-                <a:gridCol w="4846320"/>
-                <a:gridCol w="2560320"/>
+                <a:gridCol w="2926080">
+                  <a:extLst>
+                    <a:ext uri="{9D8B030D-6E8A-4147-A177-3AD203B41FA5}">
+                      <a16:colId xmlns:a16="http://schemas.microsoft.com/office/drawing/2014/main" val="20000"/>
+                    </a:ext>
+                  </a:extLst>
+                </a:gridCol>
+                <a:gridCol w="4846320">
+                  <a:extLst>
+                    <a:ext uri="{9D8B030D-6E8A-4147-A177-3AD203B41FA5}">
+                      <a16:colId xmlns:a16="http://schemas.microsoft.com/office/drawing/2014/main" val="20001"/>
+                    </a:ext>
+                  </a:extLst>
+                </a:gridCol>
+                <a:gridCol w="2560320">
+                  <a:extLst>
+                    <a:ext uri="{9D8B030D-6E8A-4147-A177-3AD203B41FA5}">
+                      <a16:colId xmlns:a16="http://schemas.microsoft.com/office/drawing/2014/main" val="20002"/>
+                    </a:ext>
+                  </a:extLst>
+                </a:gridCol>
               </a:tblGrid>
               <a:tr h="475488">
                 <a:tc>
@@ -6179,6 +5955,11 @@
                   </a:txBody>
                   <a:tcPr/>
                 </a:tc>
+                <a:extLst>
+                  <a:ext uri="{0D108BD9-81ED-4DB2-BD59-A6C34878D82A}">
+                    <a16:rowId xmlns:a16="http://schemas.microsoft.com/office/drawing/2014/main" val="10000"/>
+                  </a:ext>
+                </a:extLst>
               </a:tr>
               <a:tr h="475488">
                 <a:tc>
@@ -6226,6 +6007,11 @@
                   </a:txBody>
                   <a:tcPr/>
                 </a:tc>
+                <a:extLst>
+                  <a:ext uri="{0D108BD9-81ED-4DB2-BD59-A6C34878D82A}">
+                    <a16:rowId xmlns:a16="http://schemas.microsoft.com/office/drawing/2014/main" val="10001"/>
+                  </a:ext>
+                </a:extLst>
               </a:tr>
               <a:tr h="475488">
                 <a:tc>
@@ -6273,6 +6059,11 @@
                   </a:txBody>
                   <a:tcPr/>
                 </a:tc>
+                <a:extLst>
+                  <a:ext uri="{0D108BD9-81ED-4DB2-BD59-A6C34878D82A}">
+                    <a16:rowId xmlns:a16="http://schemas.microsoft.com/office/drawing/2014/main" val="10002"/>
+                  </a:ext>
+                </a:extLst>
               </a:tr>
               <a:tr h="475488">
                 <a:tc>
@@ -6320,6 +6111,11 @@
                   </a:txBody>
                   <a:tcPr/>
                 </a:tc>
+                <a:extLst>
+                  <a:ext uri="{0D108BD9-81ED-4DB2-BD59-A6C34878D82A}">
+                    <a16:rowId xmlns:a16="http://schemas.microsoft.com/office/drawing/2014/main" val="10003"/>
+                  </a:ext>
+                </a:extLst>
               </a:tr>
               <a:tr h="475488">
                 <a:tc>
@@ -6367,6 +6163,11 @@
                   </a:txBody>
                   <a:tcPr/>
                 </a:tc>
+                <a:extLst>
+                  <a:ext uri="{0D108BD9-81ED-4DB2-BD59-A6C34878D82A}">
+                    <a16:rowId xmlns:a16="http://schemas.microsoft.com/office/drawing/2014/main" val="10004"/>
+                  </a:ext>
+                </a:extLst>
               </a:tr>
             </a:tbl>
           </a:graphicData>
@@ -6416,7 +6217,7 @@
 </file>
 
 <file path=ppt/slides/slide16.xml><?xml version="1.0" encoding="utf-8"?>
-<p:sld xmlns:a="http://schemas.openxmlformats.org/drawingml/2006/main" xmlns:p="http://schemas.openxmlformats.org/presentationml/2006/main" xmlns:r="http://schemas.openxmlformats.org/officeDocument/2006/relationships">
+<p:sld xmlns:a="http://schemas.openxmlformats.org/drawingml/2006/main" xmlns:r="http://schemas.openxmlformats.org/officeDocument/2006/relationships" xmlns:p="http://schemas.openxmlformats.org/presentationml/2006/main">
   <p:cSld>
     <p:spTree>
       <p:nvGrpSpPr>
@@ -6424,7 +6225,14 @@
         <p:cNvGrpSpPr/>
         <p:nvPr/>
       </p:nvGrpSpPr>
-      <p:grpSpPr/>
+      <p:grpSpPr>
+        <a:xfrm>
+          <a:off x="0" y="0"/>
+          <a:ext cx="0" cy="0"/>
+          <a:chOff x="0" y="0"/>
+          <a:chExt cx="0" cy="0"/>
+        </a:xfrm>
+      </p:grpSpPr>
       <p:sp>
         <p:nvSpPr>
           <p:cNvPr id="2" name="TextBox 1"/>
@@ -6501,6 +6309,7 @@
           <a:lstStyle/>
           <a:p>
             <a:pPr algn="ctr"/>
+            <a:endParaRPr/>
           </a:p>
         </p:txBody>
       </p:sp>
@@ -6513,7 +6322,7 @@
           <p:nvPr/>
         </p:nvPicPr>
         <p:blipFill>
-          <a:blip r:embed="rId2"/>
+          <a:blip r:embed="rId3"/>
           <a:stretch>
             <a:fillRect/>
           </a:stretch>
@@ -6620,7 +6429,7 @@
 </file>
 
 <file path=ppt/slides/slide17.xml><?xml version="1.0" encoding="utf-8"?>
-<p:sld xmlns:a="http://schemas.openxmlformats.org/drawingml/2006/main" xmlns:p="http://schemas.openxmlformats.org/presentationml/2006/main" xmlns:r="http://schemas.openxmlformats.org/officeDocument/2006/relationships">
+<p:sld xmlns:a="http://schemas.openxmlformats.org/drawingml/2006/main" xmlns:r="http://schemas.openxmlformats.org/officeDocument/2006/relationships" xmlns:p="http://schemas.openxmlformats.org/presentationml/2006/main">
   <p:cSld>
     <p:spTree>
       <p:nvGrpSpPr>
@@ -6628,7 +6437,14 @@
         <p:cNvGrpSpPr/>
         <p:nvPr/>
       </p:nvGrpSpPr>
-      <p:grpSpPr/>
+      <p:grpSpPr>
+        <a:xfrm>
+          <a:off x="0" y="0"/>
+          <a:ext cx="0" cy="0"/>
+          <a:chOff x="0" y="0"/>
+          <a:chExt cx="0" cy="0"/>
+        </a:xfrm>
+      </p:grpSpPr>
       <p:sp>
         <p:nvSpPr>
           <p:cNvPr id="2" name="Rectangle 1"/>
@@ -6670,6 +6486,7 @@
           <a:lstStyle/>
           <a:p>
             <a:pPr algn="ctr"/>
+            <a:endParaRPr/>
           </a:p>
         </p:txBody>
       </p:sp>
@@ -6732,7 +6549,7 @@
 </file>
 
 <file path=ppt/slides/slide18.xml><?xml version="1.0" encoding="utf-8"?>
-<p:sld xmlns:a="http://schemas.openxmlformats.org/drawingml/2006/main" xmlns:p="http://schemas.openxmlformats.org/presentationml/2006/main" xmlns:r="http://schemas.openxmlformats.org/officeDocument/2006/relationships">
+<p:sld xmlns:a="http://schemas.openxmlformats.org/drawingml/2006/main" xmlns:r="http://schemas.openxmlformats.org/officeDocument/2006/relationships" xmlns:p="http://schemas.openxmlformats.org/presentationml/2006/main">
   <p:cSld>
     <p:spTree>
       <p:nvGrpSpPr>
@@ -6740,7 +6557,14 @@
         <p:cNvGrpSpPr/>
         <p:nvPr/>
       </p:nvGrpSpPr>
-      <p:grpSpPr/>
+      <p:grpSpPr>
+        <a:xfrm>
+          <a:off x="0" y="0"/>
+          <a:ext cx="0" cy="0"/>
+          <a:chOff x="0" y="0"/>
+          <a:chExt cx="0" cy="0"/>
+        </a:xfrm>
+      </p:grpSpPr>
       <p:sp>
         <p:nvSpPr>
           <p:cNvPr id="2" name="TextBox 1"/>
@@ -6817,6 +6641,7 @@
           <a:lstStyle/>
           <a:p>
             <a:pPr algn="ctr"/>
+            <a:endParaRPr/>
           </a:p>
         </p:txBody>
       </p:sp>
@@ -6992,7 +6817,7 @@
           </a:fontRef>
         </p:style>
         <p:txBody>
-          <a:bodyPr rtlCol="0" anchor="ctr" wrap="square"/>
+          <a:bodyPr wrap="square" rtlCol="0" anchor="ctr"/>
           <a:lstStyle/>
           <a:p>
             <a:pPr algn="ctr">
@@ -7017,7 +6842,7 @@
 </file>
 
 <file path=ppt/slides/slide19.xml><?xml version="1.0" encoding="utf-8"?>
-<p:sld xmlns:a="http://schemas.openxmlformats.org/drawingml/2006/main" xmlns:p="http://schemas.openxmlformats.org/presentationml/2006/main" xmlns:r="http://schemas.openxmlformats.org/officeDocument/2006/relationships">
+<p:sld xmlns:a="http://schemas.openxmlformats.org/drawingml/2006/main" xmlns:r="http://schemas.openxmlformats.org/officeDocument/2006/relationships" xmlns:p="http://schemas.openxmlformats.org/presentationml/2006/main">
   <p:cSld>
     <p:spTree>
       <p:nvGrpSpPr>
@@ -7025,7 +6850,14 @@
         <p:cNvGrpSpPr/>
         <p:nvPr/>
       </p:nvGrpSpPr>
-      <p:grpSpPr/>
+      <p:grpSpPr>
+        <a:xfrm>
+          <a:off x="0" y="0"/>
+          <a:ext cx="0" cy="0"/>
+          <a:chOff x="0" y="0"/>
+          <a:chExt cx="0" cy="0"/>
+        </a:xfrm>
+      </p:grpSpPr>
       <p:sp>
         <p:nvSpPr>
           <p:cNvPr id="2" name="TextBox 1"/>
@@ -7056,7 +6888,7 @@
               </a:defRPr>
             </a:pPr>
             <a:r>
-              <a:t>What's next</a:t>
+              <a:t>Takeaways</a:t>
             </a:r>
           </a:p>
         </p:txBody>
@@ -7102,6 +6934,7 @@
           <a:lstStyle/>
           <a:p>
             <a:pPr algn="ctr"/>
+            <a:endParaRPr/>
           </a:p>
         </p:txBody>
       </p:sp>
@@ -7113,7 +6946,7 @@
         </p:nvSpPr>
         <p:spPr>
           <a:xfrm>
-            <a:off x="777240" y="2103120"/>
+            <a:off x="777240" y="2194560"/>
             <a:ext cx="10607040" cy="4206240"/>
           </a:xfrm>
           <a:prstGeom prst="rect">
@@ -7129,176 +6962,97 @@
           <a:p>
             <a:pPr>
               <a:spcAft>
-                <a:spcPts val="1200"/>
+                <a:spcPts val="2200"/>
               </a:spcAft>
-              <a:defRPr sz="2100">
+              <a:defRPr sz="2200">
                 <a:solidFill>
                   <a:srgbClr val="22262B"/>
                 </a:solidFill>
               </a:defRPr>
             </a:pPr>
             <a:r>
-              <a:t>• Broaden the index with additional assays:</a:t>
-            </a:r>
-          </a:p>
-          <a:p>
-            <a:pPr lvl="1">
-              <a:spcBef>
-                <a:spcPts val="200"/>
-              </a:spcBef>
-              <a:spcAft>
-                <a:spcPts val="1200"/>
-              </a:spcAft>
-              <a:defRPr sz="1700">
-                <a:solidFill>
-                  <a:srgbClr val="444A52"/>
-                </a:solidFill>
-              </a:defRPr>
-            </a:pPr>
-            <a:r>
-              <a:t>– Glycogen (heat vs. control, 3 h)</a:t>
-            </a:r>
-          </a:p>
-          <a:p>
-            <a:pPr lvl="1">
-              <a:spcBef>
-                <a:spcPts val="200"/>
-              </a:spcBef>
-              <a:spcAft>
-                <a:spcPts val="1200"/>
-              </a:spcAft>
-              <a:defRPr sz="1700">
-                <a:solidFill>
-                  <a:srgbClr val="444A52"/>
-                </a:solidFill>
-              </a:defRPr>
-            </a:pPr>
-            <a:r>
-              <a:t>– Na+/K+ ATPase</a:t>
-            </a:r>
-          </a:p>
-          <a:p>
-            <a:pPr lvl="1">
-              <a:spcBef>
-                <a:spcPts val="200"/>
-              </a:spcBef>
-              <a:spcAft>
-                <a:spcPts val="1200"/>
-              </a:spcAft>
-              <a:defRPr sz="1700">
-                <a:solidFill>
-                  <a:srgbClr val="444A52"/>
-                </a:solidFill>
-              </a:defRPr>
-            </a:pPr>
-            <a:r>
-              <a:t>– Citrate synthase</a:t>
+              <a:rPr dirty="0"/>
+              <a:t>• Resazurin turns metabolism into a color change — cheap, non-lethal, 96 animals at a time.</a:t>
             </a:r>
           </a:p>
           <a:p>
             <a:pPr>
               <a:spcAft>
-                <a:spcPts val="1200"/>
+                <a:spcPts val="2200"/>
               </a:spcAft>
-              <a:defRPr sz="2100">
+              <a:defRPr sz="2200">
                 <a:solidFill>
                   <a:srgbClr val="22262B"/>
                 </a:solidFill>
               </a:defRPr>
             </a:pPr>
             <a:r>
-              <a:t>• Validate predictions against field outplants across PNW sites.</a:t>
+              <a:rPr dirty="0"/>
+              <a:t>• Published and validated against oxygen consumption (</a:t>
+            </a:r>
+            <a:r>
+              <a:rPr dirty="0" err="1"/>
+              <a:t>PeerJ</a:t>
+            </a:r>
+            <a:r>
+              <a:rPr dirty="0"/>
+              <a:t> 2026).</a:t>
             </a:r>
           </a:p>
           <a:p>
             <a:pPr>
               <a:spcAft>
-                <a:spcPts val="1200"/>
+                <a:spcPts val="2200"/>
               </a:spcAft>
-              <a:defRPr sz="2100">
+              <a:defRPr sz="2200">
                 <a:solidFill>
                   <a:srgbClr val="22262B"/>
                 </a:solidFill>
               </a:defRPr>
             </a:pPr>
             <a:r>
-              <a:t>• Package a grower-facing protocol and a simple scoring sheet.</a:t>
-            </a:r>
-          </a:p>
-        </p:txBody>
-      </p:sp>
-    </p:spTree>
-  </p:cSld>
-  <p:clrMapOvr>
-    <a:masterClrMapping/>
-  </p:clrMapOvr>
-</p:sld>
-</file>
-
-<file path=ppt/slides/slide2.xml><?xml version="1.0" encoding="utf-8"?>
-<p:sld xmlns:a="http://schemas.openxmlformats.org/drawingml/2006/main" xmlns:p="http://schemas.openxmlformats.org/presentationml/2006/main" xmlns:r="http://schemas.openxmlformats.org/officeDocument/2006/relationships">
-  <p:cSld>
-    <p:spTree>
-      <p:nvGrpSpPr>
-        <p:cNvPr id="1" name=""/>
-        <p:cNvGrpSpPr/>
-        <p:nvPr/>
-      </p:nvGrpSpPr>
-      <p:grpSpPr/>
-      <p:sp>
-        <p:nvSpPr>
-          <p:cNvPr id="2" name="TextBox 1"/>
-          <p:cNvSpPr txBox="1"/>
-          <p:nvPr/>
-        </p:nvSpPr>
-        <p:spPr>
-          <a:xfrm>
-            <a:off x="640080" y="411480"/>
-            <a:ext cx="10881360" cy="914400"/>
-          </a:xfrm>
-          <a:prstGeom prst="rect">
-            <a:avLst/>
-          </a:prstGeom>
-          <a:noFill/>
-        </p:spPr>
-        <p:txBody>
-          <a:bodyPr wrap="square">
-            <a:spAutoFit/>
-          </a:bodyPr>
-          <a:lstStyle/>
+              <a:rPr dirty="0"/>
+              <a:t>• Predicts phenotype: metabolic curve shape forecasts family hardiness (cross-validated rho ≈ 0.8).</a:t>
+            </a:r>
+          </a:p>
           <a:p>
             <a:pPr>
-              <a:defRPr sz="3400" b="1">
-                <a:solidFill>
-                  <a:srgbClr val="1B3A5C"/>
+              <a:spcAft>
+                <a:spcPts val="2200"/>
+              </a:spcAft>
+              <a:defRPr sz="2200">
+                <a:solidFill>
+                  <a:srgbClr val="22262B"/>
                 </a:solidFill>
               </a:defRPr>
             </a:pPr>
             <a:r>
-              <a:t>Two questions</a:t>
-            </a:r>
-          </a:p>
-        </p:txBody>
-      </p:sp>
-      <p:sp>
-        <p:nvSpPr>
-          <p:cNvPr id="3" name="Rectangle 2"/>
+              <a:t>• Measures stress in real time: a same-day readout of how hard your crop is working.</a:t>
+            </a:r>
+          </a:p>
+        </p:txBody>
+      </p:sp>
+      <p:sp>
+        <p:nvSpPr>
+          <p:cNvPr id="5" name="Rectangle 4"/>
           <p:cNvSpPr/>
           <p:nvPr/>
         </p:nvSpPr>
         <p:spPr>
           <a:xfrm>
-            <a:off x="640080" y="1325880"/>
-            <a:ext cx="1463040" cy="54864"/>
+            <a:off x="777240" y="5623560"/>
+            <a:ext cx="10607040" cy="777240"/>
           </a:xfrm>
           <a:prstGeom prst="rect">
             <a:avLst/>
           </a:prstGeom>
           <a:solidFill>
-            <a:srgbClr val="0E7C86"/>
+            <a:srgbClr val="EFF3F6"/>
           </a:solidFill>
-          <a:ln>
-            <a:noFill/>
+          <a:ln w="15875">
+            <a:solidFill>
+              <a:srgbClr val="0E7C86"/>
+            </a:solidFill>
           </a:ln>
           <a:effectLst/>
         </p:spPr>
@@ -7317,23 +7071,63 @@
           </a:fontRef>
         </p:style>
         <p:txBody>
-          <a:bodyPr rtlCol="0" anchor="ctr"/>
-          <a:lstStyle/>
-          <a:p>
-            <a:pPr algn="ctr"/>
-          </a:p>
-        </p:txBody>
-      </p:sp>
-      <p:sp>
-        <p:nvSpPr>
-          <p:cNvPr id="4" name="TextBox 3"/>
+          <a:bodyPr wrap="square" rtlCol="0" anchor="ctr"/>
+          <a:lstStyle/>
+          <a:p>
+            <a:pPr algn="ctr">
+              <a:defRPr sz="1900" b="1">
+                <a:solidFill>
+                  <a:srgbClr val="1B3A5C"/>
+                </a:solidFill>
+              </a:defRPr>
+            </a:pPr>
+            <a:r>
+              <a:rPr dirty="0"/>
+              <a:t>USDA-WRAC - </a:t>
+            </a:r>
+            <a:r>
+              <a:rPr dirty="0" err="1"/>
+              <a:t>sormi.science</a:t>
+            </a:r>
+            <a:endParaRPr dirty="0"/>
+          </a:p>
+        </p:txBody>
+      </p:sp>
+    </p:spTree>
+  </p:cSld>
+  <p:clrMapOvr>
+    <a:masterClrMapping/>
+  </p:clrMapOvr>
+</p:sld>
+</file>
+
+<file path=ppt/slides/slide2.xml><?xml version="1.0" encoding="utf-8"?>
+<p:sld xmlns:a="http://schemas.openxmlformats.org/drawingml/2006/main" xmlns:r="http://schemas.openxmlformats.org/officeDocument/2006/relationships" xmlns:p="http://schemas.openxmlformats.org/presentationml/2006/main">
+  <p:cSld>
+    <p:spTree>
+      <p:nvGrpSpPr>
+        <p:cNvPr id="1" name=""/>
+        <p:cNvGrpSpPr/>
+        <p:nvPr/>
+      </p:nvGrpSpPr>
+      <p:grpSpPr>
+        <a:xfrm>
+          <a:off x="0" y="0"/>
+          <a:ext cx="0" cy="0"/>
+          <a:chOff x="0" y="0"/>
+          <a:chExt cx="0" cy="0"/>
+        </a:xfrm>
+      </p:grpSpPr>
+      <p:sp>
+        <p:nvSpPr>
+          <p:cNvPr id="2" name="TextBox 1"/>
           <p:cNvSpPr txBox="1"/>
           <p:nvPr/>
         </p:nvSpPr>
         <p:spPr>
           <a:xfrm>
-            <a:off x="777240" y="2103120"/>
-            <a:ext cx="10607040" cy="4206240"/>
+            <a:off x="640080" y="411480"/>
+            <a:ext cx="10881360" cy="914400"/>
           </a:xfrm>
           <a:prstGeom prst="rect">
             <a:avLst/>
@@ -7347,107 +7141,37 @@
           <a:lstStyle/>
           <a:p>
             <a:pPr>
-              <a:spcAft>
-                <a:spcPts val="2600"/>
-              </a:spcAft>
-              <a:defRPr sz="2600">
-                <a:solidFill>
-                  <a:srgbClr val="22262B"/>
+              <a:defRPr sz="3400" b="1">
+                <a:solidFill>
+                  <a:srgbClr val="1B3A5C"/>
                 </a:solidFill>
               </a:defRPr>
             </a:pPr>
             <a:r>
-              <a:t>• Which seed should I buy — which family lines actually perform on my site?</a:t>
-            </a:r>
-          </a:p>
-          <a:p>
-            <a:pPr>
-              <a:spcAft>
-                <a:spcPts val="2600"/>
-              </a:spcAft>
-              <a:defRPr sz="2600">
-                <a:solidFill>
-                  <a:srgbClr val="22262B"/>
-                </a:solidFill>
-              </a:defRPr>
-            </a:pPr>
-            <a:r>
-              <a:t>• How stressed is my crop right now, before I start seeing mortality?</a:t>
-            </a:r>
-          </a:p>
-        </p:txBody>
-      </p:sp>
-      <p:sp>
-        <p:nvSpPr>
-          <p:cNvPr id="5" name="TextBox 4"/>
-          <p:cNvSpPr txBox="1"/>
-          <p:nvPr/>
-        </p:nvSpPr>
-        <p:spPr>
-          <a:xfrm>
-            <a:off x="777240" y="3566160"/>
-            <a:ext cx="10607040" cy="1828800"/>
-          </a:xfrm>
-          <a:prstGeom prst="rect">
-            <a:avLst/>
-          </a:prstGeom>
-          <a:noFill/>
-        </p:spPr>
-        <p:txBody>
-          <a:bodyPr wrap="square">
-            <a:spAutoFit/>
-          </a:bodyPr>
-          <a:lstStyle/>
-          <a:p>
-            <a:pPr>
-              <a:defRPr sz="2400" b="1">
-                <a:solidFill>
-                  <a:srgbClr val="1B3A5C"/>
-                </a:solidFill>
-              </a:defRPr>
-            </a:pPr>
-            <a:r>
-              <a:t>Today, answering either one means waiting.</a:t>
-            </a:r>
-          </a:p>
-          <a:p>
-            <a:pPr>
-              <a:spcBef>
-                <a:spcPts val="800"/>
-              </a:spcBef>
-              <a:defRPr sz="2000">
-                <a:solidFill>
-                  <a:srgbClr val="444A52"/>
-                </a:solidFill>
-              </a:defRPr>
-            </a:pPr>
-            <a:r>
-              <a:t>Breeding trials take a season. Mortality events tell you after the fact.</a:t>
-            </a:r>
-          </a:p>
-        </p:txBody>
-      </p:sp>
-      <p:sp>
-        <p:nvSpPr>
-          <p:cNvPr id="6" name="Rectangle 5"/>
+              <a:t>Two questions</a:t>
+            </a:r>
+          </a:p>
+        </p:txBody>
+      </p:sp>
+      <p:sp>
+        <p:nvSpPr>
+          <p:cNvPr id="3" name="Rectangle 2"/>
           <p:cNvSpPr/>
           <p:nvPr/>
         </p:nvSpPr>
         <p:spPr>
           <a:xfrm>
-            <a:off x="777240" y="5623560"/>
-            <a:ext cx="10607040" cy="777240"/>
+            <a:off x="640080" y="1325880"/>
+            <a:ext cx="1463040" cy="54864"/>
           </a:xfrm>
           <a:prstGeom prst="rect">
             <a:avLst/>
           </a:prstGeom>
           <a:solidFill>
-            <a:srgbClr val="EFF3F6"/>
+            <a:srgbClr val="0E7C86"/>
           </a:solidFill>
-          <a:ln w="15875">
-            <a:solidFill>
-              <a:srgbClr val="0E7C86"/>
-            </a:solidFill>
+          <a:ln>
+            <a:noFill/>
           </a:ln>
           <a:effectLst/>
         </p:spPr>
@@ -7466,50 +7190,24 @@
           </a:fontRef>
         </p:style>
         <p:txBody>
-          <a:bodyPr rtlCol="0" anchor="ctr" wrap="square"/>
-          <a:lstStyle/>
-          <a:p>
-            <a:pPr algn="ctr">
-              <a:defRPr sz="1900" b="1">
-                <a:solidFill>
-                  <a:srgbClr val="1B3A5C"/>
-                </a:solidFill>
-              </a:defRPr>
-            </a:pPr>
-            <a:r>
-              <a:t>We need a fast, cheap, non-lethal measure of how an oyster is doing — right now.</a:t>
-            </a:r>
-          </a:p>
-        </p:txBody>
-      </p:sp>
-    </p:spTree>
-  </p:cSld>
-  <p:clrMapOvr>
-    <a:masterClrMapping/>
-  </p:clrMapOvr>
-</p:sld>
-</file>
-
-<file path=ppt/slides/slide20.xml><?xml version="1.0" encoding="utf-8"?>
-<p:sld xmlns:a="http://schemas.openxmlformats.org/drawingml/2006/main" xmlns:p="http://schemas.openxmlformats.org/presentationml/2006/main" xmlns:r="http://schemas.openxmlformats.org/officeDocument/2006/relationships">
-  <p:cSld>
-    <p:spTree>
-      <p:nvGrpSpPr>
-        <p:cNvPr id="1" name=""/>
-        <p:cNvGrpSpPr/>
-        <p:nvPr/>
-      </p:nvGrpSpPr>
-      <p:grpSpPr/>
-      <p:sp>
-        <p:nvSpPr>
-          <p:cNvPr id="2" name="TextBox 1"/>
+          <a:bodyPr rtlCol="0" anchor="ctr"/>
+          <a:lstStyle/>
+          <a:p>
+            <a:pPr algn="ctr"/>
+            <a:endParaRPr/>
+          </a:p>
+        </p:txBody>
+      </p:sp>
+      <p:sp>
+        <p:nvSpPr>
+          <p:cNvPr id="4" name="TextBox 3"/>
           <p:cNvSpPr txBox="1"/>
           <p:nvPr/>
         </p:nvSpPr>
         <p:spPr>
           <a:xfrm>
-            <a:off x="640080" y="411480"/>
-            <a:ext cx="10881360" cy="914400"/>
+            <a:off x="777240" y="2103120"/>
+            <a:ext cx="10607040" cy="4206240"/>
           </a:xfrm>
           <a:prstGeom prst="rect">
             <a:avLst/>
@@ -7523,37 +7221,107 @@
           <a:lstStyle/>
           <a:p>
             <a:pPr>
-              <a:defRPr sz="3400" b="1">
+              <a:spcAft>
+                <a:spcPts val="2600"/>
+              </a:spcAft>
+              <a:defRPr sz="2600">
+                <a:solidFill>
+                  <a:srgbClr val="22262B"/>
+                </a:solidFill>
+              </a:defRPr>
+            </a:pPr>
+            <a:r>
+              <a:t>• Which seed should I buy — which family lines actually perform on my site?</a:t>
+            </a:r>
+          </a:p>
+          <a:p>
+            <a:pPr>
+              <a:spcAft>
+                <a:spcPts val="2600"/>
+              </a:spcAft>
+              <a:defRPr sz="2600">
+                <a:solidFill>
+                  <a:srgbClr val="22262B"/>
+                </a:solidFill>
+              </a:defRPr>
+            </a:pPr>
+            <a:r>
+              <a:t>• How stressed is my crop right now, before I start seeing mortality?</a:t>
+            </a:r>
+          </a:p>
+        </p:txBody>
+      </p:sp>
+      <p:sp>
+        <p:nvSpPr>
+          <p:cNvPr id="5" name="TextBox 4"/>
+          <p:cNvSpPr txBox="1"/>
+          <p:nvPr/>
+        </p:nvSpPr>
+        <p:spPr>
+          <a:xfrm>
+            <a:off x="777240" y="3566160"/>
+            <a:ext cx="10607040" cy="1828800"/>
+          </a:xfrm>
+          <a:prstGeom prst="rect">
+            <a:avLst/>
+          </a:prstGeom>
+          <a:noFill/>
+        </p:spPr>
+        <p:txBody>
+          <a:bodyPr wrap="square">
+            <a:spAutoFit/>
+          </a:bodyPr>
+          <a:lstStyle/>
+          <a:p>
+            <a:pPr>
+              <a:defRPr sz="2400" b="1">
                 <a:solidFill>
                   <a:srgbClr val="1B3A5C"/>
                 </a:solidFill>
               </a:defRPr>
             </a:pPr>
             <a:r>
-              <a:t>Takeaways</a:t>
-            </a:r>
-          </a:p>
-        </p:txBody>
-      </p:sp>
-      <p:sp>
-        <p:nvSpPr>
-          <p:cNvPr id="3" name="Rectangle 2"/>
+              <a:t>Today, answering either one means waiting.</a:t>
+            </a:r>
+          </a:p>
+          <a:p>
+            <a:pPr>
+              <a:spcBef>
+                <a:spcPts val="800"/>
+              </a:spcBef>
+              <a:defRPr sz="2000">
+                <a:solidFill>
+                  <a:srgbClr val="444A52"/>
+                </a:solidFill>
+              </a:defRPr>
+            </a:pPr>
+            <a:r>
+              <a:t>Breeding trials take a season. Mortality events tell you after the fact.</a:t>
+            </a:r>
+          </a:p>
+        </p:txBody>
+      </p:sp>
+      <p:sp>
+        <p:nvSpPr>
+          <p:cNvPr id="6" name="Rectangle 5"/>
           <p:cNvSpPr/>
           <p:nvPr/>
         </p:nvSpPr>
         <p:spPr>
           <a:xfrm>
-            <a:off x="640080" y="1325880"/>
-            <a:ext cx="1463040" cy="54864"/>
+            <a:off x="777240" y="5623560"/>
+            <a:ext cx="10607040" cy="777240"/>
           </a:xfrm>
           <a:prstGeom prst="rect">
             <a:avLst/>
           </a:prstGeom>
           <a:solidFill>
-            <a:srgbClr val="0E7C86"/>
+            <a:srgbClr val="EFF3F6"/>
           </a:solidFill>
-          <a:ln>
-            <a:noFill/>
+          <a:ln w="15875">
+            <a:solidFill>
+              <a:srgbClr val="0E7C86"/>
+            </a:solidFill>
           </a:ln>
           <a:effectLst/>
         </p:spPr>
@@ -7572,23 +7340,57 @@
           </a:fontRef>
         </p:style>
         <p:txBody>
-          <a:bodyPr rtlCol="0" anchor="ctr"/>
-          <a:lstStyle/>
-          <a:p>
-            <a:pPr algn="ctr"/>
-          </a:p>
-        </p:txBody>
-      </p:sp>
-      <p:sp>
-        <p:nvSpPr>
-          <p:cNvPr id="4" name="TextBox 3"/>
+          <a:bodyPr wrap="square" rtlCol="0" anchor="ctr"/>
+          <a:lstStyle/>
+          <a:p>
+            <a:pPr algn="ctr">
+              <a:defRPr sz="1900" b="1">
+                <a:solidFill>
+                  <a:srgbClr val="1B3A5C"/>
+                </a:solidFill>
+              </a:defRPr>
+            </a:pPr>
+            <a:r>
+              <a:t>We need a fast, cheap, non-lethal measure of how an oyster is doing — right now.</a:t>
+            </a:r>
+          </a:p>
+        </p:txBody>
+      </p:sp>
+    </p:spTree>
+  </p:cSld>
+  <p:clrMapOvr>
+    <a:masterClrMapping/>
+  </p:clrMapOvr>
+</p:sld>
+</file>
+
+<file path=ppt/slides/slide3.xml><?xml version="1.0" encoding="utf-8"?>
+<p:sld xmlns:a="http://schemas.openxmlformats.org/drawingml/2006/main" xmlns:r="http://schemas.openxmlformats.org/officeDocument/2006/relationships" xmlns:p="http://schemas.openxmlformats.org/presentationml/2006/main">
+  <p:cSld>
+    <p:spTree>
+      <p:nvGrpSpPr>
+        <p:cNvPr id="1" name=""/>
+        <p:cNvGrpSpPr/>
+        <p:nvPr/>
+      </p:nvGrpSpPr>
+      <p:grpSpPr>
+        <a:xfrm>
+          <a:off x="0" y="0"/>
+          <a:ext cx="0" cy="0"/>
+          <a:chOff x="0" y="0"/>
+          <a:chExt cx="0" cy="0"/>
+        </a:xfrm>
+      </p:grpSpPr>
+      <p:sp>
+        <p:nvSpPr>
+          <p:cNvPr id="2" name="TextBox 1"/>
           <p:cNvSpPr txBox="1"/>
           <p:nvPr/>
         </p:nvSpPr>
         <p:spPr>
           <a:xfrm>
-            <a:off x="777240" y="2194560"/>
-            <a:ext cx="10607040" cy="4206240"/>
+            <a:off x="640080" y="411480"/>
+            <a:ext cx="10881360" cy="914400"/>
           </a:xfrm>
           <a:prstGeom prst="rect">
             <a:avLst/>
@@ -7602,87 +7404,37 @@
           <a:lstStyle/>
           <a:p>
             <a:pPr>
-              <a:spcAft>
-                <a:spcPts val="2200"/>
-              </a:spcAft>
-              <a:defRPr sz="2200">
-                <a:solidFill>
-                  <a:srgbClr val="22262B"/>
+              <a:defRPr sz="3400" b="1">
+                <a:solidFill>
+                  <a:srgbClr val="1B3A5C"/>
                 </a:solidFill>
               </a:defRPr>
             </a:pPr>
             <a:r>
-              <a:t>• Resazurin turns metabolism into a color change — cheap, non-lethal, 96 animals at a time.</a:t>
-            </a:r>
-          </a:p>
-          <a:p>
-            <a:pPr>
-              <a:spcAft>
-                <a:spcPts val="2200"/>
-              </a:spcAft>
-              <a:defRPr sz="2200">
-                <a:solidFill>
-                  <a:srgbClr val="22262B"/>
-                </a:solidFill>
-              </a:defRPr>
-            </a:pPr>
-            <a:r>
-              <a:t>• Published and validated against oxygen consumption (PeerJ 2026).</a:t>
-            </a:r>
-          </a:p>
-          <a:p>
-            <a:pPr>
-              <a:spcAft>
-                <a:spcPts val="2200"/>
-              </a:spcAft>
-              <a:defRPr sz="2200">
-                <a:solidFill>
-                  <a:srgbClr val="22262B"/>
-                </a:solidFill>
-              </a:defRPr>
-            </a:pPr>
-            <a:r>
-              <a:t>• Predicts phenotype: metabolic curve shape forecasts family hardiness (cross-validated rho ≈ 0.8).</a:t>
-            </a:r>
-          </a:p>
-          <a:p>
-            <a:pPr>
-              <a:spcAft>
-                <a:spcPts val="2200"/>
-              </a:spcAft>
-              <a:defRPr sz="2200">
-                <a:solidFill>
-                  <a:srgbClr val="22262B"/>
-                </a:solidFill>
-              </a:defRPr>
-            </a:pPr>
-            <a:r>
-              <a:t>• Measures stress in real time: a same-day readout of how hard your crop is working.</a:t>
-            </a:r>
-          </a:p>
-        </p:txBody>
-      </p:sp>
-      <p:sp>
-        <p:nvSpPr>
-          <p:cNvPr id="5" name="Rectangle 4"/>
+              <a:t>From blue to pink: the resazurin assay</a:t>
+            </a:r>
+          </a:p>
+        </p:txBody>
+      </p:sp>
+      <p:sp>
+        <p:nvSpPr>
+          <p:cNvPr id="3" name="Rectangle 2"/>
           <p:cNvSpPr/>
           <p:nvPr/>
         </p:nvSpPr>
         <p:spPr>
           <a:xfrm>
-            <a:off x="777240" y="5623560"/>
-            <a:ext cx="10607040" cy="777240"/>
+            <a:off x="640080" y="1325880"/>
+            <a:ext cx="1463040" cy="54864"/>
           </a:xfrm>
           <a:prstGeom prst="rect">
             <a:avLst/>
           </a:prstGeom>
           <a:solidFill>
-            <a:srgbClr val="EFF3F6"/>
+            <a:srgbClr val="0E7C86"/>
           </a:solidFill>
-          <a:ln w="15875">
-            <a:solidFill>
-              <a:srgbClr val="0E7C86"/>
-            </a:solidFill>
+          <a:ln>
+            <a:noFill/>
           </a:ln>
           <a:effectLst/>
         </p:spPr>
@@ -7701,18 +7453,152 @@
           </a:fontRef>
         </p:style>
         <p:txBody>
-          <a:bodyPr rtlCol="0" anchor="ctr" wrap="square"/>
-          <a:lstStyle/>
-          <a:p>
-            <a:pPr algn="ctr">
+          <a:bodyPr rtlCol="0" anchor="ctr"/>
+          <a:lstStyle/>
+          <a:p>
+            <a:pPr algn="ctr"/>
+            <a:endParaRPr/>
+          </a:p>
+        </p:txBody>
+      </p:sp>
+      <p:sp>
+        <p:nvSpPr>
+          <p:cNvPr id="4" name="TextBox 3"/>
+          <p:cNvSpPr txBox="1"/>
+          <p:nvPr/>
+        </p:nvSpPr>
+        <p:spPr>
+          <a:xfrm>
+            <a:off x="640080" y="1463040"/>
+            <a:ext cx="10881360" cy="457200"/>
+          </a:xfrm>
+          <a:prstGeom prst="rect">
+            <a:avLst/>
+          </a:prstGeom>
+          <a:noFill/>
+        </p:spPr>
+        <p:txBody>
+          <a:bodyPr wrap="square">
+            <a:spAutoFit/>
+          </a:bodyPr>
+          <a:lstStyle/>
+          <a:p>
+            <a:pPr>
+              <a:defRPr sz="1800" i="1">
+                <a:solidFill>
+                  <a:srgbClr val="0E7C86"/>
+                </a:solidFill>
+              </a:defRPr>
+            </a:pPr>
+            <a:r>
+              <a:t>A redox dye that reports whole-organism metabolism</a:t>
+            </a:r>
+          </a:p>
+        </p:txBody>
+      </p:sp>
+      <p:pic>
+        <p:nvPicPr>
+          <p:cNvPr id="5" name="Picture 4" descr="resazurin_plates_blue_to_pink.png"/>
+          <p:cNvPicPr>
+            <a:picLocks noChangeAspect="1"/>
+          </p:cNvPicPr>
+          <p:nvPr/>
+        </p:nvPicPr>
+        <p:blipFill>
+          <a:blip r:embed="rId3"/>
+          <a:stretch>
+            <a:fillRect/>
+          </a:stretch>
+        </p:blipFill>
+        <p:spPr>
+          <a:xfrm>
+            <a:off x="777240" y="2554998"/>
+            <a:ext cx="6400800" cy="2388082"/>
+          </a:xfrm>
+          <a:prstGeom prst="rect">
+            <a:avLst/>
+          </a:prstGeom>
+        </p:spPr>
+      </p:pic>
+      <p:sp>
+        <p:nvSpPr>
+          <p:cNvPr id="6" name="TextBox 5"/>
+          <p:cNvSpPr txBox="1"/>
+          <p:nvPr/>
+        </p:nvSpPr>
+        <p:spPr>
+          <a:xfrm>
+            <a:off x="7452360" y="2103120"/>
+            <a:ext cx="3931920" cy="3474720"/>
+          </a:xfrm>
+          <a:prstGeom prst="rect">
+            <a:avLst/>
+          </a:prstGeom>
+          <a:noFill/>
+        </p:spPr>
+        <p:txBody>
+          <a:bodyPr wrap="square">
+            <a:spAutoFit/>
+          </a:bodyPr>
+          <a:lstStyle/>
+          <a:p>
+            <a:pPr>
+              <a:spcAft>
+                <a:spcPts val="1600"/>
+              </a:spcAft>
               <a:defRPr sz="1900" b="1">
                 <a:solidFill>
-                  <a:srgbClr val="1B3A5C"/>
+                  <a:srgbClr val="C2187A"/>
                 </a:solidFill>
               </a:defRPr>
             </a:pPr>
             <a:r>
-              <a:t>FUNDING  - USDA-WRAC - sormi.science</a:t>
+              <a:t>Resazurin is blue and non-fluorescent.</a:t>
+            </a:r>
+          </a:p>
+          <a:p>
+            <a:pPr>
+              <a:spcAft>
+                <a:spcPts val="1600"/>
+              </a:spcAft>
+              <a:defRPr sz="1900" b="0">
+                <a:solidFill>
+                  <a:srgbClr val="444A52"/>
+                </a:solidFill>
+              </a:defRPr>
+            </a:pPr>
+            <a:r>
+              <a:t>Living cells reduce it to resorufin — pink and strongly fluorescent.</a:t>
+            </a:r>
+          </a:p>
+          <a:p>
+            <a:pPr>
+              <a:spcAft>
+                <a:spcPts val="1600"/>
+              </a:spcAft>
+              <a:defRPr sz="1900" b="1">
+                <a:solidFill>
+                  <a:srgbClr val="C2187A"/>
+                </a:solidFill>
+              </a:defRPr>
+            </a:pPr>
+            <a:r>
+              <a:t>More metabolism = more pink = more signal.</a:t>
+            </a:r>
+          </a:p>
+          <a:p>
+            <a:pPr>
+              <a:spcAft>
+                <a:spcPts val="1600"/>
+              </a:spcAft>
+              <a:defRPr sz="1900" b="0">
+                <a:solidFill>
+                  <a:srgbClr val="444A52"/>
+                </a:solidFill>
+              </a:defRPr>
+            </a:pPr>
+            <a:r>
+              <a:t>The animal stays alive. Nothing is sacrificed.</a:t>
             </a:r>
           </a:p>
         </p:txBody>
@@ -7725,8 +7611,8 @@
 </p:sld>
 </file>
 
-<file path=ppt/slides/slide3.xml><?xml version="1.0" encoding="utf-8"?>
-<p:sld xmlns:a="http://schemas.openxmlformats.org/drawingml/2006/main" xmlns:p="http://schemas.openxmlformats.org/presentationml/2006/main" xmlns:r="http://schemas.openxmlformats.org/officeDocument/2006/relationships">
+<file path=ppt/slides/slide4.xml><?xml version="1.0" encoding="utf-8"?>
+<p:sld xmlns:a="http://schemas.openxmlformats.org/drawingml/2006/main" xmlns:r="http://schemas.openxmlformats.org/officeDocument/2006/relationships" xmlns:p="http://schemas.openxmlformats.org/presentationml/2006/main">
   <p:cSld>
     <p:spTree>
       <p:nvGrpSpPr>
@@ -7734,7 +7620,14 @@
         <p:cNvGrpSpPr/>
         <p:nvPr/>
       </p:nvGrpSpPr>
-      <p:grpSpPr/>
+      <p:grpSpPr>
+        <a:xfrm>
+          <a:off x="0" y="0"/>
+          <a:ext cx="0" cy="0"/>
+          <a:chOff x="0" y="0"/>
+          <a:chExt cx="0" cy="0"/>
+        </a:xfrm>
+      </p:grpSpPr>
       <p:sp>
         <p:nvSpPr>
           <p:cNvPr id="2" name="TextBox 1"/>
@@ -7765,7 +7658,7 @@
               </a:defRPr>
             </a:pPr>
             <a:r>
-              <a:t>From blue to pink: the resazurin assay</a:t>
+              <a:t>How a run works</a:t>
             </a:r>
           </a:p>
         </p:txBody>
@@ -7811,6 +7704,7 @@
           <a:lstStyle/>
           <a:p>
             <a:pPr algn="ctr"/>
+            <a:endParaRPr/>
           </a:p>
         </p:txBody>
       </p:sp>
@@ -7844,45 +7738,21 @@
               </a:defRPr>
             </a:pPr>
             <a:r>
-              <a:t>A redox dye that reports whole-organism metabolism</a:t>
-            </a:r>
-          </a:p>
-        </p:txBody>
-      </p:sp>
-      <p:pic>
-        <p:nvPicPr>
-          <p:cNvPr id="5" name="Picture 4" descr="resazurin_plates_blue_to_pink.png"/>
-          <p:cNvPicPr>
-            <a:picLocks noChangeAspect="1"/>
-          </p:cNvPicPr>
-          <p:nvPr/>
-        </p:nvPicPr>
-        <p:blipFill>
-          <a:blip r:embed="rId2"/>
-          <a:stretch>
-            <a:fillRect/>
-          </a:stretch>
-        </p:blipFill>
-        <p:spPr>
-          <a:xfrm>
-            <a:off x="777240" y="2554998"/>
-            <a:ext cx="6400800" cy="2388082"/>
-          </a:xfrm>
-          <a:prstGeom prst="rect">
-            <a:avLst/>
-          </a:prstGeom>
-        </p:spPr>
-      </p:pic>
-      <p:sp>
-        <p:nvSpPr>
-          <p:cNvPr id="6" name="TextBox 5"/>
+              <a:t>Roughly half a day, bench-top, ~$1 of dye per plate</a:t>
+            </a:r>
+          </a:p>
+        </p:txBody>
+      </p:sp>
+      <p:sp>
+        <p:nvSpPr>
+          <p:cNvPr id="5" name="TextBox 4"/>
           <p:cNvSpPr txBox="1"/>
           <p:nvPr/>
         </p:nvSpPr>
         <p:spPr>
           <a:xfrm>
-            <a:off x="7452360" y="2103120"/>
-            <a:ext cx="3931920" cy="3474720"/>
+            <a:off x="777240" y="2148840"/>
+            <a:ext cx="10607040" cy="4206240"/>
           </a:xfrm>
           <a:prstGeom prst="rect">
             <a:avLst/>
@@ -7899,14 +7769,14 @@
               <a:spcAft>
                 <a:spcPts val="1600"/>
               </a:spcAft>
-              <a:defRPr sz="1900" b="1">
-                <a:solidFill>
-                  <a:srgbClr val="C2187A"/>
+              <a:defRPr sz="2100">
+                <a:solidFill>
+                  <a:srgbClr val="22262B"/>
                 </a:solidFill>
               </a:defRPr>
             </a:pPr>
             <a:r>
-              <a:t>Resazurin is blue and non-fluorescent.</a:t>
+              <a:t>• Photograph animals for shell length (size normalization), then load one oyster per well.</a:t>
             </a:r>
           </a:p>
           <a:p>
@@ -7914,14 +7784,14 @@
               <a:spcAft>
                 <a:spcPts val="1600"/>
               </a:spcAft>
-              <a:defRPr sz="1900" b="0">
-                <a:solidFill>
-                  <a:srgbClr val="444A52"/>
+              <a:defRPr sz="2100">
+                <a:solidFill>
+                  <a:srgbClr val="22262B"/>
                 </a:solidFill>
               </a:defRPr>
             </a:pPr>
             <a:r>
-              <a:t>Living cells reduce it to resorufin — pink and strongly fluorescent.</a:t>
+              <a:t>• Fill wells with resazurin working solution; empty wells serve as blanks.</a:t>
             </a:r>
           </a:p>
           <a:p>
@@ -7929,14 +7799,14 @@
               <a:spcAft>
                 <a:spcPts val="1600"/>
               </a:spcAft>
-              <a:defRPr sz="1900" b="1">
-                <a:solidFill>
-                  <a:srgbClr val="C2187A"/>
+              <a:defRPr sz="2100">
+                <a:solidFill>
+                  <a:srgbClr val="22262B"/>
                 </a:solidFill>
               </a:defRPr>
             </a:pPr>
             <a:r>
-              <a:t>More metabolism = more pink = more signal.</a:t>
+              <a:t>• Read fluorescence on a plate reader (ex 530 / em 590 nm) — baseline, then hourly for 4–6 h.</a:t>
             </a:r>
           </a:p>
           <a:p>
@@ -7944,90 +7814,54 @@
               <a:spcAft>
                 <a:spcPts val="1600"/>
               </a:spcAft>
-              <a:defRPr sz="1900" b="0">
-                <a:solidFill>
-                  <a:srgbClr val="444A52"/>
+              <a:defRPr sz="2100">
+                <a:solidFill>
+                  <a:srgbClr val="22262B"/>
                 </a:solidFill>
               </a:defRPr>
             </a:pPr>
             <a:r>
-              <a:t>The animal stays alive. Nothing is sacrificed.</a:t>
-            </a:r>
-          </a:p>
-        </p:txBody>
-      </p:sp>
-    </p:spTree>
-  </p:cSld>
-  <p:clrMapOvr>
-    <a:masterClrMapping/>
-  </p:clrMapOvr>
-</p:sld>
-</file>
-
-<file path=ppt/slides/slide4.xml><?xml version="1.0" encoding="utf-8"?>
-<p:sld xmlns:a="http://schemas.openxmlformats.org/drawingml/2006/main" xmlns:p="http://schemas.openxmlformats.org/presentationml/2006/main" xmlns:r="http://schemas.openxmlformats.org/officeDocument/2006/relationships">
-  <p:cSld>
-    <p:spTree>
-      <p:nvGrpSpPr>
-        <p:cNvPr id="1" name=""/>
-        <p:cNvGrpSpPr/>
-        <p:nvPr/>
-      </p:nvGrpSpPr>
-      <p:grpSpPr/>
-      <p:sp>
-        <p:nvSpPr>
-          <p:cNvPr id="2" name="TextBox 1"/>
-          <p:cNvSpPr txBox="1"/>
-          <p:nvPr/>
-        </p:nvSpPr>
-        <p:spPr>
-          <a:xfrm>
-            <a:off x="640080" y="411480"/>
-            <a:ext cx="10881360" cy="914400"/>
-          </a:xfrm>
-          <a:prstGeom prst="rect">
-            <a:avLst/>
-          </a:prstGeom>
-          <a:noFill/>
-        </p:spPr>
-        <p:txBody>
-          <a:bodyPr wrap="square">
-            <a:spAutoFit/>
-          </a:bodyPr>
-          <a:lstStyle/>
+              <a:t>• Hold at whatever condition you want to probe: ambient, heat, low salinity, freshwater.</a:t>
+            </a:r>
+          </a:p>
           <a:p>
             <a:pPr>
-              <a:defRPr sz="3400" b="1">
-                <a:solidFill>
-                  <a:srgbClr val="1B3A5C"/>
+              <a:spcAft>
+                <a:spcPts val="1600"/>
+              </a:spcAft>
+              <a:defRPr sz="2100">
+                <a:solidFill>
+                  <a:srgbClr val="22262B"/>
                 </a:solidFill>
               </a:defRPr>
             </a:pPr>
             <a:r>
-              <a:t>How a run works</a:t>
-            </a:r>
-          </a:p>
-        </p:txBody>
-      </p:sp>
-      <p:sp>
-        <p:nvSpPr>
-          <p:cNvPr id="3" name="Rectangle 2"/>
+              <a:t>• Correct to blanks, normalize to shell length → a metabolism curve for every individual.</a:t>
+            </a:r>
+          </a:p>
+        </p:txBody>
+      </p:sp>
+      <p:sp>
+        <p:nvSpPr>
+          <p:cNvPr id="6" name="Rectangle 5"/>
           <p:cNvSpPr/>
           <p:nvPr/>
         </p:nvSpPr>
         <p:spPr>
           <a:xfrm>
-            <a:off x="640080" y="1325880"/>
-            <a:ext cx="1463040" cy="54864"/>
+            <a:off x="777240" y="5623560"/>
+            <a:ext cx="10607040" cy="777240"/>
           </a:xfrm>
           <a:prstGeom prst="rect">
             <a:avLst/>
           </a:prstGeom>
           <a:solidFill>
-            <a:srgbClr val="0E7C86"/>
+            <a:srgbClr val="EFF3F6"/>
           </a:solidFill>
-          <a:ln>
-            <a:noFill/>
+          <a:ln w="15875">
+            <a:solidFill>
+              <a:srgbClr val="0E7C86"/>
+            </a:solidFill>
           </a:ln>
           <a:effectLst/>
         </p:spPr>
@@ -8046,23 +7880,57 @@
           </a:fontRef>
         </p:style>
         <p:txBody>
-          <a:bodyPr rtlCol="0" anchor="ctr"/>
-          <a:lstStyle/>
-          <a:p>
-            <a:pPr algn="ctr"/>
-          </a:p>
-        </p:txBody>
-      </p:sp>
-      <p:sp>
-        <p:nvSpPr>
-          <p:cNvPr id="4" name="TextBox 3"/>
+          <a:bodyPr wrap="square" rtlCol="0" anchor="ctr"/>
+          <a:lstStyle/>
+          <a:p>
+            <a:pPr algn="ctr">
+              <a:defRPr sz="1900" b="1">
+                <a:solidFill>
+                  <a:srgbClr val="1B3A5C"/>
+                </a:solidFill>
+              </a:defRPr>
+            </a:pPr>
+            <a:r>
+              <a:t>96 individuals per plate, non-lethal, no respirometry hardware required.</a:t>
+            </a:r>
+          </a:p>
+        </p:txBody>
+      </p:sp>
+    </p:spTree>
+  </p:cSld>
+  <p:clrMapOvr>
+    <a:masterClrMapping/>
+  </p:clrMapOvr>
+</p:sld>
+</file>
+
+<file path=ppt/slides/slide5.xml><?xml version="1.0" encoding="utf-8"?>
+<p:sld xmlns:a="http://schemas.openxmlformats.org/drawingml/2006/main" xmlns:r="http://schemas.openxmlformats.org/officeDocument/2006/relationships" xmlns:p="http://schemas.openxmlformats.org/presentationml/2006/main">
+  <p:cSld>
+    <p:spTree>
+      <p:nvGrpSpPr>
+        <p:cNvPr id="1" name=""/>
+        <p:cNvGrpSpPr/>
+        <p:nvPr/>
+      </p:nvGrpSpPr>
+      <p:grpSpPr>
+        <a:xfrm>
+          <a:off x="0" y="0"/>
+          <a:ext cx="0" cy="0"/>
+          <a:chOff x="0" y="0"/>
+          <a:chExt cx="0" cy="0"/>
+        </a:xfrm>
+      </p:grpSpPr>
+      <p:sp>
+        <p:nvSpPr>
+          <p:cNvPr id="2" name="TextBox 1"/>
           <p:cNvSpPr txBox="1"/>
           <p:nvPr/>
         </p:nvSpPr>
         <p:spPr>
           <a:xfrm>
-            <a:off x="640080" y="1463040"/>
-            <a:ext cx="10881360" cy="457200"/>
+            <a:off x="640080" y="411480"/>
+            <a:ext cx="10881360" cy="914400"/>
           </a:xfrm>
           <a:prstGeom prst="rect">
             <a:avLst/>
@@ -8076,137 +7944,37 @@
           <a:lstStyle/>
           <a:p>
             <a:pPr>
-              <a:defRPr sz="1800" i="1">
-                <a:solidFill>
-                  <a:srgbClr val="0E7C86"/>
+              <a:defRPr sz="3400" b="1">
+                <a:solidFill>
+                  <a:srgbClr val="1B3A5C"/>
                 </a:solidFill>
               </a:defRPr>
             </a:pPr>
             <a:r>
-              <a:t>Roughly half a day, bench-top, ~$1 of dye per plate</a:t>
-            </a:r>
-          </a:p>
-        </p:txBody>
-      </p:sp>
-      <p:sp>
-        <p:nvSpPr>
-          <p:cNvPr id="5" name="TextBox 4"/>
-          <p:cNvSpPr txBox="1"/>
-          <p:nvPr/>
-        </p:nvSpPr>
-        <p:spPr>
-          <a:xfrm>
-            <a:off x="777240" y="2148840"/>
-            <a:ext cx="10607040" cy="4206240"/>
-          </a:xfrm>
-          <a:prstGeom prst="rect">
-            <a:avLst/>
-          </a:prstGeom>
-          <a:noFill/>
-        </p:spPr>
-        <p:txBody>
-          <a:bodyPr wrap="square">
-            <a:spAutoFit/>
-          </a:bodyPr>
-          <a:lstStyle/>
-          <a:p>
-            <a:pPr>
-              <a:spcAft>
-                <a:spcPts val="1600"/>
-              </a:spcAft>
-              <a:defRPr sz="2100">
-                <a:solidFill>
-                  <a:srgbClr val="22262B"/>
-                </a:solidFill>
-              </a:defRPr>
-            </a:pPr>
-            <a:r>
-              <a:t>• Photograph animals for shell length (size normalization), then load one oyster per well.</a:t>
-            </a:r>
-          </a:p>
-          <a:p>
-            <a:pPr>
-              <a:spcAft>
-                <a:spcPts val="1600"/>
-              </a:spcAft>
-              <a:defRPr sz="2100">
-                <a:solidFill>
-                  <a:srgbClr val="22262B"/>
-                </a:solidFill>
-              </a:defRPr>
-            </a:pPr>
-            <a:r>
-              <a:t>• Fill wells with resazurin working solution; empty wells serve as blanks.</a:t>
-            </a:r>
-          </a:p>
-          <a:p>
-            <a:pPr>
-              <a:spcAft>
-                <a:spcPts val="1600"/>
-              </a:spcAft>
-              <a:defRPr sz="2100">
-                <a:solidFill>
-                  <a:srgbClr val="22262B"/>
-                </a:solidFill>
-              </a:defRPr>
-            </a:pPr>
-            <a:r>
-              <a:t>• Read fluorescence on a plate reader (ex 530 / em 590 nm) — baseline, then hourly for 4–6 h.</a:t>
-            </a:r>
-          </a:p>
-          <a:p>
-            <a:pPr>
-              <a:spcAft>
-                <a:spcPts val="1600"/>
-              </a:spcAft>
-              <a:defRPr sz="2100">
-                <a:solidFill>
-                  <a:srgbClr val="22262B"/>
-                </a:solidFill>
-              </a:defRPr>
-            </a:pPr>
-            <a:r>
-              <a:t>• Hold at whatever condition you want to probe: ambient, heat, low salinity, freshwater.</a:t>
-            </a:r>
-          </a:p>
-          <a:p>
-            <a:pPr>
-              <a:spcAft>
-                <a:spcPts val="1600"/>
-              </a:spcAft>
-              <a:defRPr sz="2100">
-                <a:solidFill>
-                  <a:srgbClr val="22262B"/>
-                </a:solidFill>
-              </a:defRPr>
-            </a:pPr>
-            <a:r>
-              <a:t>• Correct to blanks, normalize to shell length → a metabolism curve for every individual.</a:t>
-            </a:r>
-          </a:p>
-        </p:txBody>
-      </p:sp>
-      <p:sp>
-        <p:nvSpPr>
-          <p:cNvPr id="6" name="Rectangle 5"/>
+              <a:t>This is published and validated</a:t>
+            </a:r>
+          </a:p>
+        </p:txBody>
+      </p:sp>
+      <p:sp>
+        <p:nvSpPr>
+          <p:cNvPr id="3" name="Rectangle 2"/>
           <p:cNvSpPr/>
           <p:nvPr/>
         </p:nvSpPr>
         <p:spPr>
           <a:xfrm>
-            <a:off x="777240" y="5623560"/>
-            <a:ext cx="10607040" cy="777240"/>
+            <a:off x="640080" y="1325880"/>
+            <a:ext cx="1463040" cy="54864"/>
           </a:xfrm>
           <a:prstGeom prst="rect">
             <a:avLst/>
           </a:prstGeom>
           <a:solidFill>
-            <a:srgbClr val="EFF3F6"/>
+            <a:srgbClr val="0E7C86"/>
           </a:solidFill>
-          <a:ln w="15875">
-            <a:solidFill>
-              <a:srgbClr val="0E7C86"/>
-            </a:solidFill>
+          <a:ln>
+            <a:noFill/>
           </a:ln>
           <a:effectLst/>
         </p:spPr>
@@ -8225,50 +7993,24 @@
           </a:fontRef>
         </p:style>
         <p:txBody>
-          <a:bodyPr rtlCol="0" anchor="ctr" wrap="square"/>
-          <a:lstStyle/>
-          <a:p>
-            <a:pPr algn="ctr">
-              <a:defRPr sz="1900" b="1">
-                <a:solidFill>
-                  <a:srgbClr val="1B3A5C"/>
-                </a:solidFill>
-              </a:defRPr>
-            </a:pPr>
-            <a:r>
-              <a:t>96 individuals per plate, non-lethal, no respirometry hardware required.</a:t>
-            </a:r>
-          </a:p>
-        </p:txBody>
-      </p:sp>
-    </p:spTree>
-  </p:cSld>
-  <p:clrMapOvr>
-    <a:masterClrMapping/>
-  </p:clrMapOvr>
-</p:sld>
-</file>
-
-<file path=ppt/slides/slide5.xml><?xml version="1.0" encoding="utf-8"?>
-<p:sld xmlns:a="http://schemas.openxmlformats.org/drawingml/2006/main" xmlns:p="http://schemas.openxmlformats.org/presentationml/2006/main" xmlns:r="http://schemas.openxmlformats.org/officeDocument/2006/relationships">
-  <p:cSld>
-    <p:spTree>
-      <p:nvGrpSpPr>
-        <p:cNvPr id="1" name=""/>
-        <p:cNvGrpSpPr/>
-        <p:nvPr/>
-      </p:nvGrpSpPr>
-      <p:grpSpPr/>
-      <p:sp>
-        <p:nvSpPr>
-          <p:cNvPr id="2" name="TextBox 1"/>
+          <a:bodyPr rtlCol="0" anchor="ctr"/>
+          <a:lstStyle/>
+          <a:p>
+            <a:pPr algn="ctr"/>
+            <a:endParaRPr/>
+          </a:p>
+        </p:txBody>
+      </p:sp>
+      <p:sp>
+        <p:nvSpPr>
+          <p:cNvPr id="4" name="TextBox 3"/>
           <p:cNvSpPr txBox="1"/>
           <p:nvPr/>
         </p:nvSpPr>
         <p:spPr>
           <a:xfrm>
-            <a:off x="640080" y="411480"/>
-            <a:ext cx="10881360" cy="914400"/>
+            <a:off x="640080" y="1463040"/>
+            <a:ext cx="10881360" cy="457200"/>
           </a:xfrm>
           <a:prstGeom prst="rect">
             <a:avLst/>
@@ -8282,37 +8024,137 @@
           <a:lstStyle/>
           <a:p>
             <a:pPr>
-              <a:defRPr sz="3400" b="1">
-                <a:solidFill>
-                  <a:srgbClr val="1B3A5C"/>
+              <a:defRPr sz="1800" i="1">
+                <a:solidFill>
+                  <a:srgbClr val="0E7C86"/>
                 </a:solidFill>
               </a:defRPr>
             </a:pPr>
             <a:r>
-              <a:t>This is published and validated</a:t>
-            </a:r>
-          </a:p>
-        </p:txBody>
-      </p:sp>
-      <p:sp>
-        <p:nvSpPr>
-          <p:cNvPr id="3" name="Rectangle 2"/>
+              <a:t>Huffmyer et al. 2026, PeerJ 14:e21542 — DOI 10.7717/peerj.21542</a:t>
+            </a:r>
+          </a:p>
+        </p:txBody>
+      </p:sp>
+      <p:sp>
+        <p:nvSpPr>
+          <p:cNvPr id="5" name="TextBox 4"/>
+          <p:cNvSpPr txBox="1"/>
+          <p:nvPr/>
+        </p:nvSpPr>
+        <p:spPr>
+          <a:xfrm>
+            <a:off x="777240" y="2148840"/>
+            <a:ext cx="10607040" cy="4206240"/>
+          </a:xfrm>
+          <a:prstGeom prst="rect">
+            <a:avLst/>
+          </a:prstGeom>
+          <a:noFill/>
+        </p:spPr>
+        <p:txBody>
+          <a:bodyPr wrap="square">
+            <a:spAutoFit/>
+          </a:bodyPr>
+          <a:lstStyle/>
+          <a:p>
+            <a:pPr>
+              <a:spcAft>
+                <a:spcPts val="1400"/>
+              </a:spcAft>
+              <a:defRPr sz="2000">
+                <a:solidFill>
+                  <a:srgbClr val="22262B"/>
+                </a:solidFill>
+              </a:defRPr>
+            </a:pPr>
+            <a:r>
+              <a:t>• Resazurin fluorescence correlates with oxygen consumption on the same individuals.</a:t>
+            </a:r>
+          </a:p>
+          <a:p>
+            <a:pPr>
+              <a:spcAft>
+                <a:spcPts val="1400"/>
+              </a:spcAft>
+              <a:defRPr sz="2000">
+                <a:solidFill>
+                  <a:srgbClr val="22262B"/>
+                </a:solidFill>
+              </a:defRPr>
+            </a:pPr>
+            <a:r>
+              <a:t>• Signal comes from live animals — live oysters far exceed empty shells and blanks (p &lt; 0.001).</a:t>
+            </a:r>
+          </a:p>
+          <a:p>
+            <a:pPr>
+              <a:spcAft>
+                <a:spcPts val="1400"/>
+              </a:spcAft>
+              <a:defRPr sz="2000">
+                <a:solidFill>
+                  <a:srgbClr val="22262B"/>
+                </a:solidFill>
+              </a:defRPr>
+            </a:pPr>
+            <a:r>
+              <a:t>• Scales with body size, so we normalize to shell length (rho = 0.62, p &lt; 0.001).</a:t>
+            </a:r>
+          </a:p>
+          <a:p>
+            <a:pPr>
+              <a:spcAft>
+                <a:spcPts val="1400"/>
+              </a:spcAft>
+              <a:defRPr sz="2000">
+                <a:solidFill>
+                  <a:srgbClr val="22262B"/>
+                </a:solidFill>
+              </a:defRPr>
+            </a:pPr>
+            <a:r>
+              <a:t>• Thermal performance curves behave as expected: metabolism peaks near 36 °C, then depresses.</a:t>
+            </a:r>
+          </a:p>
+          <a:p>
+            <a:pPr>
+              <a:spcAft>
+                <a:spcPts val="1400"/>
+              </a:spcAft>
+              <a:defRPr sz="2000">
+                <a:solidFill>
+                  <a:srgbClr val="22262B"/>
+                </a:solidFill>
+              </a:defRPr>
+            </a:pPr>
+            <a:r>
+              <a:t>• Works in both Pacific (C. gigas) and Eastern (C. virginica) oysters, seed through juveniles.</a:t>
+            </a:r>
+          </a:p>
+        </p:txBody>
+      </p:sp>
+      <p:sp>
+        <p:nvSpPr>
+          <p:cNvPr id="6" name="Rectangle 5"/>
           <p:cNvSpPr/>
           <p:nvPr/>
         </p:nvSpPr>
         <p:spPr>
           <a:xfrm>
-            <a:off x="640080" y="1325880"/>
-            <a:ext cx="1463040" cy="54864"/>
+            <a:off x="777240" y="5623560"/>
+            <a:ext cx="10607040" cy="777240"/>
           </a:xfrm>
           <a:prstGeom prst="rect">
             <a:avLst/>
           </a:prstGeom>
           <a:solidFill>
-            <a:srgbClr val="0E7C86"/>
+            <a:srgbClr val="EFF3F6"/>
           </a:solidFill>
-          <a:ln>
-            <a:noFill/>
+          <a:ln w="15875">
+            <a:solidFill>
+              <a:srgbClr val="C2187A"/>
+            </a:solidFill>
           </a:ln>
           <a:effectLst/>
         </p:spPr>
@@ -8331,167 +8173,66 @@
           </a:fontRef>
         </p:style>
         <p:txBody>
-          <a:bodyPr rtlCol="0" anchor="ctr"/>
-          <a:lstStyle/>
-          <a:p>
-            <a:pPr algn="ctr"/>
-          </a:p>
-        </p:txBody>
-      </p:sp>
-      <p:sp>
-        <p:nvSpPr>
-          <p:cNvPr id="4" name="TextBox 3"/>
-          <p:cNvSpPr txBox="1"/>
-          <p:nvPr/>
-        </p:nvSpPr>
-        <p:spPr>
-          <a:xfrm>
-            <a:off x="640080" y="1463040"/>
-            <a:ext cx="10881360" cy="457200"/>
-          </a:xfrm>
-          <a:prstGeom prst="rect">
-            <a:avLst/>
-          </a:prstGeom>
-          <a:noFill/>
-        </p:spPr>
-        <p:txBody>
-          <a:bodyPr wrap="square">
-            <a:spAutoFit/>
-          </a:bodyPr>
-          <a:lstStyle/>
-          <a:p>
-            <a:pPr>
-              <a:defRPr sz="1800" i="1">
-                <a:solidFill>
-                  <a:srgbClr val="0E7C86"/>
+          <a:bodyPr wrap="square" rtlCol="0" anchor="ctr"/>
+          <a:lstStyle/>
+          <a:p>
+            <a:pPr algn="ctr">
+              <a:defRPr sz="1900" b="1">
+                <a:solidFill>
+                  <a:srgbClr val="1B3A5C"/>
                 </a:solidFill>
               </a:defRPr>
             </a:pPr>
             <a:r>
-              <a:t>Huffmyer et al. 2026, PeerJ 14:e21542 — DOI 10.7717/peerj.21542</a:t>
-            </a:r>
-          </a:p>
-        </p:txBody>
-      </p:sp>
-      <p:sp>
-        <p:nvSpPr>
-          <p:cNvPr id="5" name="TextBox 4"/>
-          <p:cNvSpPr txBox="1"/>
-          <p:nvPr/>
-        </p:nvSpPr>
-        <p:spPr>
-          <a:xfrm>
-            <a:off x="777240" y="2148840"/>
-            <a:ext cx="10607040" cy="4206240"/>
-          </a:xfrm>
-          <a:prstGeom prst="rect">
-            <a:avLst/>
-          </a:prstGeom>
-          <a:noFill/>
-        </p:spPr>
-        <p:txBody>
-          <a:bodyPr wrap="square">
-            <a:spAutoFit/>
-          </a:bodyPr>
-          <a:lstStyle/>
-          <a:p>
-            <a:pPr>
-              <a:spcAft>
-                <a:spcPts val="1400"/>
-              </a:spcAft>
-              <a:defRPr sz="2000">
-                <a:solidFill>
-                  <a:srgbClr val="22262B"/>
-                </a:solidFill>
-              </a:defRPr>
-            </a:pPr>
-            <a:r>
-              <a:t>• Resazurin fluorescence correlates with oxygen consumption on the same individuals.</a:t>
-            </a:r>
-          </a:p>
-          <a:p>
-            <a:pPr>
-              <a:spcAft>
-                <a:spcPts val="1400"/>
-              </a:spcAft>
-              <a:defRPr sz="2000">
-                <a:solidFill>
-                  <a:srgbClr val="22262B"/>
-                </a:solidFill>
-              </a:defRPr>
-            </a:pPr>
-            <a:r>
-              <a:t>• Signal comes from live animals — live oysters far exceed empty shells and blanks (p &lt; 0.001).</a:t>
-            </a:r>
-          </a:p>
-          <a:p>
-            <a:pPr>
-              <a:spcAft>
-                <a:spcPts val="1400"/>
-              </a:spcAft>
-              <a:defRPr sz="2000">
-                <a:solidFill>
-                  <a:srgbClr val="22262B"/>
-                </a:solidFill>
-              </a:defRPr>
-            </a:pPr>
-            <a:r>
-              <a:t>• Scales with body size, so we normalize to shell length (rho = 0.62, p &lt; 0.001).</a:t>
-            </a:r>
-          </a:p>
-          <a:p>
-            <a:pPr>
-              <a:spcAft>
-                <a:spcPts val="1400"/>
-              </a:spcAft>
-              <a:defRPr sz="2000">
-                <a:solidFill>
-                  <a:srgbClr val="22262B"/>
-                </a:solidFill>
-              </a:defRPr>
-            </a:pPr>
-            <a:r>
-              <a:t>• Thermal performance curves behave as expected: metabolism peaks near 36 °C, then depresses.</a:t>
-            </a:r>
-          </a:p>
-          <a:p>
-            <a:pPr>
-              <a:spcAft>
-                <a:spcPts val="1400"/>
-              </a:spcAft>
-              <a:defRPr sz="2000">
-                <a:solidFill>
-                  <a:srgbClr val="22262B"/>
-                </a:solidFill>
-              </a:defRPr>
-            </a:pPr>
-            <a:r>
-              <a:t>• Works in both Pacific (C. gigas) and Eastern (C. virginica) oysters, seed through juveniles.</a:t>
-            </a:r>
-          </a:p>
-        </p:txBody>
-      </p:sp>
-      <p:sp>
-        <p:nvSpPr>
-          <p:cNvPr id="6" name="Rectangle 5"/>
+              <a:t>Peer-reviewed, open access, protocol included as an appendix — anyone can run it.</a:t>
+            </a:r>
+          </a:p>
+        </p:txBody>
+      </p:sp>
+    </p:spTree>
+  </p:cSld>
+  <p:clrMapOvr>
+    <a:masterClrMapping/>
+  </p:clrMapOvr>
+</p:sld>
+</file>
+
+<file path=ppt/slides/slide6.xml><?xml version="1.0" encoding="utf-8"?>
+<p:sld xmlns:a="http://schemas.openxmlformats.org/drawingml/2006/main" xmlns:r="http://schemas.openxmlformats.org/officeDocument/2006/relationships" xmlns:p="http://schemas.openxmlformats.org/presentationml/2006/main">
+  <p:cSld>
+    <p:spTree>
+      <p:nvGrpSpPr>
+        <p:cNvPr id="1" name=""/>
+        <p:cNvGrpSpPr/>
+        <p:nvPr/>
+      </p:nvGrpSpPr>
+      <p:grpSpPr>
+        <a:xfrm>
+          <a:off x="0" y="0"/>
+          <a:ext cx="0" cy="0"/>
+          <a:chOff x="0" y="0"/>
+          <a:chExt cx="0" cy="0"/>
+        </a:xfrm>
+      </p:grpSpPr>
+      <p:sp>
+        <p:nvSpPr>
+          <p:cNvPr id="2" name="Rectangle 1"/>
           <p:cNvSpPr/>
           <p:nvPr/>
         </p:nvSpPr>
         <p:spPr>
           <a:xfrm>
-            <a:off x="777240" y="5623560"/>
-            <a:ext cx="10607040" cy="777240"/>
+            <a:off x="0" y="0"/>
+            <a:ext cx="12191695" cy="6858000"/>
           </a:xfrm>
           <a:prstGeom prst="rect">
             <a:avLst/>
           </a:prstGeom>
           <a:solidFill>
-            <a:srgbClr val="EFF3F6"/>
+            <a:srgbClr val="1B3A5C"/>
           </a:solidFill>
-          <a:ln w="15875">
-            <a:solidFill>
-              <a:srgbClr val="C2187A"/>
-            </a:solidFill>
+          <a:ln>
+            <a:noFill/>
           </a:ln>
           <a:effectLst/>
         </p:spPr>
@@ -8510,18 +8251,60 @@
           </a:fontRef>
         </p:style>
         <p:txBody>
-          <a:bodyPr rtlCol="0" anchor="ctr" wrap="square"/>
-          <a:lstStyle/>
-          <a:p>
-            <a:pPr algn="ctr">
-              <a:defRPr sz="1900" b="1">
-                <a:solidFill>
-                  <a:srgbClr val="1B3A5C"/>
+          <a:bodyPr rtlCol="0" anchor="ctr"/>
+          <a:lstStyle/>
+          <a:p>
+            <a:pPr algn="ctr"/>
+            <a:endParaRPr/>
+          </a:p>
+        </p:txBody>
+      </p:sp>
+      <p:sp>
+        <p:nvSpPr>
+          <p:cNvPr id="3" name="TextBox 2"/>
+          <p:cNvSpPr txBox="1"/>
+          <p:nvPr/>
+        </p:nvSpPr>
+        <p:spPr>
+          <a:xfrm>
+            <a:off x="1097280" y="2651760"/>
+            <a:ext cx="10058400" cy="1463040"/>
+          </a:xfrm>
+          <a:prstGeom prst="rect">
+            <a:avLst/>
+          </a:prstGeom>
+          <a:noFill/>
+        </p:spPr>
+        <p:txBody>
+          <a:bodyPr wrap="square">
+            <a:spAutoFit/>
+          </a:bodyPr>
+          <a:lstStyle/>
+          <a:p>
+            <a:pPr>
+              <a:defRPr sz="4000" b="1">
+                <a:solidFill>
+                  <a:srgbClr val="FFFFFF"/>
                 </a:solidFill>
               </a:defRPr>
             </a:pPr>
             <a:r>
-              <a:t>Peer-reviewed, open access, protocol included as an appendix — anyone can run it.</a:t>
+              <a:t>Use #1 — Predicting phenotype</a:t>
+            </a:r>
+          </a:p>
+          <a:p>
+            <a:pPr>
+              <a:spcBef>
+                <a:spcPts val="1000"/>
+              </a:spcBef>
+              <a:defRPr sz="2000">
+                <a:solidFill>
+                  <a:srgbClr val="9FD3D8"/>
+                </a:solidFill>
+              </a:defRPr>
+            </a:pPr>
+            <a:r>
+              <a:t>Read metabolism today, forecast field performance later</a:t>
             </a:r>
           </a:p>
         </p:txBody>
@@ -8534,8 +8317,8 @@
 </p:sld>
 </file>
 
-<file path=ppt/slides/slide6.xml><?xml version="1.0" encoding="utf-8"?>
-<p:sld xmlns:a="http://schemas.openxmlformats.org/drawingml/2006/main" xmlns:p="http://schemas.openxmlformats.org/presentationml/2006/main" xmlns:r="http://schemas.openxmlformats.org/officeDocument/2006/relationships">
+<file path=ppt/slides/slide7.xml><?xml version="1.0" encoding="utf-8"?>
+<p:sld xmlns:a="http://schemas.openxmlformats.org/drawingml/2006/main" xmlns:r="http://schemas.openxmlformats.org/officeDocument/2006/relationships" xmlns:p="http://schemas.openxmlformats.org/presentationml/2006/main">
   <p:cSld>
     <p:spTree>
       <p:nvGrpSpPr>
@@ -8543,23 +8326,65 @@
         <p:cNvGrpSpPr/>
         <p:nvPr/>
       </p:nvGrpSpPr>
-      <p:grpSpPr/>
-      <p:sp>
-        <p:nvSpPr>
-          <p:cNvPr id="2" name="Rectangle 1"/>
+      <p:grpSpPr>
+        <a:xfrm>
+          <a:off x="0" y="0"/>
+          <a:ext cx="0" cy="0"/>
+          <a:chOff x="0" y="0"/>
+          <a:chExt cx="0" cy="0"/>
+        </a:xfrm>
+      </p:grpSpPr>
+      <p:sp>
+        <p:nvSpPr>
+          <p:cNvPr id="2" name="TextBox 1"/>
+          <p:cNvSpPr txBox="1"/>
+          <p:nvPr/>
+        </p:nvSpPr>
+        <p:spPr>
+          <a:xfrm>
+            <a:off x="640080" y="411480"/>
+            <a:ext cx="10881360" cy="914400"/>
+          </a:xfrm>
+          <a:prstGeom prst="rect">
+            <a:avLst/>
+          </a:prstGeom>
+          <a:noFill/>
+        </p:spPr>
+        <p:txBody>
+          <a:bodyPr wrap="square">
+            <a:spAutoFit/>
+          </a:bodyPr>
+          <a:lstStyle/>
+          <a:p>
+            <a:pPr>
+              <a:defRPr sz="3400" b="1">
+                <a:solidFill>
+                  <a:srgbClr val="1B3A5C"/>
+                </a:solidFill>
+              </a:defRPr>
+            </a:pPr>
+            <a:r>
+              <a:t>Metabolism already tracks outcomes</a:t>
+            </a:r>
+          </a:p>
+        </p:txBody>
+      </p:sp>
+      <p:sp>
+        <p:nvSpPr>
+          <p:cNvPr id="3" name="Rectangle 2"/>
           <p:cNvSpPr/>
           <p:nvPr/>
         </p:nvSpPr>
         <p:spPr>
           <a:xfrm>
-            <a:off x="0" y="0"/>
-            <a:ext cx="12191695" cy="6858000"/>
+            <a:off x="640080" y="1325880"/>
+            <a:ext cx="1463040" cy="54864"/>
           </a:xfrm>
           <a:prstGeom prst="rect">
             <a:avLst/>
           </a:prstGeom>
           <a:solidFill>
-            <a:srgbClr val="1B3A5C"/>
+            <a:srgbClr val="0E7C86"/>
           </a:solidFill>
           <a:ln>
             <a:noFill/>
@@ -8585,19 +8410,20 @@
           <a:lstStyle/>
           <a:p>
             <a:pPr algn="ctr"/>
-          </a:p>
-        </p:txBody>
-      </p:sp>
-      <p:sp>
-        <p:nvSpPr>
-          <p:cNvPr id="3" name="TextBox 2"/>
+            <a:endParaRPr/>
+          </a:p>
+        </p:txBody>
+      </p:sp>
+      <p:sp>
+        <p:nvSpPr>
+          <p:cNvPr id="4" name="TextBox 3"/>
           <p:cNvSpPr txBox="1"/>
           <p:nvPr/>
         </p:nvSpPr>
         <p:spPr>
           <a:xfrm>
-            <a:off x="1097280" y="2651760"/>
-            <a:ext cx="10058400" cy="1463040"/>
+            <a:off x="640080" y="1463040"/>
+            <a:ext cx="10881360" cy="457200"/>
           </a:xfrm>
           <a:prstGeom prst="rect">
             <a:avLst/>
@@ -8611,61 +8437,28 @@
           <a:lstStyle/>
           <a:p>
             <a:pPr>
-              <a:defRPr sz="4000" b="1">
-                <a:solidFill>
-                  <a:srgbClr val="FFFFFF"/>
+              <a:defRPr sz="1800" i="1">
+                <a:solidFill>
+                  <a:srgbClr val="0E7C86"/>
                 </a:solidFill>
               </a:defRPr>
             </a:pPr>
             <a:r>
-              <a:t>Use #1 — Predicting phenotype</a:t>
-            </a:r>
-          </a:p>
-          <a:p>
-            <a:pPr>
-              <a:spcBef>
-                <a:spcPts val="1000"/>
-              </a:spcBef>
-              <a:defRPr sz="2000">
-                <a:solidFill>
-                  <a:srgbClr val="9FD3D8"/>
-                </a:solidFill>
-              </a:defRPr>
-            </a:pPr>
-            <a:r>
-              <a:t>Read metabolism today, forecast field performance later</a:t>
-            </a:r>
-          </a:p>
-        </p:txBody>
-      </p:sp>
-    </p:spTree>
-  </p:cSld>
-  <p:clrMapOvr>
-    <a:masterClrMapping/>
-  </p:clrMapOvr>
-</p:sld>
-</file>
-
-<file path=ppt/slides/slide7.xml><?xml version="1.0" encoding="utf-8"?>
-<p:sld xmlns:a="http://schemas.openxmlformats.org/drawingml/2006/main" xmlns:p="http://schemas.openxmlformats.org/presentationml/2006/main" xmlns:r="http://schemas.openxmlformats.org/officeDocument/2006/relationships">
-  <p:cSld>
-    <p:spTree>
-      <p:nvGrpSpPr>
-        <p:cNvPr id="1" name=""/>
-        <p:cNvGrpSpPr/>
-        <p:nvPr/>
-      </p:nvGrpSpPr>
-      <p:grpSpPr/>
-      <p:sp>
-        <p:nvSpPr>
-          <p:cNvPr id="2" name="TextBox 1"/>
+              <a:t>Key findings from the PeerJ study</a:t>
+            </a:r>
+          </a:p>
+        </p:txBody>
+      </p:sp>
+      <p:sp>
+        <p:nvSpPr>
+          <p:cNvPr id="5" name="TextBox 4"/>
           <p:cNvSpPr txBox="1"/>
           <p:nvPr/>
         </p:nvSpPr>
         <p:spPr>
           <a:xfrm>
-            <a:off x="640080" y="411480"/>
-            <a:ext cx="10881360" cy="914400"/>
+            <a:off x="777240" y="2148840"/>
+            <a:ext cx="10607040" cy="4206240"/>
           </a:xfrm>
           <a:prstGeom prst="rect">
             <a:avLst/>
@@ -8679,37 +8472,87 @@
           <a:lstStyle/>
           <a:p>
             <a:pPr>
-              <a:defRPr sz="3400" b="1">
-                <a:solidFill>
-                  <a:srgbClr val="1B3A5C"/>
+              <a:spcAft>
+                <a:spcPts val="1800"/>
+              </a:spcAft>
+              <a:defRPr sz="2100">
+                <a:solidFill>
+                  <a:srgbClr val="22262B"/>
                 </a:solidFill>
               </a:defRPr>
             </a:pPr>
             <a:r>
-              <a:t>Metabolism already tracks outcomes</a:t>
-            </a:r>
-          </a:p>
-        </p:txBody>
-      </p:sp>
-      <p:sp>
-        <p:nvSpPr>
-          <p:cNvPr id="3" name="Rectangle 2"/>
+              <a:t>• Under acute heat stress, oysters that survived had ~52% lower cumulative metabolism than those that died.</a:t>
+            </a:r>
+          </a:p>
+          <a:p>
+            <a:pPr>
+              <a:spcAft>
+                <a:spcPts val="1800"/>
+              </a:spcAft>
+              <a:defRPr sz="2100">
+                <a:solidFill>
+                  <a:srgbClr val="22262B"/>
+                </a:solidFill>
+              </a:defRPr>
+            </a:pPr>
+            <a:r>
+              <a:t>• High metabolic output under stress = higher risk of mortality (p &lt; 0.001).</a:t>
+            </a:r>
+          </a:p>
+          <a:p>
+            <a:pPr>
+              <a:spcAft>
+                <a:spcPts val="1800"/>
+              </a:spcAft>
+              <a:defRPr sz="2100">
+                <a:solidFill>
+                  <a:srgbClr val="22262B"/>
+                </a:solidFill>
+              </a:defRPr>
+            </a:pPr>
+            <a:r>
+              <a:t>• Families differ significantly in metabolic response — the trait is genetically variable.</a:t>
+            </a:r>
+          </a:p>
+          <a:p>
+            <a:pPr>
+              <a:spcAft>
+                <a:spcPts val="1800"/>
+              </a:spcAft>
+              <a:defRPr sz="2100">
+                <a:solidFill>
+                  <a:srgbClr val="22262B"/>
+                </a:solidFill>
+              </a:defRPr>
+            </a:pPr>
+            <a:r>
+              <a:t>• In 50 selectively bred C. virginica families, metabolism correlated with predicted survival in the environment they were selected for (r = 0.56, p = 0.004).</a:t>
+            </a:r>
+          </a:p>
+        </p:txBody>
+      </p:sp>
+      <p:sp>
+        <p:nvSpPr>
+          <p:cNvPr id="6" name="Rectangle 5"/>
           <p:cNvSpPr/>
           <p:nvPr/>
         </p:nvSpPr>
         <p:spPr>
           <a:xfrm>
-            <a:off x="640080" y="1325880"/>
-            <a:ext cx="1463040" cy="54864"/>
+            <a:off x="777240" y="5623560"/>
+            <a:ext cx="10607040" cy="777240"/>
           </a:xfrm>
           <a:prstGeom prst="rect">
             <a:avLst/>
           </a:prstGeom>
           <a:solidFill>
-            <a:srgbClr val="0E7C86"/>
+            <a:srgbClr val="EFF3F6"/>
           </a:solidFill>
-          <a:ln>
-            <a:noFill/>
+          <a:ln w="15875">
+            <a:solidFill>
+              <a:srgbClr val="0E7C86"/>
+            </a:solidFill>
           </a:ln>
           <a:effectLst/>
         </p:spPr>
@@ -8728,23 +8571,57 @@
           </a:fontRef>
         </p:style>
         <p:txBody>
-          <a:bodyPr rtlCol="0" anchor="ctr"/>
-          <a:lstStyle/>
-          <a:p>
-            <a:pPr algn="ctr"/>
-          </a:p>
-        </p:txBody>
-      </p:sp>
-      <p:sp>
-        <p:nvSpPr>
-          <p:cNvPr id="4" name="TextBox 3"/>
+          <a:bodyPr wrap="square" rtlCol="0" anchor="ctr"/>
+          <a:lstStyle/>
+          <a:p>
+            <a:pPr algn="ctr">
+              <a:defRPr sz="1900" b="1">
+                <a:solidFill>
+                  <a:srgbClr val="1B3A5C"/>
+                </a:solidFill>
+              </a:defRPr>
+            </a:pPr>
+            <a:r>
+              <a:t>Metabolism is not just a health readout — it carries information about future performance.</a:t>
+            </a:r>
+          </a:p>
+        </p:txBody>
+      </p:sp>
+    </p:spTree>
+  </p:cSld>
+  <p:clrMapOvr>
+    <a:masterClrMapping/>
+  </p:clrMapOvr>
+</p:sld>
+</file>
+
+<file path=ppt/slides/slide8.xml><?xml version="1.0" encoding="utf-8"?>
+<p:sld xmlns:a="http://schemas.openxmlformats.org/drawingml/2006/main" xmlns:r="http://schemas.openxmlformats.org/officeDocument/2006/relationships" xmlns:p="http://schemas.openxmlformats.org/presentationml/2006/main">
+  <p:cSld>
+    <p:spTree>
+      <p:nvGrpSpPr>
+        <p:cNvPr id="1" name=""/>
+        <p:cNvGrpSpPr/>
+        <p:nvPr/>
+      </p:nvGrpSpPr>
+      <p:grpSpPr>
+        <a:xfrm>
+          <a:off x="0" y="0"/>
+          <a:ext cx="0" cy="0"/>
+          <a:chOff x="0" y="0"/>
+          <a:chExt cx="0" cy="0"/>
+        </a:xfrm>
+      </p:grpSpPr>
+      <p:sp>
+        <p:nvSpPr>
+          <p:cNvPr id="2" name="TextBox 1"/>
           <p:cNvSpPr txBox="1"/>
           <p:nvPr/>
         </p:nvSpPr>
         <p:spPr>
           <a:xfrm>
-            <a:off x="640080" y="1463040"/>
-            <a:ext cx="10881360" cy="457200"/>
+            <a:off x="640080" y="411480"/>
+            <a:ext cx="10881360" cy="914400"/>
           </a:xfrm>
           <a:prstGeom prst="rect">
             <a:avLst/>
@@ -8758,122 +8635,37 @@
           <a:lstStyle/>
           <a:p>
             <a:pPr>
-              <a:defRPr sz="1800" i="1">
-                <a:solidFill>
-                  <a:srgbClr val="0E7C86"/>
+              <a:defRPr sz="3400" b="1">
+                <a:solidFill>
+                  <a:srgbClr val="1B3A5C"/>
                 </a:solidFill>
               </a:defRPr>
             </a:pPr>
             <a:r>
-              <a:t>Key findings from the PeerJ study</a:t>
-            </a:r>
-          </a:p>
-        </p:txBody>
-      </p:sp>
-      <p:sp>
-        <p:nvSpPr>
-          <p:cNvPr id="5" name="TextBox 4"/>
-          <p:cNvSpPr txBox="1"/>
-          <p:nvPr/>
-        </p:nvSpPr>
-        <p:spPr>
-          <a:xfrm>
-            <a:off x="777240" y="2148840"/>
-            <a:ext cx="10607040" cy="4206240"/>
-          </a:xfrm>
-          <a:prstGeom prst="rect">
-            <a:avLst/>
-          </a:prstGeom>
-          <a:noFill/>
-        </p:spPr>
-        <p:txBody>
-          <a:bodyPr wrap="square">
-            <a:spAutoFit/>
-          </a:bodyPr>
-          <a:lstStyle/>
-          <a:p>
-            <a:pPr>
-              <a:spcAft>
-                <a:spcPts val="1800"/>
-              </a:spcAft>
-              <a:defRPr sz="2100">
-                <a:solidFill>
-                  <a:srgbClr val="22262B"/>
-                </a:solidFill>
-              </a:defRPr>
-            </a:pPr>
-            <a:r>
-              <a:t>• Under acute heat stress, oysters that survived had ~52% lower cumulative metabolism than those that died.</a:t>
-            </a:r>
-          </a:p>
-          <a:p>
-            <a:pPr>
-              <a:spcAft>
-                <a:spcPts val="1800"/>
-              </a:spcAft>
-              <a:defRPr sz="2100">
-                <a:solidFill>
-                  <a:srgbClr val="22262B"/>
-                </a:solidFill>
-              </a:defRPr>
-            </a:pPr>
-            <a:r>
-              <a:t>• High metabolic output under stress = higher risk of mortality (p &lt; 0.001).</a:t>
-            </a:r>
-          </a:p>
-          <a:p>
-            <a:pPr>
-              <a:spcAft>
-                <a:spcPts val="1800"/>
-              </a:spcAft>
-              <a:defRPr sz="2100">
-                <a:solidFill>
-                  <a:srgbClr val="22262B"/>
-                </a:solidFill>
-              </a:defRPr>
-            </a:pPr>
-            <a:r>
-              <a:t>• Families differ significantly in metabolic response — the trait is genetically variable.</a:t>
-            </a:r>
-          </a:p>
-          <a:p>
-            <a:pPr>
-              <a:spcAft>
-                <a:spcPts val="1800"/>
-              </a:spcAft>
-              <a:defRPr sz="2100">
-                <a:solidFill>
-                  <a:srgbClr val="22262B"/>
-                </a:solidFill>
-              </a:defRPr>
-            </a:pPr>
-            <a:r>
-              <a:t>• In 50 selectively bred C. virginica families, metabolism correlated with predicted survival in the environment they were selected for (r = 0.56, p = 0.004).</a:t>
-            </a:r>
-          </a:p>
-        </p:txBody>
-      </p:sp>
-      <p:sp>
-        <p:nvSpPr>
-          <p:cNvPr id="6" name="Rectangle 5"/>
+              <a:t>Testing the idea head-on: survival trials</a:t>
+            </a:r>
+          </a:p>
+        </p:txBody>
+      </p:sp>
+      <p:sp>
+        <p:nvSpPr>
+          <p:cNvPr id="3" name="Rectangle 2"/>
           <p:cNvSpPr/>
           <p:nvPr/>
         </p:nvSpPr>
         <p:spPr>
           <a:xfrm>
-            <a:off x="777240" y="5623560"/>
-            <a:ext cx="10607040" cy="777240"/>
+            <a:off x="640080" y="1325880"/>
+            <a:ext cx="1463040" cy="54864"/>
           </a:xfrm>
           <a:prstGeom prst="rect">
             <a:avLst/>
           </a:prstGeom>
           <a:solidFill>
-            <a:srgbClr val="EFF3F6"/>
+            <a:srgbClr val="0E7C86"/>
           </a:solidFill>
-          <a:ln w="15875">
-            <a:solidFill>
-              <a:srgbClr val="0E7C86"/>
-            </a:solidFill>
+          <a:ln>
+            <a:noFill/>
           </a:ln>
           <a:effectLst/>
         </p:spPr>
@@ -8892,116 +8684,11 @@
           </a:fontRef>
         </p:style>
         <p:txBody>
-          <a:bodyPr rtlCol="0" anchor="ctr" wrap="square"/>
-          <a:lstStyle/>
-          <a:p>
-            <a:pPr algn="ctr">
-              <a:defRPr sz="1900" b="1">
-                <a:solidFill>
-                  <a:srgbClr val="1B3A5C"/>
-                </a:solidFill>
-              </a:defRPr>
-            </a:pPr>
-            <a:r>
-              <a:t>Metabolism is not just a health readout — it carries information about future performance.</a:t>
-            </a:r>
-          </a:p>
-        </p:txBody>
-      </p:sp>
-    </p:spTree>
-  </p:cSld>
-  <p:clrMapOvr>
-    <a:masterClrMapping/>
-  </p:clrMapOvr>
-</p:sld>
-</file>
-
-<file path=ppt/slides/slide8.xml><?xml version="1.0" encoding="utf-8"?>
-<p:sld xmlns:a="http://schemas.openxmlformats.org/drawingml/2006/main" xmlns:p="http://schemas.openxmlformats.org/presentationml/2006/main" xmlns:r="http://schemas.openxmlformats.org/officeDocument/2006/relationships">
-  <p:cSld>
-    <p:spTree>
-      <p:nvGrpSpPr>
-        <p:cNvPr id="1" name=""/>
-        <p:cNvGrpSpPr/>
-        <p:nvPr/>
-      </p:nvGrpSpPr>
-      <p:grpSpPr/>
-      <p:sp>
-        <p:nvSpPr>
-          <p:cNvPr id="2" name="TextBox 1"/>
-          <p:cNvSpPr txBox="1"/>
-          <p:nvPr/>
-        </p:nvSpPr>
-        <p:spPr>
-          <a:xfrm>
-            <a:off x="640080" y="411480"/>
-            <a:ext cx="10881360" cy="914400"/>
-          </a:xfrm>
-          <a:prstGeom prst="rect">
-            <a:avLst/>
-          </a:prstGeom>
-          <a:noFill/>
-        </p:spPr>
-        <p:txBody>
-          <a:bodyPr wrap="square">
-            <a:spAutoFit/>
-          </a:bodyPr>
-          <a:lstStyle/>
-          <a:p>
-            <a:pPr>
-              <a:defRPr sz="3400" b="1">
-                <a:solidFill>
-                  <a:srgbClr val="1B3A5C"/>
-                </a:solidFill>
-              </a:defRPr>
-            </a:pPr>
-            <a:r>
-              <a:t>Testing the idea head-on: survival trials</a:t>
-            </a:r>
-          </a:p>
-        </p:txBody>
-      </p:sp>
-      <p:sp>
-        <p:nvSpPr>
-          <p:cNvPr id="3" name="Rectangle 2"/>
-          <p:cNvSpPr/>
-          <p:nvPr/>
-        </p:nvSpPr>
-        <p:spPr>
-          <a:xfrm>
-            <a:off x="640080" y="1325880"/>
-            <a:ext cx="1463040" cy="54864"/>
-          </a:xfrm>
-          <a:prstGeom prst="rect">
-            <a:avLst/>
-          </a:prstGeom>
-          <a:solidFill>
-            <a:srgbClr val="0E7C86"/>
-          </a:solidFill>
-          <a:ln>
-            <a:noFill/>
-          </a:ln>
-          <a:effectLst/>
-        </p:spPr>
-        <p:style>
-          <a:lnRef idx="1">
-            <a:schemeClr val="accent1"/>
-          </a:lnRef>
-          <a:fillRef idx="3">
-            <a:schemeClr val="accent1"/>
-          </a:fillRef>
-          <a:effectRef idx="2">
-            <a:schemeClr val="accent1"/>
-          </a:effectRef>
-          <a:fontRef idx="minor">
-            <a:schemeClr val="lt1"/>
-          </a:fontRef>
-        </p:style>
-        <p:txBody>
           <a:bodyPr rtlCol="0" anchor="ctr"/>
           <a:lstStyle/>
           <a:p>
             <a:pPr algn="ctr"/>
+            <a:endParaRPr/>
           </a:p>
         </p:txBody>
       </p:sp>
@@ -9059,10 +8746,34 @@
                 <a:tableStyleId>{5C22544A-7EE6-4342-B048-85BDC9FD1C3A}</a:tableStyleId>
               </a:tblPr>
               <a:tblGrid>
-                <a:gridCol w="1463040"/>
-                <a:gridCol w="3017520"/>
-                <a:gridCol w="1463040"/>
-                <a:gridCol w="1463040"/>
+                <a:gridCol w="1463040">
+                  <a:extLst>
+                    <a:ext uri="{9D8B030D-6E8A-4147-A177-3AD203B41FA5}">
+                      <a16:colId xmlns:a16="http://schemas.microsoft.com/office/drawing/2014/main" val="20000"/>
+                    </a:ext>
+                  </a:extLst>
+                </a:gridCol>
+                <a:gridCol w="3017520">
+                  <a:extLst>
+                    <a:ext uri="{9D8B030D-6E8A-4147-A177-3AD203B41FA5}">
+                      <a16:colId xmlns:a16="http://schemas.microsoft.com/office/drawing/2014/main" val="20001"/>
+                    </a:ext>
+                  </a:extLst>
+                </a:gridCol>
+                <a:gridCol w="1463040">
+                  <a:extLst>
+                    <a:ext uri="{9D8B030D-6E8A-4147-A177-3AD203B41FA5}">
+                      <a16:colId xmlns:a16="http://schemas.microsoft.com/office/drawing/2014/main" val="20002"/>
+                    </a:ext>
+                  </a:extLst>
+                </a:gridCol>
+                <a:gridCol w="1463040">
+                  <a:extLst>
+                    <a:ext uri="{9D8B030D-6E8A-4147-A177-3AD203B41FA5}">
+                      <a16:colId xmlns:a16="http://schemas.microsoft.com/office/drawing/2014/main" val="20003"/>
+                    </a:ext>
+                  </a:extLst>
+                </a:gridCol>
               </a:tblGrid>
               <a:tr h="400050">
                 <a:tc>
@@ -9125,6 +8836,11 @@
                   </a:txBody>
                   <a:tcPr/>
                 </a:tc>
+                <a:extLst>
+                  <a:ext uri="{0D108BD9-81ED-4DB2-BD59-A6C34878D82A}">
+                    <a16:rowId xmlns:a16="http://schemas.microsoft.com/office/drawing/2014/main" val="10000"/>
+                  </a:ext>
+                </a:extLst>
               </a:tr>
               <a:tr h="400050">
                 <a:tc>
@@ -9187,6 +8903,11 @@
                   </a:txBody>
                   <a:tcPr/>
                 </a:tc>
+                <a:extLst>
+                  <a:ext uri="{0D108BD9-81ED-4DB2-BD59-A6C34878D82A}">
+                    <a16:rowId xmlns:a16="http://schemas.microsoft.com/office/drawing/2014/main" val="10001"/>
+                  </a:ext>
+                </a:extLst>
               </a:tr>
               <a:tr h="400050">
                 <a:tc>
@@ -9249,6 +8970,11 @@
                   </a:txBody>
                   <a:tcPr/>
                 </a:tc>
+                <a:extLst>
+                  <a:ext uri="{0D108BD9-81ED-4DB2-BD59-A6C34878D82A}">
+                    <a16:rowId xmlns:a16="http://schemas.microsoft.com/office/drawing/2014/main" val="10002"/>
+                  </a:ext>
+                </a:extLst>
               </a:tr>
               <a:tr h="400050">
                 <a:tc>
@@ -9311,6 +9037,11 @@
                   </a:txBody>
                   <a:tcPr/>
                 </a:tc>
+                <a:extLst>
+                  <a:ext uri="{0D108BD9-81ED-4DB2-BD59-A6C34878D82A}">
+                    <a16:rowId xmlns:a16="http://schemas.microsoft.com/office/drawing/2014/main" val="10003"/>
+                  </a:ext>
+                </a:extLst>
               </a:tr>
               <a:tr h="400050">
                 <a:tc>
@@ -9373,6 +9104,11 @@
                   </a:txBody>
                   <a:tcPr/>
                 </a:tc>
+                <a:extLst>
+                  <a:ext uri="{0D108BD9-81ED-4DB2-BD59-A6C34878D82A}">
+                    <a16:rowId xmlns:a16="http://schemas.microsoft.com/office/drawing/2014/main" val="10004"/>
+                  </a:ext>
+                </a:extLst>
               </a:tr>
               <a:tr h="400050">
                 <a:tc>
@@ -9435,6 +9171,11 @@
                   </a:txBody>
                   <a:tcPr/>
                 </a:tc>
+                <a:extLst>
+                  <a:ext uri="{0D108BD9-81ED-4DB2-BD59-A6C34878D82A}">
+                    <a16:rowId xmlns:a16="http://schemas.microsoft.com/office/drawing/2014/main" val="10005"/>
+                  </a:ext>
+                </a:extLst>
               </a:tr>
               <a:tr h="400050">
                 <a:tc>
@@ -9497,6 +9238,11 @@
                   </a:txBody>
                   <a:tcPr/>
                 </a:tc>
+                <a:extLst>
+                  <a:ext uri="{0D108BD9-81ED-4DB2-BD59-A6C34878D82A}">
+                    <a16:rowId xmlns:a16="http://schemas.microsoft.com/office/drawing/2014/main" val="10006"/>
+                  </a:ext>
+                </a:extLst>
               </a:tr>
               <a:tr h="400050">
                 <a:tc>
@@ -9559,6 +9305,11 @@
                   </a:txBody>
                   <a:tcPr/>
                 </a:tc>
+                <a:extLst>
+                  <a:ext uri="{0D108BD9-81ED-4DB2-BD59-A6C34878D82A}">
+                    <a16:rowId xmlns:a16="http://schemas.microsoft.com/office/drawing/2014/main" val="10007"/>
+                  </a:ext>
+                </a:extLst>
               </a:tr>
             </a:tbl>
           </a:graphicData>
@@ -9603,7 +9354,7 @@
           </a:fontRef>
         </p:style>
         <p:txBody>
-          <a:bodyPr rtlCol="0" anchor="ctr" wrap="square"/>
+          <a:bodyPr wrap="square" rtlCol="0" anchor="ctr"/>
           <a:lstStyle/>
           <a:p>
             <a:pPr algn="ctr">
@@ -9628,7 +9379,7 @@
 </file>
 
 <file path=ppt/slides/slide9.xml><?xml version="1.0" encoding="utf-8"?>
-<p:sld xmlns:a="http://schemas.openxmlformats.org/drawingml/2006/main" xmlns:p="http://schemas.openxmlformats.org/presentationml/2006/main" xmlns:r="http://schemas.openxmlformats.org/officeDocument/2006/relationships">
+<p:sld xmlns:a="http://schemas.openxmlformats.org/drawingml/2006/main" xmlns:r="http://schemas.openxmlformats.org/officeDocument/2006/relationships" xmlns:p="http://schemas.openxmlformats.org/presentationml/2006/main">
   <p:cSld>
     <p:spTree>
       <p:nvGrpSpPr>
@@ -9636,7 +9387,14 @@
         <p:cNvGrpSpPr/>
         <p:nvPr/>
       </p:nvGrpSpPr>
-      <p:grpSpPr/>
+      <p:grpSpPr>
+        <a:xfrm>
+          <a:off x="0" y="0"/>
+          <a:ext cx="0" cy="0"/>
+          <a:chOff x="0" y="0"/>
+          <a:chExt cx="0" cy="0"/>
+        </a:xfrm>
+      </p:grpSpPr>
       <p:sp>
         <p:nvSpPr>
           <p:cNvPr id="2" name="TextBox 1"/>
@@ -9713,6 +9471,7 @@
           <a:lstStyle/>
           <a:p>
             <a:pPr algn="ctr"/>
+            <a:endParaRPr/>
           </a:p>
         </p:txBody>
       </p:sp>
@@ -9858,7 +9617,7 @@
           </a:fontRef>
         </p:style>
         <p:txBody>
-          <a:bodyPr rtlCol="0" anchor="ctr" wrap="square"/>
+          <a:bodyPr wrap="square" rtlCol="0" anchor="ctr"/>
           <a:lstStyle/>
           <a:p>
             <a:pPr algn="ctr">
@@ -10213,44 +9972,44 @@
         <a:sysClr val="window" lastClr="FFFFFF"/>
       </a:lt1>
       <a:dk2>
-        <a:srgbClr val="1F497D"/>
+        <a:srgbClr val="0E2841"/>
       </a:dk2>
       <a:lt2>
-        <a:srgbClr val="EEECE1"/>
+        <a:srgbClr val="E8E8E8"/>
       </a:lt2>
       <a:accent1>
-        <a:srgbClr val="4F81BD"/>
+        <a:srgbClr val="156082"/>
       </a:accent1>
       <a:accent2>
-        <a:srgbClr val="C0504D"/>
+        <a:srgbClr val="E97132"/>
       </a:accent2>
       <a:accent3>
-        <a:srgbClr val="9BBB59"/>
+        <a:srgbClr val="196B24"/>
       </a:accent3>
       <a:accent4>
-        <a:srgbClr val="8064A2"/>
+        <a:srgbClr val="0F9ED5"/>
       </a:accent4>
       <a:accent5>
-        <a:srgbClr val="4BACC6"/>
+        <a:srgbClr val="A02B93"/>
       </a:accent5>
       <a:accent6>
-        <a:srgbClr val="F79646"/>
+        <a:srgbClr val="4EA72E"/>
       </a:accent6>
       <a:hlink>
-        <a:srgbClr val="0000FF"/>
+        <a:srgbClr val="467886"/>
       </a:hlink>
       <a:folHlink>
-        <a:srgbClr val="800080"/>
+        <a:srgbClr val="96607D"/>
       </a:folHlink>
     </a:clrScheme>
     <a:fontScheme name="Office">
       <a:majorFont>
-        <a:latin typeface="Calibri"/>
+        <a:latin typeface="Aptos Display" panose="02110004020202020204"/>
         <a:ea typeface=""/>
         <a:cs typeface=""/>
-        <a:font script="Jpan" typeface="ＭＳ Ｐゴシック"/>
+        <a:font script="Jpan" typeface="游ゴシック Light"/>
         <a:font script="Hang" typeface="맑은 고딕"/>
-        <a:font script="Hans" typeface="宋体"/>
+        <a:font script="Hans" typeface="等线 Light"/>
         <a:font script="Hant" typeface="新細明體"/>
         <a:font script="Arab" typeface="Times New Roman"/>
         <a:font script="Hebr" typeface="Times New Roman"/>
@@ -10278,14 +10037,31 @@
         <a:font script="Viet" typeface="Times New Roman"/>
         <a:font script="Uigh" typeface="Microsoft Uighur"/>
         <a:font script="Geor" typeface="Sylfaen"/>
+        <a:font script="Armn" typeface="Arial"/>
+        <a:font script="Bugi" typeface="Leelawadee UI"/>
+        <a:font script="Bopo" typeface="Microsoft JhengHei"/>
+        <a:font script="Java" typeface="Javanese Text"/>
+        <a:font script="Lisu" typeface="Segoe UI"/>
+        <a:font script="Mymr" typeface="Myanmar Text"/>
+        <a:font script="Nkoo" typeface="Ebrima"/>
+        <a:font script="Olck" typeface="Nirmala UI"/>
+        <a:font script="Osma" typeface="Ebrima"/>
+        <a:font script="Phag" typeface="Phagspa"/>
+        <a:font script="Syrn" typeface="Estrangelo Edessa"/>
+        <a:font script="Syrj" typeface="Estrangelo Edessa"/>
+        <a:font script="Syre" typeface="Estrangelo Edessa"/>
+        <a:font script="Sora" typeface="Nirmala UI"/>
+        <a:font script="Tale" typeface="Microsoft Tai Le"/>
+        <a:font script="Talu" typeface="Microsoft New Tai Lue"/>
+        <a:font script="Tfng" typeface="Ebrima"/>
       </a:majorFont>
       <a:minorFont>
-        <a:latin typeface="Calibri"/>
+        <a:latin typeface="Aptos" panose="02110004020202020204"/>
         <a:ea typeface=""/>
         <a:cs typeface=""/>
-        <a:font script="Jpan" typeface="ＭＳ Ｐゴシック"/>
+        <a:font script="Jpan" typeface="游ゴシック"/>
         <a:font script="Hang" typeface="맑은 고딕"/>
-        <a:font script="Hans" typeface="宋体"/>
+        <a:font script="Hans" typeface="等线"/>
         <a:font script="Hant" typeface="新細明體"/>
         <a:font script="Arab" typeface="Arial"/>
         <a:font script="Hebr" typeface="Arial"/>
@@ -10313,6 +10089,23 @@
         <a:font script="Viet" typeface="Arial"/>
         <a:font script="Uigh" typeface="Microsoft Uighur"/>
         <a:font script="Geor" typeface="Sylfaen"/>
+        <a:font script="Armn" typeface="Arial"/>
+        <a:font script="Bugi" typeface="Leelawadee UI"/>
+        <a:font script="Bopo" typeface="Microsoft JhengHei"/>
+        <a:font script="Java" typeface="Javanese Text"/>
+        <a:font script="Lisu" typeface="Segoe UI"/>
+        <a:font script="Mymr" typeface="Myanmar Text"/>
+        <a:font script="Nkoo" typeface="Ebrima"/>
+        <a:font script="Olck" typeface="Nirmala UI"/>
+        <a:font script="Osma" typeface="Ebrima"/>
+        <a:font script="Phag" typeface="Phagspa"/>
+        <a:font script="Syrn" typeface="Estrangelo Edessa"/>
+        <a:font script="Syrj" typeface="Estrangelo Edessa"/>
+        <a:font script="Syre" typeface="Estrangelo Edessa"/>
+        <a:font script="Sora" typeface="Nirmala UI"/>
+        <a:font script="Tale" typeface="Microsoft Tai Le"/>
+        <a:font script="Talu" typeface="Microsoft New Tai Lue"/>
+        <a:font script="Tfng" typeface="Ebrima"/>
       </a:minorFont>
     </a:fontScheme>
     <a:fmtScheme name="Office">
@@ -10324,180 +10117,136 @@
           <a:gsLst>
             <a:gs pos="0">
               <a:schemeClr val="phClr">
-                <a:tint val="50000"/>
-                <a:satMod val="300000"/>
+                <a:lumMod val="110000"/>
+                <a:satMod val="105000"/>
+                <a:tint val="67000"/>
               </a:schemeClr>
             </a:gs>
-            <a:gs pos="35000">
+            <a:gs pos="50000">
               <a:schemeClr val="phClr">
-                <a:tint val="37000"/>
-                <a:satMod val="300000"/>
+                <a:lumMod val="105000"/>
+                <a:satMod val="103000"/>
+                <a:tint val="73000"/>
               </a:schemeClr>
             </a:gs>
             <a:gs pos="100000">
               <a:schemeClr val="phClr">
-                <a:tint val="15000"/>
-                <a:satMod val="350000"/>
+                <a:lumMod val="105000"/>
+                <a:satMod val="109000"/>
+                <a:tint val="81000"/>
               </a:schemeClr>
             </a:gs>
           </a:gsLst>
-          <a:lin ang="16200000" scaled="1"/>
+          <a:lin ang="5400000" scaled="0"/>
         </a:gradFill>
         <a:gradFill rotWithShape="1">
           <a:gsLst>
             <a:gs pos="0">
               <a:schemeClr val="phClr">
-                <a:tint val="100000"/>
+                <a:satMod val="103000"/>
+                <a:lumMod val="102000"/>
+                <a:tint val="94000"/>
+              </a:schemeClr>
+            </a:gs>
+            <a:gs pos="50000">
+              <a:schemeClr val="phClr">
+                <a:satMod val="110000"/>
+                <a:lumMod val="100000"/>
                 <a:shade val="100000"/>
-                <a:satMod val="130000"/>
               </a:schemeClr>
             </a:gs>
             <a:gs pos="100000">
               <a:schemeClr val="phClr">
-                <a:tint val="50000"/>
-                <a:shade val="100000"/>
-                <a:satMod val="350000"/>
+                <a:lumMod val="99000"/>
+                <a:satMod val="120000"/>
+                <a:shade val="78000"/>
               </a:schemeClr>
             </a:gs>
           </a:gsLst>
-          <a:lin ang="16200000" scaled="0"/>
+          <a:lin ang="5400000" scaled="0"/>
         </a:gradFill>
       </a:fillStyleLst>
       <a:lnStyleLst>
-        <a:ln w="9525" cap="flat" cmpd="sng" algn="ctr">
+        <a:ln w="12700" cap="flat" cmpd="sng" algn="ctr">
           <a:solidFill>
-            <a:schemeClr val="phClr">
-              <a:shade val="95000"/>
-              <a:satMod val="105000"/>
-            </a:schemeClr>
+            <a:schemeClr val="phClr"/>
           </a:solidFill>
           <a:prstDash val="solid"/>
+          <a:miter lim="800000"/>
+        </a:ln>
+        <a:ln w="19050" cap="flat" cmpd="sng" algn="ctr">
+          <a:solidFill>
+            <a:schemeClr val="phClr"/>
+          </a:solidFill>
+          <a:prstDash val="solid"/>
+          <a:miter lim="800000"/>
         </a:ln>
         <a:ln w="25400" cap="flat" cmpd="sng" algn="ctr">
           <a:solidFill>
             <a:schemeClr val="phClr"/>
           </a:solidFill>
           <a:prstDash val="solid"/>
-        </a:ln>
-        <a:ln w="38100" cap="flat" cmpd="sng" algn="ctr">
-          <a:solidFill>
-            <a:schemeClr val="phClr"/>
-          </a:solidFill>
-          <a:prstDash val="solid"/>
+          <a:miter lim="800000"/>
         </a:ln>
       </a:lnStyleLst>
       <a:effectStyleLst>
         <a:effectStyle>
+          <a:effectLst/>
+        </a:effectStyle>
+        <a:effectStyle>
+          <a:effectLst/>
+        </a:effectStyle>
+        <a:effectStyle>
           <a:effectLst>
-            <a:outerShdw blurRad="40000" dist="20000" dir="5400000" rotWithShape="0">
+            <a:outerShdw blurRad="57150" dist="19050" dir="5400000" algn="ctr" rotWithShape="0">
               <a:srgbClr val="000000">
-                <a:alpha val="38000"/>
+                <a:alpha val="63000"/>
               </a:srgbClr>
             </a:outerShdw>
           </a:effectLst>
-        </a:effectStyle>
-        <a:effectStyle>
-          <a:effectLst>
-            <a:outerShdw blurRad="40000" dist="23000" dir="5400000" rotWithShape="0">
-              <a:srgbClr val="000000">
-                <a:alpha val="35000"/>
-              </a:srgbClr>
-            </a:outerShdw>
-          </a:effectLst>
-        </a:effectStyle>
-        <a:effectStyle>
-          <a:effectLst>
-            <a:outerShdw blurRad="40000" dist="23000" dir="5400000" rotWithShape="0">
-              <a:srgbClr val="000000">
-                <a:alpha val="35000"/>
-              </a:srgbClr>
-            </a:outerShdw>
-          </a:effectLst>
-          <a:scene3d>
-            <a:camera prst="orthographicFront">
-              <a:rot lat="0" lon="0" rev="0"/>
-            </a:camera>
-            <a:lightRig rig="threePt" dir="t">
-              <a:rot lat="0" lon="0" rev="1200000"/>
-            </a:lightRig>
-          </a:scene3d>
-          <a:sp3d>
-            <a:bevelT w="63500" h="25400"/>
-          </a:sp3d>
         </a:effectStyle>
       </a:effectStyleLst>
       <a:bgFillStyleLst>
         <a:solidFill>
           <a:schemeClr val="phClr"/>
         </a:solidFill>
+        <a:solidFill>
+          <a:schemeClr val="phClr">
+            <a:tint val="95000"/>
+            <a:satMod val="170000"/>
+          </a:schemeClr>
+        </a:solidFill>
         <a:gradFill rotWithShape="1">
           <a:gsLst>
             <a:gs pos="0">
               <a:schemeClr val="phClr">
-                <a:tint val="40000"/>
-                <a:satMod val="350000"/>
+                <a:tint val="93000"/>
+                <a:satMod val="150000"/>
+                <a:shade val="98000"/>
+                <a:lumMod val="102000"/>
               </a:schemeClr>
             </a:gs>
-            <a:gs pos="40000">
+            <a:gs pos="50000">
               <a:schemeClr val="phClr">
-                <a:tint val="45000"/>
-                <a:shade val="99000"/>
-                <a:satMod val="350000"/>
+                <a:tint val="98000"/>
+                <a:satMod val="130000"/>
+                <a:shade val="90000"/>
+                <a:lumMod val="103000"/>
               </a:schemeClr>
             </a:gs>
             <a:gs pos="100000">
               <a:schemeClr val="phClr">
-                <a:shade val="20000"/>
-                <a:satMod val="255000"/>
+                <a:shade val="63000"/>
+                <a:satMod val="120000"/>
               </a:schemeClr>
             </a:gs>
           </a:gsLst>
-          <a:path path="circle">
-            <a:fillToRect l="50000" t="-80000" r="50000" b="180000"/>
-          </a:path>
-        </a:gradFill>
-        <a:gradFill rotWithShape="1">
-          <a:gsLst>
-            <a:gs pos="0">
-              <a:schemeClr val="phClr">
-                <a:tint val="80000"/>
-                <a:satMod val="300000"/>
-              </a:schemeClr>
-            </a:gs>
-            <a:gs pos="100000">
-              <a:schemeClr val="phClr">
-                <a:shade val="30000"/>
-                <a:satMod val="200000"/>
-              </a:schemeClr>
-            </a:gs>
-          </a:gsLst>
-          <a:path path="circle">
-            <a:fillToRect l="50000" t="50000" r="50000" b="50000"/>
-          </a:path>
+          <a:lin ang="5400000" scaled="0"/>
         </a:gradFill>
       </a:bgFillStyleLst>
     </a:fmtScheme>
   </a:themeElements>
   <a:objectDefaults>
-    <a:spDef>
-      <a:spPr/>
-      <a:bodyPr/>
-      <a:lstStyle/>
-      <a:style>
-        <a:lnRef idx="1">
-          <a:schemeClr val="accent1"/>
-        </a:lnRef>
-        <a:fillRef idx="3">
-          <a:schemeClr val="accent1"/>
-        </a:fillRef>
-        <a:effectRef idx="2">
-          <a:schemeClr val="accent1"/>
-        </a:effectRef>
-        <a:fontRef idx="minor">
-          <a:schemeClr val="lt1"/>
-        </a:fontRef>
-      </a:style>
-    </a:spDef>
     <a:lnDef>
       <a:spPr/>
       <a:bodyPr/>
@@ -10519,5 +10268,10 @@
     </a:lnDef>
   </a:objectDefaults>
   <a:extraClrSchemeLst/>
+  <a:extLst>
+    <a:ext uri="{05A4C25C-085E-4340-85A3-A5531E510DB2}">
+      <thm15:themeFamily xmlns:thm15="http://schemas.microsoft.com/office/thememl/2012/main" name="Office Theme" id="{2E142A2C-CD16-42D6-873A-C26D2A0506FA}" vid="{1BDDFF52-6CD6-40A5-AB3C-68EB2F1E4D0A}"/>
+    </a:ext>
+  </a:extLst>
 </a:theme>
 </file>